--- a/exports/pptx/lessons/middle-module-04-doshas/day-06-six-tastes.pptx
+++ b/exports/pptx/lessons/middle-module-04-doshas/day-06-six-tastes.pptx
@@ -17,9 +17,16 @@
     <p:sldId id="265" r:id="rId11"/>
     <p:sldId id="266" r:id="rId12"/>
     <p:sldId id="267" r:id="rId13"/>
+    <p:sldId id="268" r:id="rId14"/>
+    <p:sldId id="269" r:id="rId15"/>
+    <p:sldId id="270" r:id="rId16"/>
+    <p:sldId id="271" r:id="rId17"/>
+    <p:sldId id="272" r:id="rId18"/>
+    <p:sldId id="273" r:id="rId19"/>
+    <p:sldId id="274" r:id="rId20"/>
   </p:sldIdLst>
   <p:notesMasterIdLst>
-    <p:notesMasterId r:id="rId14"/>
+    <p:notesMasterId r:id="rId21"/>
   </p:notesMasterIdLst>
   <p:sldSz cx="9144000" cy="5143500"/>
   <p:notesSz cx="5143500" cy="9144000"/>
@@ -801,6 +808,622 @@
             <a:fld id="{F7021451-1387-4CA6-816F-3879F97B5CBC}" type="slidenum">
               <a:rPr lang="en-US"/>
               <a:t>12</a:t>
+            </a:fld>
+            <a:endParaRPr lang="en-US"/>
+          </a:p>
+        </p:txBody>
+      </p:sp>
+    </p:spTree>
+    <p:extLst>
+      <p:ext uri="{BB962C8B-B14F-4D97-AF65-F5344CB8AC3E}">
+        <p14:creationId xmlns:p14="http://schemas.microsoft.com/office/powerpoint/2010/main" val="1024086991"/>
+      </p:ext>
+    </p:extLst>
+  </p:cSld>
+  <p:clrMapOvr>
+    <a:masterClrMapping/>
+  </p:clrMapOvr>
+</p:notes>
+</file>
+
+<file path=ppt/notesSlides/notesSlide13.xml><?xml version="1.0" encoding="utf-8"?>
+<p:notes xmlns:a="http://schemas.openxmlformats.org/drawingml/2006/main" xmlns:r="http://schemas.openxmlformats.org/officeDocument/2006/relationships" xmlns:p="http://schemas.openxmlformats.org/presentationml/2006/main">
+  <p:cSld>
+    <p:spTree>
+      <p:nvGrpSpPr>
+        <p:cNvPr id="1" name=""/>
+        <p:cNvGrpSpPr/>
+        <p:nvPr/>
+      </p:nvGrpSpPr>
+      <p:grpSpPr>
+        <a:xfrm>
+          <a:off x="0" y="0"/>
+          <a:ext cx="0" cy="0"/>
+          <a:chOff x="0" y="0"/>
+          <a:chExt cx="0" cy="0"/>
+        </a:xfrm>
+      </p:grpSpPr>
+      <p:sp>
+        <p:nvSpPr>
+          <p:cNvPr id="2" name="Slide Image Placeholder 1"/>
+          <p:cNvSpPr>
+            <a:spLocks noGrp="1" noRot="1" noChangeAspect="1"/>
+          </p:cNvSpPr>
+          <p:nvPr>
+            <p:ph type="sldImg"/>
+          </p:nvPr>
+        </p:nvSpPr>
+        <p:spPr/>
+      </p:sp>
+      <p:sp>
+        <p:nvSpPr>
+          <p:cNvPr id="3" name="Notes Placeholder 2"/>
+          <p:cNvSpPr>
+            <a:spLocks noGrp="1"/>
+          </p:cNvSpPr>
+          <p:nvPr>
+            <p:ph type="body" idx="1"/>
+          </p:nvPr>
+        </p:nvSpPr>
+        <p:spPr/>
+        <p:txBody>
+          <a:bodyPr/>
+          <a:lstStyle/>
+          <a:p>
+            <a:r>
+              <a:rPr lang="en-US" dirty="0"/>
+              <a:t/>
+            </a:r>
+            <a:endParaRPr lang="en-US" dirty="0"/>
+          </a:p>
+        </p:txBody>
+      </p:sp>
+      <p:sp>
+        <p:nvSpPr>
+          <p:cNvPr id="4" name="Slide Number Placeholder 3"/>
+          <p:cNvSpPr>
+            <a:spLocks noGrp="1"/>
+          </p:cNvSpPr>
+          <p:nvPr>
+            <p:ph type="sldNum" sz="quarter" idx="10"/>
+          </p:nvPr>
+        </p:nvSpPr>
+        <p:spPr/>
+        <p:txBody>
+          <a:bodyPr/>
+          <a:lstStyle/>
+          <a:p>
+            <a:fld id="{F7021451-1387-4CA6-816F-3879F97B5CBC}" type="slidenum">
+              <a:rPr lang="en-US"/>
+              <a:t>13</a:t>
+            </a:fld>
+            <a:endParaRPr lang="en-US"/>
+          </a:p>
+        </p:txBody>
+      </p:sp>
+    </p:spTree>
+    <p:extLst>
+      <p:ext uri="{BB962C8B-B14F-4D97-AF65-F5344CB8AC3E}">
+        <p14:creationId xmlns:p14="http://schemas.microsoft.com/office/powerpoint/2010/main" val="1024086991"/>
+      </p:ext>
+    </p:extLst>
+  </p:cSld>
+  <p:clrMapOvr>
+    <a:masterClrMapping/>
+  </p:clrMapOvr>
+</p:notes>
+</file>
+
+<file path=ppt/notesSlides/notesSlide14.xml><?xml version="1.0" encoding="utf-8"?>
+<p:notes xmlns:a="http://schemas.openxmlformats.org/drawingml/2006/main" xmlns:r="http://schemas.openxmlformats.org/officeDocument/2006/relationships" xmlns:p="http://schemas.openxmlformats.org/presentationml/2006/main">
+  <p:cSld>
+    <p:spTree>
+      <p:nvGrpSpPr>
+        <p:cNvPr id="1" name=""/>
+        <p:cNvGrpSpPr/>
+        <p:nvPr/>
+      </p:nvGrpSpPr>
+      <p:grpSpPr>
+        <a:xfrm>
+          <a:off x="0" y="0"/>
+          <a:ext cx="0" cy="0"/>
+          <a:chOff x="0" y="0"/>
+          <a:chExt cx="0" cy="0"/>
+        </a:xfrm>
+      </p:grpSpPr>
+      <p:sp>
+        <p:nvSpPr>
+          <p:cNvPr id="2" name="Slide Image Placeholder 1"/>
+          <p:cNvSpPr>
+            <a:spLocks noGrp="1" noRot="1" noChangeAspect="1"/>
+          </p:cNvSpPr>
+          <p:nvPr>
+            <p:ph type="sldImg"/>
+          </p:nvPr>
+        </p:nvSpPr>
+        <p:spPr/>
+      </p:sp>
+      <p:sp>
+        <p:nvSpPr>
+          <p:cNvPr id="3" name="Notes Placeholder 2"/>
+          <p:cNvSpPr>
+            <a:spLocks noGrp="1"/>
+          </p:cNvSpPr>
+          <p:nvPr>
+            <p:ph type="body" idx="1"/>
+          </p:nvPr>
+        </p:nvSpPr>
+        <p:spPr/>
+        <p:txBody>
+          <a:bodyPr/>
+          <a:lstStyle/>
+          <a:p>
+            <a:r>
+              <a:rPr lang="en-US" dirty="0"/>
+              <a:t/>
+            </a:r>
+            <a:endParaRPr lang="en-US" dirty="0"/>
+          </a:p>
+        </p:txBody>
+      </p:sp>
+      <p:sp>
+        <p:nvSpPr>
+          <p:cNvPr id="4" name="Slide Number Placeholder 3"/>
+          <p:cNvSpPr>
+            <a:spLocks noGrp="1"/>
+          </p:cNvSpPr>
+          <p:nvPr>
+            <p:ph type="sldNum" sz="quarter" idx="10"/>
+          </p:nvPr>
+        </p:nvSpPr>
+        <p:spPr/>
+        <p:txBody>
+          <a:bodyPr/>
+          <a:lstStyle/>
+          <a:p>
+            <a:fld id="{F7021451-1387-4CA6-816F-3879F97B5CBC}" type="slidenum">
+              <a:rPr lang="en-US"/>
+              <a:t>14</a:t>
+            </a:fld>
+            <a:endParaRPr lang="en-US"/>
+          </a:p>
+        </p:txBody>
+      </p:sp>
+    </p:spTree>
+    <p:extLst>
+      <p:ext uri="{BB962C8B-B14F-4D97-AF65-F5344CB8AC3E}">
+        <p14:creationId xmlns:p14="http://schemas.microsoft.com/office/powerpoint/2010/main" val="1024086991"/>
+      </p:ext>
+    </p:extLst>
+  </p:cSld>
+  <p:clrMapOvr>
+    <a:masterClrMapping/>
+  </p:clrMapOvr>
+</p:notes>
+</file>
+
+<file path=ppt/notesSlides/notesSlide15.xml><?xml version="1.0" encoding="utf-8"?>
+<p:notes xmlns:a="http://schemas.openxmlformats.org/drawingml/2006/main" xmlns:r="http://schemas.openxmlformats.org/officeDocument/2006/relationships" xmlns:p="http://schemas.openxmlformats.org/presentationml/2006/main">
+  <p:cSld>
+    <p:spTree>
+      <p:nvGrpSpPr>
+        <p:cNvPr id="1" name=""/>
+        <p:cNvGrpSpPr/>
+        <p:nvPr/>
+      </p:nvGrpSpPr>
+      <p:grpSpPr>
+        <a:xfrm>
+          <a:off x="0" y="0"/>
+          <a:ext cx="0" cy="0"/>
+          <a:chOff x="0" y="0"/>
+          <a:chExt cx="0" cy="0"/>
+        </a:xfrm>
+      </p:grpSpPr>
+      <p:sp>
+        <p:nvSpPr>
+          <p:cNvPr id="2" name="Slide Image Placeholder 1"/>
+          <p:cNvSpPr>
+            <a:spLocks noGrp="1" noRot="1" noChangeAspect="1"/>
+          </p:cNvSpPr>
+          <p:nvPr>
+            <p:ph type="sldImg"/>
+          </p:nvPr>
+        </p:nvSpPr>
+        <p:spPr/>
+      </p:sp>
+      <p:sp>
+        <p:nvSpPr>
+          <p:cNvPr id="3" name="Notes Placeholder 2"/>
+          <p:cNvSpPr>
+            <a:spLocks noGrp="1"/>
+          </p:cNvSpPr>
+          <p:nvPr>
+            <p:ph type="body" idx="1"/>
+          </p:nvPr>
+        </p:nvSpPr>
+        <p:spPr/>
+        <p:txBody>
+          <a:bodyPr/>
+          <a:lstStyle/>
+          <a:p>
+            <a:r>
+              <a:rPr lang="en-US" dirty="0"/>
+              <a:t/>
+            </a:r>
+            <a:endParaRPr lang="en-US" dirty="0"/>
+          </a:p>
+        </p:txBody>
+      </p:sp>
+      <p:sp>
+        <p:nvSpPr>
+          <p:cNvPr id="4" name="Slide Number Placeholder 3"/>
+          <p:cNvSpPr>
+            <a:spLocks noGrp="1"/>
+          </p:cNvSpPr>
+          <p:nvPr>
+            <p:ph type="sldNum" sz="quarter" idx="10"/>
+          </p:nvPr>
+        </p:nvSpPr>
+        <p:spPr/>
+        <p:txBody>
+          <a:bodyPr/>
+          <a:lstStyle/>
+          <a:p>
+            <a:fld id="{F7021451-1387-4CA6-816F-3879F97B5CBC}" type="slidenum">
+              <a:rPr lang="en-US"/>
+              <a:t>15</a:t>
+            </a:fld>
+            <a:endParaRPr lang="en-US"/>
+          </a:p>
+        </p:txBody>
+      </p:sp>
+    </p:spTree>
+    <p:extLst>
+      <p:ext uri="{BB962C8B-B14F-4D97-AF65-F5344CB8AC3E}">
+        <p14:creationId xmlns:p14="http://schemas.microsoft.com/office/powerpoint/2010/main" val="1024086991"/>
+      </p:ext>
+    </p:extLst>
+  </p:cSld>
+  <p:clrMapOvr>
+    <a:masterClrMapping/>
+  </p:clrMapOvr>
+</p:notes>
+</file>
+
+<file path=ppt/notesSlides/notesSlide16.xml><?xml version="1.0" encoding="utf-8"?>
+<p:notes xmlns:a="http://schemas.openxmlformats.org/drawingml/2006/main" xmlns:r="http://schemas.openxmlformats.org/officeDocument/2006/relationships" xmlns:p="http://schemas.openxmlformats.org/presentationml/2006/main">
+  <p:cSld>
+    <p:spTree>
+      <p:nvGrpSpPr>
+        <p:cNvPr id="1" name=""/>
+        <p:cNvGrpSpPr/>
+        <p:nvPr/>
+      </p:nvGrpSpPr>
+      <p:grpSpPr>
+        <a:xfrm>
+          <a:off x="0" y="0"/>
+          <a:ext cx="0" cy="0"/>
+          <a:chOff x="0" y="0"/>
+          <a:chExt cx="0" cy="0"/>
+        </a:xfrm>
+      </p:grpSpPr>
+      <p:sp>
+        <p:nvSpPr>
+          <p:cNvPr id="2" name="Slide Image Placeholder 1"/>
+          <p:cNvSpPr>
+            <a:spLocks noGrp="1" noRot="1" noChangeAspect="1"/>
+          </p:cNvSpPr>
+          <p:nvPr>
+            <p:ph type="sldImg"/>
+          </p:nvPr>
+        </p:nvSpPr>
+        <p:spPr/>
+      </p:sp>
+      <p:sp>
+        <p:nvSpPr>
+          <p:cNvPr id="3" name="Notes Placeholder 2"/>
+          <p:cNvSpPr>
+            <a:spLocks noGrp="1"/>
+          </p:cNvSpPr>
+          <p:nvPr>
+            <p:ph type="body" idx="1"/>
+          </p:nvPr>
+        </p:nvSpPr>
+        <p:spPr/>
+        <p:txBody>
+          <a:bodyPr/>
+          <a:lstStyle/>
+          <a:p>
+            <a:r>
+              <a:rPr lang="en-US" dirty="0"/>
+              <a:t/>
+            </a:r>
+            <a:endParaRPr lang="en-US" dirty="0"/>
+          </a:p>
+        </p:txBody>
+      </p:sp>
+      <p:sp>
+        <p:nvSpPr>
+          <p:cNvPr id="4" name="Slide Number Placeholder 3"/>
+          <p:cNvSpPr>
+            <a:spLocks noGrp="1"/>
+          </p:cNvSpPr>
+          <p:nvPr>
+            <p:ph type="sldNum" sz="quarter" idx="10"/>
+          </p:nvPr>
+        </p:nvSpPr>
+        <p:spPr/>
+        <p:txBody>
+          <a:bodyPr/>
+          <a:lstStyle/>
+          <a:p>
+            <a:fld id="{F7021451-1387-4CA6-816F-3879F97B5CBC}" type="slidenum">
+              <a:rPr lang="en-US"/>
+              <a:t>16</a:t>
+            </a:fld>
+            <a:endParaRPr lang="en-US"/>
+          </a:p>
+        </p:txBody>
+      </p:sp>
+    </p:spTree>
+    <p:extLst>
+      <p:ext uri="{BB962C8B-B14F-4D97-AF65-F5344CB8AC3E}">
+        <p14:creationId xmlns:p14="http://schemas.microsoft.com/office/powerpoint/2010/main" val="1024086991"/>
+      </p:ext>
+    </p:extLst>
+  </p:cSld>
+  <p:clrMapOvr>
+    <a:masterClrMapping/>
+  </p:clrMapOvr>
+</p:notes>
+</file>
+
+<file path=ppt/notesSlides/notesSlide17.xml><?xml version="1.0" encoding="utf-8"?>
+<p:notes xmlns:a="http://schemas.openxmlformats.org/drawingml/2006/main" xmlns:r="http://schemas.openxmlformats.org/officeDocument/2006/relationships" xmlns:p="http://schemas.openxmlformats.org/presentationml/2006/main">
+  <p:cSld>
+    <p:spTree>
+      <p:nvGrpSpPr>
+        <p:cNvPr id="1" name=""/>
+        <p:cNvGrpSpPr/>
+        <p:nvPr/>
+      </p:nvGrpSpPr>
+      <p:grpSpPr>
+        <a:xfrm>
+          <a:off x="0" y="0"/>
+          <a:ext cx="0" cy="0"/>
+          <a:chOff x="0" y="0"/>
+          <a:chExt cx="0" cy="0"/>
+        </a:xfrm>
+      </p:grpSpPr>
+      <p:sp>
+        <p:nvSpPr>
+          <p:cNvPr id="2" name="Slide Image Placeholder 1"/>
+          <p:cNvSpPr>
+            <a:spLocks noGrp="1" noRot="1" noChangeAspect="1"/>
+          </p:cNvSpPr>
+          <p:nvPr>
+            <p:ph type="sldImg"/>
+          </p:nvPr>
+        </p:nvSpPr>
+        <p:spPr/>
+      </p:sp>
+      <p:sp>
+        <p:nvSpPr>
+          <p:cNvPr id="3" name="Notes Placeholder 2"/>
+          <p:cNvSpPr>
+            <a:spLocks noGrp="1"/>
+          </p:cNvSpPr>
+          <p:nvPr>
+            <p:ph type="body" idx="1"/>
+          </p:nvPr>
+        </p:nvSpPr>
+        <p:spPr/>
+        <p:txBody>
+          <a:bodyPr/>
+          <a:lstStyle/>
+          <a:p>
+            <a:r>
+              <a:rPr lang="en-US" dirty="0"/>
+              <a:t/>
+            </a:r>
+            <a:endParaRPr lang="en-US" dirty="0"/>
+          </a:p>
+        </p:txBody>
+      </p:sp>
+      <p:sp>
+        <p:nvSpPr>
+          <p:cNvPr id="4" name="Slide Number Placeholder 3"/>
+          <p:cNvSpPr>
+            <a:spLocks noGrp="1"/>
+          </p:cNvSpPr>
+          <p:nvPr>
+            <p:ph type="sldNum" sz="quarter" idx="10"/>
+          </p:nvPr>
+        </p:nvSpPr>
+        <p:spPr/>
+        <p:txBody>
+          <a:bodyPr/>
+          <a:lstStyle/>
+          <a:p>
+            <a:fld id="{F7021451-1387-4CA6-816F-3879F97B5CBC}" type="slidenum">
+              <a:rPr lang="en-US"/>
+              <a:t>17</a:t>
+            </a:fld>
+            <a:endParaRPr lang="en-US"/>
+          </a:p>
+        </p:txBody>
+      </p:sp>
+    </p:spTree>
+    <p:extLst>
+      <p:ext uri="{BB962C8B-B14F-4D97-AF65-F5344CB8AC3E}">
+        <p14:creationId xmlns:p14="http://schemas.microsoft.com/office/powerpoint/2010/main" val="1024086991"/>
+      </p:ext>
+    </p:extLst>
+  </p:cSld>
+  <p:clrMapOvr>
+    <a:masterClrMapping/>
+  </p:clrMapOvr>
+</p:notes>
+</file>
+
+<file path=ppt/notesSlides/notesSlide18.xml><?xml version="1.0" encoding="utf-8"?>
+<p:notes xmlns:a="http://schemas.openxmlformats.org/drawingml/2006/main" xmlns:r="http://schemas.openxmlformats.org/officeDocument/2006/relationships" xmlns:p="http://schemas.openxmlformats.org/presentationml/2006/main">
+  <p:cSld>
+    <p:spTree>
+      <p:nvGrpSpPr>
+        <p:cNvPr id="1" name=""/>
+        <p:cNvGrpSpPr/>
+        <p:nvPr/>
+      </p:nvGrpSpPr>
+      <p:grpSpPr>
+        <a:xfrm>
+          <a:off x="0" y="0"/>
+          <a:ext cx="0" cy="0"/>
+          <a:chOff x="0" y="0"/>
+          <a:chExt cx="0" cy="0"/>
+        </a:xfrm>
+      </p:grpSpPr>
+      <p:sp>
+        <p:nvSpPr>
+          <p:cNvPr id="2" name="Slide Image Placeholder 1"/>
+          <p:cNvSpPr>
+            <a:spLocks noGrp="1" noRot="1" noChangeAspect="1"/>
+          </p:cNvSpPr>
+          <p:nvPr>
+            <p:ph type="sldImg"/>
+          </p:nvPr>
+        </p:nvSpPr>
+        <p:spPr/>
+      </p:sp>
+      <p:sp>
+        <p:nvSpPr>
+          <p:cNvPr id="3" name="Notes Placeholder 2"/>
+          <p:cNvSpPr>
+            <a:spLocks noGrp="1"/>
+          </p:cNvSpPr>
+          <p:nvPr>
+            <p:ph type="body" idx="1"/>
+          </p:nvPr>
+        </p:nvSpPr>
+        <p:spPr/>
+        <p:txBody>
+          <a:bodyPr/>
+          <a:lstStyle/>
+          <a:p>
+            <a:r>
+              <a:rPr lang="en-US" dirty="0"/>
+              <a:t/>
+            </a:r>
+            <a:endParaRPr lang="en-US" dirty="0"/>
+          </a:p>
+        </p:txBody>
+      </p:sp>
+      <p:sp>
+        <p:nvSpPr>
+          <p:cNvPr id="4" name="Slide Number Placeholder 3"/>
+          <p:cNvSpPr>
+            <a:spLocks noGrp="1"/>
+          </p:cNvSpPr>
+          <p:nvPr>
+            <p:ph type="sldNum" sz="quarter" idx="10"/>
+          </p:nvPr>
+        </p:nvSpPr>
+        <p:spPr/>
+        <p:txBody>
+          <a:bodyPr/>
+          <a:lstStyle/>
+          <a:p>
+            <a:fld id="{F7021451-1387-4CA6-816F-3879F97B5CBC}" type="slidenum">
+              <a:rPr lang="en-US"/>
+              <a:t>18</a:t>
+            </a:fld>
+            <a:endParaRPr lang="en-US"/>
+          </a:p>
+        </p:txBody>
+      </p:sp>
+    </p:spTree>
+    <p:extLst>
+      <p:ext uri="{BB962C8B-B14F-4D97-AF65-F5344CB8AC3E}">
+        <p14:creationId xmlns:p14="http://schemas.microsoft.com/office/powerpoint/2010/main" val="1024086991"/>
+      </p:ext>
+    </p:extLst>
+  </p:cSld>
+  <p:clrMapOvr>
+    <a:masterClrMapping/>
+  </p:clrMapOvr>
+</p:notes>
+</file>
+
+<file path=ppt/notesSlides/notesSlide19.xml><?xml version="1.0" encoding="utf-8"?>
+<p:notes xmlns:a="http://schemas.openxmlformats.org/drawingml/2006/main" xmlns:r="http://schemas.openxmlformats.org/officeDocument/2006/relationships" xmlns:p="http://schemas.openxmlformats.org/presentationml/2006/main">
+  <p:cSld>
+    <p:spTree>
+      <p:nvGrpSpPr>
+        <p:cNvPr id="1" name=""/>
+        <p:cNvGrpSpPr/>
+        <p:nvPr/>
+      </p:nvGrpSpPr>
+      <p:grpSpPr>
+        <a:xfrm>
+          <a:off x="0" y="0"/>
+          <a:ext cx="0" cy="0"/>
+          <a:chOff x="0" y="0"/>
+          <a:chExt cx="0" cy="0"/>
+        </a:xfrm>
+      </p:grpSpPr>
+      <p:sp>
+        <p:nvSpPr>
+          <p:cNvPr id="2" name="Slide Image Placeholder 1"/>
+          <p:cNvSpPr>
+            <a:spLocks noGrp="1" noRot="1" noChangeAspect="1"/>
+          </p:cNvSpPr>
+          <p:nvPr>
+            <p:ph type="sldImg"/>
+          </p:nvPr>
+        </p:nvSpPr>
+        <p:spPr/>
+      </p:sp>
+      <p:sp>
+        <p:nvSpPr>
+          <p:cNvPr id="3" name="Notes Placeholder 2"/>
+          <p:cNvSpPr>
+            <a:spLocks noGrp="1"/>
+          </p:cNvSpPr>
+          <p:nvPr>
+            <p:ph type="body" idx="1"/>
+          </p:nvPr>
+        </p:nvSpPr>
+        <p:spPr/>
+        <p:txBody>
+          <a:bodyPr/>
+          <a:lstStyle/>
+          <a:p>
+            <a:r>
+              <a:rPr lang="en-US" dirty="0"/>
+              <a:t/>
+            </a:r>
+            <a:endParaRPr lang="en-US" dirty="0"/>
+          </a:p>
+        </p:txBody>
+      </p:sp>
+      <p:sp>
+        <p:nvSpPr>
+          <p:cNvPr id="4" name="Slide Number Placeholder 3"/>
+          <p:cNvSpPr>
+            <a:spLocks noGrp="1"/>
+          </p:cNvSpPr>
+          <p:nvPr>
+            <p:ph type="sldNum" sz="quarter" idx="10"/>
+          </p:nvPr>
+        </p:nvSpPr>
+        <p:spPr/>
+        <p:txBody>
+          <a:bodyPr/>
+          <a:lstStyle/>
+          <a:p>
+            <a:fld id="{F7021451-1387-4CA6-816F-3879F97B5CBC}" type="slidenum">
+              <a:rPr lang="en-US"/>
+              <a:t>19</a:t>
             </a:fld>
             <a:endParaRPr lang="en-US"/>
           </a:p>
@@ -2100,194 +2723,6 @@
         </p:nvSpPr>
         <p:spPr>
           <a:xfrm>
-            <a:off x="406301" y="1223963"/>
-            <a:ext cx="8498026" cy="274290"/>
-          </a:xfrm>
-          <a:prstGeom prst="rect">
-            <a:avLst/>
-          </a:prstGeom>
-          <a:noFill/>
-          <a:ln/>
-        </p:spPr>
-        <p:txBody>
-          <a:bodyPr wrap="square" lIns="0" tIns="0" rIns="0" bIns="0" rtlCol="0" anchor="t"/>
-          <a:lstStyle/>
-          <a:p>
-            <a:pPr algn="l" indent="0" marL="0">
-              <a:lnSpc>
-                <a:spcPts val="2160"/>
-              </a:lnSpc>
-              <a:spcBef>
-                <a:spcPts val="600"/>
-              </a:spcBef>
-              <a:spcAft>
-                <a:spcPts val="800"/>
-              </a:spcAft>
-              <a:buNone/>
-            </a:pPr>
-            <a:r>
-              <a:rPr lang="en-US" sz="1800" b="1" dirty="0">
-                <a:solidFill>
-                  <a:srgbClr val="FE4447"/>
-                </a:solidFill>
-                <a:latin typeface="Georgia" pitchFamily="34" charset="0"/>
-                <a:ea typeface="Georgia" pitchFamily="34" charset="-122"/>
-                <a:cs typeface="Georgia" pitchFamily="34" charset="-120"/>
-              </a:rPr>
-              <a:t>Learning objective</a:t>
-            </a:r>
-            <a:endParaRPr lang="en-US" sz="1800" dirty="0"/>
-          </a:p>
-        </p:txBody>
-      </p:sp>
-      <p:sp>
-        <p:nvSpPr>
-          <p:cNvPr id="6" name="Text 4"/>
-          <p:cNvSpPr/>
-          <p:nvPr/>
-        </p:nvSpPr>
-        <p:spPr>
-          <a:xfrm>
-            <a:off x="406301" y="1637854"/>
-            <a:ext cx="8498026" cy="426541"/>
-          </a:xfrm>
-          <a:prstGeom prst="rect">
-            <a:avLst/>
-          </a:prstGeom>
-          <a:noFill/>
-          <a:ln/>
-        </p:spPr>
-        <p:txBody>
-          <a:bodyPr wrap="square" lIns="0" tIns="0" rIns="0" bIns="0" rtlCol="0" anchor="t"/>
-          <a:lstStyle/>
-          <a:p>
-            <a:pPr algn="l" indent="0" marL="0">
-              <a:lnSpc>
-                <a:spcPts val="1680"/>
-              </a:lnSpc>
-              <a:spcBef>
-                <a:spcPts val="300"/>
-              </a:spcBef>
-              <a:spcAft>
-                <a:spcPts val="300"/>
-              </a:spcAft>
-              <a:buNone/>
-            </a:pPr>
-            <a:r>
-              <a:rPr lang="en-US" sz="1200" dirty="0">
-                <a:solidFill>
-                  <a:srgbClr val="1C2833"/>
-                </a:solidFill>
-                <a:latin typeface="Arial" pitchFamily="34" charset="0"/>
-                <a:ea typeface="Arial" pitchFamily="34" charset="-122"/>
-                <a:cs typeface="Arial" pitchFamily="34" charset="-120"/>
-              </a:rPr>
-              <a:t>By the end of this lesson, students name the </a:t>
-            </a:r>
-            <a:pPr algn="l" indent="0" marL="0">
-              <a:lnSpc>
-                <a:spcPts val="1680"/>
-              </a:lnSpc>
-              <a:spcBef>
-                <a:spcPts val="300"/>
-              </a:spcBef>
-              <a:spcAft>
-                <a:spcPts val="300"/>
-              </a:spcAft>
-              <a:buNone/>
-            </a:pPr>
-            <a:r>
-              <a:rPr lang="en-US" sz="1200" i="1" dirty="0">
-                <a:solidFill>
-                  <a:srgbClr val="1C2833"/>
-                </a:solidFill>
-                <a:latin typeface="Arial" pitchFamily="34" charset="0"/>
-                <a:ea typeface="Arial" pitchFamily="34" charset="-122"/>
-                <a:cs typeface="Arial" pitchFamily="34" charset="-120"/>
-              </a:rPr>
-              <a:t>ṣaḍ-rasa</a:t>
-            </a:r>
-            <a:pPr algn="l" indent="0" marL="0">
-              <a:lnSpc>
-                <a:spcPts val="1680"/>
-              </a:lnSpc>
-              <a:spcBef>
-                <a:spcPts val="300"/>
-              </a:spcBef>
-              <a:spcAft>
-                <a:spcPts val="300"/>
-              </a:spcAft>
-              <a:buNone/>
-            </a:pPr>
-            <a:r>
-              <a:rPr lang="en-US" sz="1200" dirty="0">
-                <a:solidFill>
-                  <a:srgbClr val="1C2833"/>
-                </a:solidFill>
-                <a:latin typeface="Arial" pitchFamily="34" charset="0"/>
-                <a:ea typeface="Arial" pitchFamily="34" charset="-122"/>
-                <a:cs typeface="Arial" pitchFamily="34" charset="-120"/>
-              </a:rPr>
-              <a:t> (six tastes) in IAST with English meaning, identify which tastes calm and which aggravate each </a:t>
-            </a:r>
-            <a:pPr algn="l" indent="0" marL="0">
-              <a:lnSpc>
-                <a:spcPts val="1680"/>
-              </a:lnSpc>
-              <a:spcBef>
-                <a:spcPts val="300"/>
-              </a:spcBef>
-              <a:spcAft>
-                <a:spcPts val="300"/>
-              </a:spcAft>
-              <a:buNone/>
-            </a:pPr>
-            <a:r>
-              <a:rPr lang="en-US" sz="1200" i="1" dirty="0">
-                <a:solidFill>
-                  <a:srgbClr val="1C2833"/>
-                </a:solidFill>
-                <a:latin typeface="Arial" pitchFamily="34" charset="0"/>
-                <a:ea typeface="Arial" pitchFamily="34" charset="-122"/>
-                <a:cs typeface="Arial" pitchFamily="34" charset="-120"/>
-              </a:rPr>
-              <a:t>doṣa</a:t>
-            </a:r>
-            <a:pPr algn="l" indent="0" marL="0">
-              <a:lnSpc>
-                <a:spcPts val="1680"/>
-              </a:lnSpc>
-              <a:spcBef>
-                <a:spcPts val="300"/>
-              </a:spcBef>
-              <a:spcAft>
-                <a:spcPts val="300"/>
-              </a:spcAft>
-              <a:buNone/>
-            </a:pPr>
-            <a:r>
-              <a:rPr lang="en-US" sz="1200" dirty="0">
-                <a:solidFill>
-                  <a:srgbClr val="1C2833"/>
-                </a:solidFill>
-                <a:latin typeface="Arial" pitchFamily="34" charset="0"/>
-                <a:ea typeface="Arial" pitchFamily="34" charset="-122"/>
-                <a:cs typeface="Arial" pitchFamily="34" charset="-120"/>
-              </a:rPr>
-              <a:t>, and articulate why food is a primary lever in Ayurvedic balance.</a:t>
-            </a:r>
-            <a:endParaRPr lang="en-US" sz="1200" dirty="0"/>
-          </a:p>
-        </p:txBody>
-      </p:sp>
-      <p:sp>
-        <p:nvSpPr>
-          <p:cNvPr id="7" name="Text 5"/>
-          <p:cNvSpPr/>
-          <p:nvPr/>
-        </p:nvSpPr>
-        <p:spPr>
-          <a:xfrm>
             <a:off x="406301" y="4434929"/>
             <a:ext cx="8498026" cy="213271"/>
           </a:xfrm>
@@ -2432,7 +2867,7 @@
                 <a:ea typeface="Georgia" pitchFamily="34" charset="-122"/>
                 <a:cs typeface="Georgia" pitchFamily="34" charset="-120"/>
               </a:rPr>
-              <a:t>Differentiation</a:t>
+              <a:t>Core (15 min) (cont.)</a:t>
             </a:r>
             <a:endParaRPr lang="en-US" sz="1800" dirty="0"/>
           </a:p>
@@ -2447,7 +2882,7 @@
         <p:spPr>
           <a:xfrm>
             <a:off x="634901" y="883593"/>
-            <a:ext cx="8102798" cy="937022"/>
+            <a:ext cx="8102798" cy="281880"/>
           </a:xfrm>
           <a:prstGeom prst="rect">
             <a:avLst/>
@@ -2478,7 +2913,7 @@
                 <a:ea typeface="Arial" pitchFamily="34" charset="-122"/>
                 <a:cs typeface="Arial" pitchFamily="34" charset="-120"/>
               </a:rPr>
-              <a:t>One tier up:</a:t>
+              <a:t>The rule of thumb</a:t>
             </a:r>
             <a:pPr algn="l" indent="0" marL="0">
               <a:lnSpc>
@@ -2498,10 +2933,32 @@
                 <a:ea typeface="Arial" pitchFamily="34" charset="-122"/>
                 <a:cs typeface="Arial" pitchFamily="34" charset="-120"/>
               </a:rPr>
-              <a:t> Pick a classic dish from any cuisine (your family's, or anyone's). Identify the six tastes in it. What balance is the recipe achieving?</a:t>
+              <a:t> (state simply):</a:t>
             </a:r>
             <a:endParaRPr lang="en-US" sz="1200" dirty="0"/>
           </a:p>
+        </p:txBody>
+      </p:sp>
+      <p:sp>
+        <p:nvSpPr>
+          <p:cNvPr id="5" name="Text 3"/>
+          <p:cNvSpPr/>
+          <p:nvPr/>
+        </p:nvSpPr>
+        <p:spPr>
+          <a:xfrm>
+            <a:off x="634901" y="1266974"/>
+            <a:ext cx="8102798" cy="769441"/>
+          </a:xfrm>
+          <a:prstGeom prst="rect">
+            <a:avLst/>
+          </a:prstGeom>
+          <a:noFill/>
+          <a:ln/>
+        </p:spPr>
+        <p:txBody>
+          <a:bodyPr wrap="square" lIns="0" tIns="0" rIns="0" bIns="0" rtlCol="0" anchor="t"/>
+          <a:lstStyle/>
           <a:p>
             <a:pPr algn="l" marL="342900" indent="-342900">
               <a:lnSpc>
@@ -2514,6 +2971,46 @@
               <a:buChar char="•"/>
             </a:pPr>
             <a:r>
+              <a:rPr lang="en-US" sz="1200" i="1" dirty="0">
+                <a:solidFill>
+                  <a:srgbClr val="1C2833"/>
+                </a:solidFill>
+                <a:latin typeface="Arial" pitchFamily="34" charset="0"/>
+                <a:ea typeface="Arial" pitchFamily="34" charset="-122"/>
+                <a:cs typeface="Arial" pitchFamily="34" charset="-120"/>
+              </a:rPr>
+              <a:t>Vāta</a:t>
+            </a:r>
+            <a:pPr algn="l" indent="0" marL="0">
+              <a:lnSpc>
+                <a:spcPts val="1620"/>
+              </a:lnSpc>
+              <a:spcAft>
+                <a:spcPts val="300"/>
+              </a:spcAft>
+              <a:buNone/>
+            </a:pPr>
+            <a:r>
+              <a:rPr lang="en-US" sz="1200" dirty="0">
+                <a:solidFill>
+                  <a:srgbClr val="1C2833"/>
+                </a:solidFill>
+                <a:latin typeface="Arial" pitchFamily="34" charset="0"/>
+                <a:ea typeface="Arial" pitchFamily="34" charset="-122"/>
+                <a:cs typeface="Arial" pitchFamily="34" charset="-120"/>
+              </a:rPr>
+              <a:t> is calmed by </a:t>
+            </a:r>
+            <a:pPr algn="l" indent="0" marL="0">
+              <a:lnSpc>
+                <a:spcPts val="1620"/>
+              </a:lnSpc>
+              <a:spcAft>
+                <a:spcPts val="300"/>
+              </a:spcAft>
+              <a:buNone/>
+            </a:pPr>
+            <a:r>
               <a:rPr lang="en-US" sz="1200" b="1" dirty="0">
                 <a:solidFill>
                   <a:srgbClr val="1C2833"/>
@@ -2522,7 +3019,7 @@
                 <a:ea typeface="Arial" pitchFamily="34" charset="-122"/>
                 <a:cs typeface="Arial" pitchFamily="34" charset="-120"/>
               </a:rPr>
-              <a:t>One tier down:</a:t>
+              <a:t>sweet, sour, salty</a:t>
             </a:r>
             <a:pPr algn="l" indent="0" marL="0">
               <a:lnSpc>
@@ -2542,16 +3039,20 @@
                 <a:ea typeface="Arial" pitchFamily="34" charset="-122"/>
                 <a:cs typeface="Arial" pitchFamily="34" charset="-120"/>
               </a:rPr>
-              <a:t> Remember just three tastes — sweet, sour, salty (the </a:t>
-            </a:r>
-            <a:pPr algn="l" indent="0" marL="0">
-              <a:lnSpc>
-                <a:spcPts val="1620"/>
-              </a:lnSpc>
-              <a:spcAft>
-                <a:spcPts val="300"/>
-              </a:spcAft>
-              <a:buNone/>
+              <a:t> — warm, oily, grounding foods. Aggravated by bitter, astringent, pungent.</a:t>
+            </a:r>
+            <a:endParaRPr lang="en-US" sz="1200" dirty="0"/>
+          </a:p>
+          <a:p>
+            <a:pPr algn="l" marL="342900" indent="-342900">
+              <a:lnSpc>
+                <a:spcPts val="1620"/>
+              </a:lnSpc>
+              <a:spcAft>
+                <a:spcPts val="300"/>
+              </a:spcAft>
+              <a:buSzPct val="100000"/>
+              <a:buChar char="•"/>
             </a:pPr>
             <a:r>
               <a:rPr lang="en-US" sz="1200" i="1" dirty="0">
@@ -2562,7 +3063,7 @@
                 <a:ea typeface="Arial" pitchFamily="34" charset="-122"/>
                 <a:cs typeface="Arial" pitchFamily="34" charset="-120"/>
               </a:rPr>
-              <a:t>vāta</a:t>
+              <a:t>Pitta</a:t>
             </a:r>
             <a:pPr algn="l" indent="0" marL="0">
               <a:lnSpc>
@@ -2582,15 +3083,139 @@
                 <a:ea typeface="Arial" pitchFamily="34" charset="-122"/>
                 <a:cs typeface="Arial" pitchFamily="34" charset="-120"/>
               </a:rPr>
-              <a:t>-calming three). They're the ones in most home meals.</a:t>
+              <a:t> is calmed by </a:t>
+            </a:r>
+            <a:pPr algn="l" indent="0" marL="0">
+              <a:lnSpc>
+                <a:spcPts val="1620"/>
+              </a:lnSpc>
+              <a:spcAft>
+                <a:spcPts val="300"/>
+              </a:spcAft>
+              <a:buNone/>
+            </a:pPr>
+            <a:r>
+              <a:rPr lang="en-US" sz="1200" b="1" dirty="0">
+                <a:solidFill>
+                  <a:srgbClr val="1C2833"/>
+                </a:solidFill>
+                <a:latin typeface="Arial" pitchFamily="34" charset="0"/>
+                <a:ea typeface="Arial" pitchFamily="34" charset="-122"/>
+                <a:cs typeface="Arial" pitchFamily="34" charset="-120"/>
+              </a:rPr>
+              <a:t>sweet, bitter, astringent</a:t>
+            </a:r>
+            <a:pPr algn="l" indent="0" marL="0">
+              <a:lnSpc>
+                <a:spcPts val="1620"/>
+              </a:lnSpc>
+              <a:spcAft>
+                <a:spcPts val="300"/>
+              </a:spcAft>
+              <a:buNone/>
+            </a:pPr>
+            <a:r>
+              <a:rPr lang="en-US" sz="1200" dirty="0">
+                <a:solidFill>
+                  <a:srgbClr val="1C2833"/>
+                </a:solidFill>
+                <a:latin typeface="Arial" pitchFamily="34" charset="0"/>
+                <a:ea typeface="Arial" pitchFamily="34" charset="-122"/>
+                <a:cs typeface="Arial" pitchFamily="34" charset="-120"/>
+              </a:rPr>
+              <a:t> — cool, mild foods. Aggravated by sour, salty, pungent.</a:t>
             </a:r>
             <a:endParaRPr lang="en-US" sz="1200" dirty="0"/>
           </a:p>
-        </p:txBody>
-      </p:sp>
-      <p:sp>
-        <p:nvSpPr>
-          <p:cNvPr id="5" name="Text 3"/>
+          <a:p>
+            <a:pPr algn="l" marL="342900" indent="-342900">
+              <a:lnSpc>
+                <a:spcPts val="1620"/>
+              </a:lnSpc>
+              <a:spcAft>
+                <a:spcPts val="300"/>
+              </a:spcAft>
+              <a:buSzPct val="100000"/>
+              <a:buChar char="•"/>
+            </a:pPr>
+            <a:r>
+              <a:rPr lang="en-US" sz="1200" i="1" dirty="0">
+                <a:solidFill>
+                  <a:srgbClr val="1C2833"/>
+                </a:solidFill>
+                <a:latin typeface="Arial" pitchFamily="34" charset="0"/>
+                <a:ea typeface="Arial" pitchFamily="34" charset="-122"/>
+                <a:cs typeface="Arial" pitchFamily="34" charset="-120"/>
+              </a:rPr>
+              <a:t>Kapha</a:t>
+            </a:r>
+            <a:pPr algn="l" indent="0" marL="0">
+              <a:lnSpc>
+                <a:spcPts val="1620"/>
+              </a:lnSpc>
+              <a:spcAft>
+                <a:spcPts val="300"/>
+              </a:spcAft>
+              <a:buNone/>
+            </a:pPr>
+            <a:r>
+              <a:rPr lang="en-US" sz="1200" dirty="0">
+                <a:solidFill>
+                  <a:srgbClr val="1C2833"/>
+                </a:solidFill>
+                <a:latin typeface="Arial" pitchFamily="34" charset="0"/>
+                <a:ea typeface="Arial" pitchFamily="34" charset="-122"/>
+                <a:cs typeface="Arial" pitchFamily="34" charset="-120"/>
+              </a:rPr>
+              <a:t> is calmed by </a:t>
+            </a:r>
+            <a:pPr algn="l" indent="0" marL="0">
+              <a:lnSpc>
+                <a:spcPts val="1620"/>
+              </a:lnSpc>
+              <a:spcAft>
+                <a:spcPts val="300"/>
+              </a:spcAft>
+              <a:buNone/>
+            </a:pPr>
+            <a:r>
+              <a:rPr lang="en-US" sz="1200" b="1" dirty="0">
+                <a:solidFill>
+                  <a:srgbClr val="1C2833"/>
+                </a:solidFill>
+                <a:latin typeface="Arial" pitchFamily="34" charset="0"/>
+                <a:ea typeface="Arial" pitchFamily="34" charset="-122"/>
+                <a:cs typeface="Arial" pitchFamily="34" charset="-120"/>
+              </a:rPr>
+              <a:t>pungent, bitter, astringent</a:t>
+            </a:r>
+            <a:pPr algn="l" indent="0" marL="0">
+              <a:lnSpc>
+                <a:spcPts val="1620"/>
+              </a:lnSpc>
+              <a:spcAft>
+                <a:spcPts val="300"/>
+              </a:spcAft>
+              <a:buNone/>
+            </a:pPr>
+            <a:r>
+              <a:rPr lang="en-US" sz="1200" dirty="0">
+                <a:solidFill>
+                  <a:srgbClr val="1C2833"/>
+                </a:solidFill>
+                <a:latin typeface="Arial" pitchFamily="34" charset="0"/>
+                <a:ea typeface="Arial" pitchFamily="34" charset="-122"/>
+                <a:cs typeface="Arial" pitchFamily="34" charset="-120"/>
+              </a:rPr>
+              <a:t> — light, dry, warm foods. Aggravated by sweet, sour, salty.</a:t>
+            </a:r>
+            <a:endParaRPr lang="en-US" sz="1200" dirty="0"/>
+          </a:p>
+        </p:txBody>
+      </p:sp>
+      <p:sp>
+        <p:nvSpPr>
+          <p:cNvPr id="6" name="Text 4"/>
           <p:cNvSpPr/>
           <p:nvPr/>
         </p:nvSpPr>
@@ -2740,7 +3365,7 @@
                 <a:ea typeface="Georgia" pitchFamily="34" charset="-122"/>
                 <a:cs typeface="Georgia" pitchFamily="34" charset="-120"/>
               </a:rPr>
-              <a:t>Teacher notes</a:t>
+              <a:t>Core (15 min) (cont.)</a:t>
             </a:r>
             <a:endParaRPr lang="en-US" sz="1800" dirty="0"/>
           </a:p>
@@ -2754,8 +3379,8 @@
         </p:nvSpPr>
         <p:spPr>
           <a:xfrm>
-            <a:off x="406301" y="870942"/>
-            <a:ext cx="8498026" cy="1066354"/>
+            <a:off x="634901" y="883593"/>
+            <a:ext cx="8102798" cy="487561"/>
           </a:xfrm>
           <a:prstGeom prst="rect">
             <a:avLst/>
@@ -2767,13 +3392,31 @@
           <a:bodyPr wrap="square" lIns="0" tIns="0" rIns="0" bIns="0" rtlCol="0" anchor="t"/>
           <a:lstStyle/>
           <a:p>
-            <a:pPr algn="l" indent="0" marL="0">
-              <a:lnSpc>
-                <a:spcPts val="1680"/>
-              </a:lnSpc>
-              <a:spcBef>
-                <a:spcPts val="300"/>
-              </a:spcBef>
+            <a:pPr algn="l" marL="342900" indent="-342900">
+              <a:lnSpc>
+                <a:spcPts val="1620"/>
+              </a:lnSpc>
+              <a:spcAft>
+                <a:spcPts val="300"/>
+              </a:spcAft>
+              <a:buSzPct val="100000"/>
+              <a:buChar char="•"/>
+            </a:pPr>
+            <a:r>
+              <a:rPr lang="en-US" sz="1200" b="1" dirty="0">
+                <a:solidFill>
+                  <a:srgbClr val="1C2833"/>
+                </a:solidFill>
+                <a:latin typeface="Arial" pitchFamily="34" charset="0"/>
+                <a:ea typeface="Arial" pitchFamily="34" charset="-122"/>
+                <a:cs typeface="Arial" pitchFamily="34" charset="-120"/>
+              </a:rPr>
+              <a:t>A balanced meal includes all six.</a:t>
+            </a:r>
+            <a:pPr algn="l" indent="0" marL="0">
+              <a:lnSpc>
+                <a:spcPts val="1620"/>
+              </a:lnSpc>
               <a:spcAft>
                 <a:spcPts val="300"/>
               </a:spcAft>
@@ -2788,15 +3431,12 @@
                 <a:ea typeface="Arial" pitchFamily="34" charset="-122"/>
                 <a:cs typeface="Arial" pitchFamily="34" charset="-120"/>
               </a:rPr>
-              <a:t>– Reminder: NOT a diet plan. Don't let students decide "I must eat bitter from now on." It's awareness. – The </a:t>
-            </a:r>
-            <a:pPr algn="l" indent="0" marL="0">
-              <a:lnSpc>
-                <a:spcPts val="1680"/>
-              </a:lnSpc>
-              <a:spcBef>
-                <a:spcPts val="300"/>
-              </a:spcBef>
+              <a:t> This is the classical recommendation — a proper meal touches all six tastes, in proportions adjusted to the eater's </a:t>
+            </a:r>
+            <a:pPr algn="l" indent="0" marL="0">
+              <a:lnSpc>
+                <a:spcPts val="1620"/>
+              </a:lnSpc>
               <a:spcAft>
                 <a:spcPts val="300"/>
               </a:spcAft>
@@ -2811,15 +3451,12 @@
                 <a:ea typeface="Arial" pitchFamily="34" charset="-122"/>
                 <a:cs typeface="Arial" pitchFamily="34" charset="-120"/>
               </a:rPr>
-              <a:t>kaṭu</a:t>
-            </a:r>
-            <a:pPr algn="l" indent="0" marL="0">
-              <a:lnSpc>
-                <a:spcPts val="1680"/>
-              </a:lnSpc>
-              <a:spcBef>
-                <a:spcPts val="300"/>
-              </a:spcBef>
+              <a:t>prakṛti</a:t>
+            </a:r>
+            <a:pPr algn="l" indent="0" marL="0">
+              <a:lnSpc>
+                <a:spcPts val="1620"/>
+              </a:lnSpc>
               <a:spcAft>
                 <a:spcPts val="300"/>
               </a:spcAft>
@@ -2834,15 +3471,78 @@
                 <a:ea typeface="Arial" pitchFamily="34" charset="-122"/>
                 <a:cs typeface="Arial" pitchFamily="34" charset="-120"/>
               </a:rPr>
-              <a:t> (pungent) station can be a strong sample — let students opt for sniffing only. – Some students will discover they hate astringent or bitter. Note the cultural-conditioning point: most Indian cuisines train astringent (raw banana) and bitter (methi) deliberately, because they balance the heavy-sweet majority of the meal. – Avoid talking about </a:t>
-            </a:r>
-            <a:pPr algn="l" indent="0" marL="0">
-              <a:lnSpc>
-                <a:spcPts val="1680"/>
-              </a:lnSpc>
-              <a:spcBef>
-                <a:spcPts val="300"/>
-              </a:spcBef>
+              <a:t> and the season.</a:t>
+            </a:r>
+            <a:endParaRPr lang="en-US" sz="1200" dirty="0"/>
+          </a:p>
+        </p:txBody>
+      </p:sp>
+      <p:sp>
+        <p:nvSpPr>
+          <p:cNvPr id="5" name="Text 3"/>
+          <p:cNvSpPr/>
+          <p:nvPr/>
+        </p:nvSpPr>
+        <p:spPr>
+          <a:xfrm>
+            <a:off x="634901" y="1472654"/>
+            <a:ext cx="8102798" cy="693241"/>
+          </a:xfrm>
+          <a:prstGeom prst="rect">
+            <a:avLst/>
+          </a:prstGeom>
+          <a:noFill/>
+          <a:ln/>
+        </p:spPr>
+        <p:txBody>
+          <a:bodyPr wrap="square" lIns="0" tIns="0" rIns="0" bIns="0" rtlCol="0" anchor="t"/>
+          <a:lstStyle/>
+          <a:p>
+            <a:pPr algn="l" marL="342900" indent="-342900">
+              <a:lnSpc>
+                <a:spcPts val="1620"/>
+              </a:lnSpc>
+              <a:spcAft>
+                <a:spcPts val="300"/>
+              </a:spcAft>
+              <a:buSzPct val="100000"/>
+              <a:buChar char="•"/>
+            </a:pPr>
+            <a:r>
+              <a:rPr lang="en-US" sz="1200" b="1" dirty="0">
+                <a:solidFill>
+                  <a:srgbClr val="1C2833"/>
+                </a:solidFill>
+                <a:latin typeface="Arial" pitchFamily="34" charset="0"/>
+                <a:ea typeface="Arial" pitchFamily="34" charset="-122"/>
+                <a:cs typeface="Arial" pitchFamily="34" charset="-120"/>
+              </a:rPr>
+              <a:t>A modern note.</a:t>
+            </a:r>
+            <a:pPr algn="l" indent="0" marL="0">
+              <a:lnSpc>
+                <a:spcPts val="1620"/>
+              </a:lnSpc>
+              <a:spcAft>
+                <a:spcPts val="300"/>
+              </a:spcAft>
+              <a:buNone/>
+            </a:pPr>
+            <a:r>
+              <a:rPr lang="en-US" sz="1200" dirty="0">
+                <a:solidFill>
+                  <a:srgbClr val="1C2833"/>
+                </a:solidFill>
+                <a:latin typeface="Arial" pitchFamily="34" charset="0"/>
+                <a:ea typeface="Arial" pitchFamily="34" charset="-122"/>
+                <a:cs typeface="Arial" pitchFamily="34" charset="-120"/>
+              </a:rPr>
+              <a:t> Modern nutrition focuses on macronutrients (protein, fat, carbs) and micronutrients (vitamins, minerals). Ayurveda's </a:t>
+            </a:r>
+            <a:pPr algn="l" indent="0" marL="0">
+              <a:lnSpc>
+                <a:spcPts val="1620"/>
+              </a:lnSpc>
               <a:spcAft>
                 <a:spcPts val="300"/>
               </a:spcAft>
@@ -2857,15 +3557,12 @@
                 <a:ea typeface="Arial" pitchFamily="34" charset="-122"/>
                 <a:cs typeface="Arial" pitchFamily="34" charset="-120"/>
               </a:rPr>
-              <a:t>doṣa</a:t>
-            </a:r>
-            <a:pPr algn="l" indent="0" marL="0">
-              <a:lnSpc>
-                <a:spcPts val="1680"/>
-              </a:lnSpc>
-              <a:spcBef>
-                <a:spcPts val="300"/>
-              </a:spcBef>
+              <a:t>six tastes</a:t>
+            </a:r>
+            <a:pPr algn="l" indent="0" marL="0">
+              <a:lnSpc>
+                <a:spcPts val="1620"/>
+              </a:lnSpc>
               <a:spcAft>
                 <a:spcPts val="300"/>
               </a:spcAft>
@@ -2880,7 +3577,47 @@
                 <a:ea typeface="Arial" pitchFamily="34" charset="-122"/>
                 <a:cs typeface="Arial" pitchFamily="34" charset="-120"/>
               </a:rPr>
-              <a:t>-specific diets in detail. This isn't a meal-planning class.</a:t>
+              <a:t> is a </a:t>
+            </a:r>
+            <a:pPr algn="l" indent="0" marL="0">
+              <a:lnSpc>
+                <a:spcPts val="1620"/>
+              </a:lnSpc>
+              <a:spcAft>
+                <a:spcPts val="300"/>
+              </a:spcAft>
+              <a:buNone/>
+            </a:pPr>
+            <a:r>
+              <a:rPr lang="en-US" sz="1200" i="1" dirty="0">
+                <a:solidFill>
+                  <a:srgbClr val="1C2833"/>
+                </a:solidFill>
+                <a:latin typeface="Arial" pitchFamily="34" charset="0"/>
+                <a:ea typeface="Arial" pitchFamily="34" charset="-122"/>
+                <a:cs typeface="Arial" pitchFamily="34" charset="-120"/>
+              </a:rPr>
+              <a:t>qualitative</a:t>
+            </a:r>
+            <a:pPr algn="l" indent="0" marL="0">
+              <a:lnSpc>
+                <a:spcPts val="1620"/>
+              </a:lnSpc>
+              <a:spcAft>
+                <a:spcPts val="300"/>
+              </a:spcAft>
+              <a:buNone/>
+            </a:pPr>
+            <a:r>
+              <a:rPr lang="en-US" sz="1200" dirty="0">
+                <a:solidFill>
+                  <a:srgbClr val="1C2833"/>
+                </a:solidFill>
+                <a:latin typeface="Arial" pitchFamily="34" charset="0"/>
+                <a:ea typeface="Arial" pitchFamily="34" charset="-122"/>
+                <a:cs typeface="Arial" pitchFamily="34" charset="-120"/>
+              </a:rPr>
+              <a:t> sorting that pre-dates that vocabulary. Both can be true at once: a balanced meal needs both macro coverage AND qualitative variety.</a:t>
             </a:r>
             <a:endParaRPr lang="en-US" sz="1200" dirty="0"/>
           </a:p>
@@ -2888,7 +3625,7 @@
       </p:sp>
       <p:sp>
         <p:nvSpPr>
-          <p:cNvPr id="5" name="Text 3"/>
+          <p:cNvPr id="6" name="Text 4"/>
           <p:cNvSpPr/>
           <p:nvPr/>
         </p:nvSpPr>
@@ -3038,7 +3775,7 @@
                 <a:ea typeface="Georgia" pitchFamily="34" charset="-122"/>
                 <a:cs typeface="Georgia" pitchFamily="34" charset="-120"/>
               </a:rPr>
-              <a:t>Citation(s) used in this lesson</a:t>
+              <a:t>Activity (20 min) — Taste station rotation</a:t>
             </a:r>
             <a:endParaRPr lang="en-US" sz="1800" dirty="0"/>
           </a:p>
@@ -3053,7 +3790,7 @@
         <p:spPr>
           <a:xfrm>
             <a:off x="406301" y="870942"/>
-            <a:ext cx="8498026" cy="426541"/>
+            <a:ext cx="8498026" cy="222796"/>
           </a:xfrm>
           <a:prstGeom prst="rect">
             <a:avLst/>
@@ -3086,7 +3823,7 @@
                 <a:ea typeface="Arial" pitchFamily="34" charset="-122"/>
                 <a:cs typeface="Arial" pitchFamily="34" charset="-120"/>
               </a:rPr>
-              <a:t>– The </a:t>
+              <a:t>Detailed protocol in </a:t>
             </a:r>
             <a:pPr algn="l" indent="0" marL="0">
               <a:lnSpc>
@@ -3101,6 +3838,301 @@
               <a:buNone/>
             </a:pPr>
             <a:r>
+              <a:rPr lang="en-US" sz="1200" dirty="0">
+                <a:solidFill>
+                  <a:srgbClr val="1C2833"/>
+                </a:solidFill>
+                <a:latin typeface="Arial" pitchFamily="34" charset="0"/>
+                <a:ea typeface="Arial" pitchFamily="34" charset="-122"/>
+                <a:cs typeface="Arial" pitchFamily="34" charset="-120"/>
+              </a:rPr>
+              <a:t>activities/activity-02-taste-station.md</a:t>
+            </a:r>
+            <a:pPr algn="l" indent="0" marL="0">
+              <a:lnSpc>
+                <a:spcPts val="1680"/>
+              </a:lnSpc>
+              <a:spcBef>
+                <a:spcPts val="300"/>
+              </a:spcBef>
+              <a:spcAft>
+                <a:spcPts val="300"/>
+              </a:spcAft>
+              <a:buNone/>
+            </a:pPr>
+            <a:r>
+              <a:rPr lang="en-US" sz="1200" dirty="0">
+                <a:solidFill>
+                  <a:srgbClr val="1C2833"/>
+                </a:solidFill>
+                <a:latin typeface="Arial" pitchFamily="34" charset="0"/>
+                <a:ea typeface="Arial" pitchFamily="34" charset="-122"/>
+                <a:cs typeface="Arial" pitchFamily="34" charset="-120"/>
+              </a:rPr>
+              <a:t>. Summary:</a:t>
+            </a:r>
+            <a:endParaRPr lang="en-US" sz="1200" dirty="0"/>
+          </a:p>
+        </p:txBody>
+      </p:sp>
+      <p:sp>
+        <p:nvSpPr>
+          <p:cNvPr id="5" name="Text 3"/>
+          <p:cNvSpPr/>
+          <p:nvPr/>
+        </p:nvSpPr>
+        <p:spPr>
+          <a:xfrm>
+            <a:off x="406301" y="4434929"/>
+            <a:ext cx="8498026" cy="213271"/>
+          </a:xfrm>
+          <a:prstGeom prst="rect">
+            <a:avLst/>
+          </a:prstGeom>
+          <a:noFill/>
+          <a:ln/>
+        </p:spPr>
+        <p:txBody>
+          <a:bodyPr wrap="square" lIns="0" tIns="0" rIns="0" bIns="0" rtlCol="0" anchor="t"/>
+          <a:lstStyle/>
+          <a:p>
+            <a:pPr algn="l" indent="0" marL="0">
+              <a:lnSpc>
+                <a:spcPts val="1680"/>
+              </a:lnSpc>
+              <a:spcBef>
+                <a:spcPts val="300"/>
+              </a:spcBef>
+              <a:spcAft>
+                <a:spcPts val="300"/>
+              </a:spcAft>
+              <a:buNone/>
+            </a:pPr>
+            <a:r>
+              <a:rPr lang="en-US" sz="1200" dirty="0">
+                <a:solidFill>
+                  <a:srgbClr val="1C2833"/>
+                </a:solidFill>
+                <a:latin typeface="Arial" pitchFamily="34" charset="0"/>
+                <a:ea typeface="Arial" pitchFamily="34" charset="-122"/>
+                <a:cs typeface="Arial" pitchFamily="34" charset="-120"/>
+              </a:rPr>
+              <a:t>Middle ·  · IKS Curriculum</a:t>
+            </a:r>
+            <a:endParaRPr lang="en-US" sz="1200" dirty="0"/>
+          </a:p>
+        </p:txBody>
+      </p:sp>
+    </p:spTree>
+  </p:cSld>
+  <p:clrMapOvr>
+    <a:masterClrMapping/>
+  </p:clrMapOvr>
+</p:sld>
+</file>
+
+<file path=ppt/slides/slide13.xml><?xml version="1.0" encoding="utf-8"?>
+<p:sld xmlns:a="http://schemas.openxmlformats.org/drawingml/2006/main" xmlns:r="http://schemas.openxmlformats.org/officeDocument/2006/relationships" xmlns:p="http://schemas.openxmlformats.org/presentationml/2006/main">
+  <p:cSld name="Slide 13">
+    <p:bg>
+      <p:bgPr>
+        <a:solidFill>
+          <a:srgbClr val="FFFFFF"/>
+        </a:solidFill>
+      </p:bgPr>
+    </p:bg>
+    <p:spTree>
+      <p:nvGrpSpPr>
+        <p:cNvPr id="1" name=""/>
+        <p:cNvGrpSpPr/>
+        <p:nvPr/>
+      </p:nvGrpSpPr>
+      <p:grpSpPr>
+        <a:xfrm>
+          <a:off x="0" y="0"/>
+          <a:ext cx="0" cy="0"/>
+          <a:chOff x="0" y="0"/>
+          <a:chExt cx="0" cy="0"/>
+        </a:xfrm>
+      </p:grpSpPr>
+      <p:sp>
+        <p:nvSpPr>
+          <p:cNvPr id="2" name="Text 0"/>
+          <p:cNvSpPr/>
+          <p:nvPr/>
+        </p:nvSpPr>
+        <p:spPr>
+          <a:xfrm>
+            <a:off x="0" y="0"/>
+            <a:ext cx="9144000" cy="101501"/>
+          </a:xfrm>
+          <a:prstGeom prst="rect">
+            <a:avLst/>
+          </a:prstGeom>
+          <a:solidFill>
+            <a:srgbClr val="277884"/>
+          </a:solidFill>
+          <a:ln/>
+        </p:spPr>
+        <p:txBody>
+          <a:bodyPr wrap="square" rtlCol="0" anchor="ctr"/>
+          <a:lstStyle/>
+          <a:p>
+            <a:pPr indent="0" marL="0">
+              <a:buNone/>
+            </a:pPr>
+            <a:endParaRPr lang="en-US" dirty="0"/>
+          </a:p>
+        </p:txBody>
+      </p:sp>
+      <p:sp>
+        <p:nvSpPr>
+          <p:cNvPr id="3" name="Text 1"/>
+          <p:cNvSpPr/>
+          <p:nvPr/>
+        </p:nvSpPr>
+        <p:spPr>
+          <a:xfrm>
+            <a:off x="406301" y="457051"/>
+            <a:ext cx="8498026" cy="274290"/>
+          </a:xfrm>
+          <a:prstGeom prst="rect">
+            <a:avLst/>
+          </a:prstGeom>
+          <a:noFill/>
+          <a:ln/>
+        </p:spPr>
+        <p:txBody>
+          <a:bodyPr wrap="square" lIns="0" tIns="0" rIns="0" bIns="0" rtlCol="0" anchor="t"/>
+          <a:lstStyle/>
+          <a:p>
+            <a:pPr algn="l" indent="0" marL="0">
+              <a:lnSpc>
+                <a:spcPts val="2160"/>
+              </a:lnSpc>
+              <a:spcBef>
+                <a:spcPts val="600"/>
+              </a:spcBef>
+              <a:spcAft>
+                <a:spcPts val="800"/>
+              </a:spcAft>
+              <a:buNone/>
+            </a:pPr>
+            <a:r>
+              <a:rPr lang="en-US" sz="1800" b="1" dirty="0">
+                <a:solidFill>
+                  <a:srgbClr val="FE4447"/>
+                </a:solidFill>
+                <a:latin typeface="Georgia" pitchFamily="34" charset="0"/>
+                <a:ea typeface="Georgia" pitchFamily="34" charset="-122"/>
+                <a:cs typeface="Georgia" pitchFamily="34" charset="-120"/>
+              </a:rPr>
+              <a:t>Activity (20 min) — Taste station rotation (cont.)</a:t>
+            </a:r>
+            <a:endParaRPr lang="en-US" sz="1800" dirty="0"/>
+          </a:p>
+        </p:txBody>
+      </p:sp>
+      <p:sp>
+        <p:nvSpPr>
+          <p:cNvPr id="4" name="Text 2"/>
+          <p:cNvSpPr/>
+          <p:nvPr/>
+        </p:nvSpPr>
+        <p:spPr>
+          <a:xfrm>
+            <a:off x="634901" y="883593"/>
+            <a:ext cx="8102798" cy="1218902"/>
+          </a:xfrm>
+          <a:prstGeom prst="rect">
+            <a:avLst/>
+          </a:prstGeom>
+          <a:noFill/>
+          <a:ln/>
+        </p:spPr>
+        <p:txBody>
+          <a:bodyPr wrap="square" lIns="0" tIns="0" rIns="0" bIns="0" rtlCol="0" anchor="t"/>
+          <a:lstStyle/>
+          <a:p>
+            <a:pPr algn="l" marL="342900" indent="-342900">
+              <a:lnSpc>
+                <a:spcPts val="1620"/>
+              </a:lnSpc>
+              <a:spcAft>
+                <a:spcPts val="300"/>
+              </a:spcAft>
+              <a:buSzPct val="100000"/>
+              <a:buChar char="•"/>
+            </a:pPr>
+            <a:r>
+              <a:rPr lang="en-US" sz="1200" dirty="0">
+                <a:solidFill>
+                  <a:srgbClr val="1C2833"/>
+                </a:solidFill>
+                <a:latin typeface="Arial" pitchFamily="34" charset="0"/>
+                <a:ea typeface="Arial" pitchFamily="34" charset="-122"/>
+                <a:cs typeface="Arial" pitchFamily="34" charset="-120"/>
+              </a:rPr>
+              <a:t>Six small stations around the room. Each has the sample, a label, and a worksheet question.</a:t>
+            </a:r>
+            <a:endParaRPr lang="en-US" sz="1200" dirty="0"/>
+          </a:p>
+          <a:p>
+            <a:pPr algn="l" marL="342900" indent="-342900">
+              <a:lnSpc>
+                <a:spcPts val="1620"/>
+              </a:lnSpc>
+              <a:spcAft>
+                <a:spcPts val="300"/>
+              </a:spcAft>
+              <a:buSzPct val="100000"/>
+              <a:buChar char="•"/>
+            </a:pPr>
+            <a:r>
+              <a:rPr lang="en-US" sz="1200" dirty="0">
+                <a:solidFill>
+                  <a:srgbClr val="1C2833"/>
+                </a:solidFill>
+                <a:latin typeface="Arial" pitchFamily="34" charset="0"/>
+                <a:ea typeface="Arial" pitchFamily="34" charset="-122"/>
+                <a:cs typeface="Arial" pitchFamily="34" charset="-120"/>
+              </a:rPr>
+              <a:t>Students rotate in pairs. 2 minutes per station.</a:t>
+            </a:r>
+            <a:endParaRPr lang="en-US" sz="1200" dirty="0"/>
+          </a:p>
+          <a:p>
+            <a:pPr algn="l" marL="342900" indent="-342900">
+              <a:lnSpc>
+                <a:spcPts val="1620"/>
+              </a:lnSpc>
+              <a:spcAft>
+                <a:spcPts val="300"/>
+              </a:spcAft>
+              <a:buSzPct val="100000"/>
+              <a:buChar char="•"/>
+            </a:pPr>
+            <a:r>
+              <a:rPr lang="en-US" sz="1200" dirty="0">
+                <a:solidFill>
+                  <a:srgbClr val="1C2833"/>
+                </a:solidFill>
+                <a:latin typeface="Arial" pitchFamily="34" charset="0"/>
+                <a:ea typeface="Arial" pitchFamily="34" charset="-122"/>
+                <a:cs typeface="Arial" pitchFamily="34" charset="-120"/>
+              </a:rPr>
+              <a:t>At each station: taste a small sample. Write (a) the IAST + English name; (b) one descriptor word (cooling, warming, sharp, mild); (c) which </a:t>
+            </a:r>
+            <a:pPr algn="l" indent="0" marL="0">
+              <a:lnSpc>
+                <a:spcPts val="1620"/>
+              </a:lnSpc>
+              <a:spcAft>
+                <a:spcPts val="300"/>
+              </a:spcAft>
+              <a:buNone/>
+            </a:pPr>
+            <a:r>
               <a:rPr lang="en-US" sz="1200" i="1" dirty="0">
                 <a:solidFill>
                   <a:srgbClr val="1C2833"/>
@@ -3109,10 +4141,1090 @@
                 <a:ea typeface="Arial" pitchFamily="34" charset="-122"/>
                 <a:cs typeface="Arial" pitchFamily="34" charset="-120"/>
               </a:rPr>
+              <a:t>doṣa</a:t>
+            </a:r>
+            <a:pPr algn="l" indent="0" marL="0">
+              <a:lnSpc>
+                <a:spcPts val="1620"/>
+              </a:lnSpc>
+              <a:spcAft>
+                <a:spcPts val="300"/>
+              </a:spcAft>
+              <a:buNone/>
+            </a:pPr>
+            <a:r>
+              <a:rPr lang="en-US" sz="1200" dirty="0">
+                <a:solidFill>
+                  <a:srgbClr val="1C2833"/>
+                </a:solidFill>
+                <a:latin typeface="Arial" pitchFamily="34" charset="0"/>
+                <a:ea typeface="Arial" pitchFamily="34" charset="-122"/>
+                <a:cs typeface="Arial" pitchFamily="34" charset="-120"/>
+              </a:rPr>
+              <a:t> you'd predict it calms.</a:t>
+            </a:r>
+            <a:endParaRPr lang="en-US" sz="1200" dirty="0"/>
+          </a:p>
+          <a:p>
+            <a:pPr algn="l" marL="342900" indent="-342900">
+              <a:lnSpc>
+                <a:spcPts val="1620"/>
+              </a:lnSpc>
+              <a:spcAft>
+                <a:spcPts val="300"/>
+              </a:spcAft>
+              <a:buSzPct val="100000"/>
+              <a:buChar char="•"/>
+            </a:pPr>
+            <a:r>
+              <a:rPr lang="en-US" sz="1200" b="1" dirty="0">
+                <a:solidFill>
+                  <a:srgbClr val="1C2833"/>
+                </a:solidFill>
+                <a:latin typeface="Arial" pitchFamily="34" charset="0"/>
+                <a:ea typeface="Arial" pitchFamily="34" charset="-122"/>
+                <a:cs typeface="Arial" pitchFamily="34" charset="-120"/>
+              </a:rPr>
+              <a:t>Allergies / dietary restrictions:</a:t>
+            </a:r>
+            <a:pPr algn="l" indent="0" marL="0">
+              <a:lnSpc>
+                <a:spcPts val="1620"/>
+              </a:lnSpc>
+              <a:spcAft>
+                <a:spcPts val="300"/>
+              </a:spcAft>
+              <a:buNone/>
+            </a:pPr>
+            <a:r>
+              <a:rPr lang="en-US" sz="1200" dirty="0">
+                <a:solidFill>
+                  <a:srgbClr val="1C2833"/>
+                </a:solidFill>
+                <a:latin typeface="Arial" pitchFamily="34" charset="0"/>
+                <a:ea typeface="Arial" pitchFamily="34" charset="-122"/>
+                <a:cs typeface="Arial" pitchFamily="34" charset="-120"/>
+              </a:rPr>
+              <a:t> opt-out at any station. No questions asked. Smell-only counts.</a:t>
+            </a:r>
+            <a:endParaRPr lang="en-US" sz="1200" dirty="0"/>
+          </a:p>
+        </p:txBody>
+      </p:sp>
+      <p:sp>
+        <p:nvSpPr>
+          <p:cNvPr id="5" name="Text 3"/>
+          <p:cNvSpPr/>
+          <p:nvPr/>
+        </p:nvSpPr>
+        <p:spPr>
+          <a:xfrm>
+            <a:off x="406301" y="4434929"/>
+            <a:ext cx="8498026" cy="213271"/>
+          </a:xfrm>
+          <a:prstGeom prst="rect">
+            <a:avLst/>
+          </a:prstGeom>
+          <a:noFill/>
+          <a:ln/>
+        </p:spPr>
+        <p:txBody>
+          <a:bodyPr wrap="square" lIns="0" tIns="0" rIns="0" bIns="0" rtlCol="0" anchor="t"/>
+          <a:lstStyle/>
+          <a:p>
+            <a:pPr algn="l" indent="0" marL="0">
+              <a:lnSpc>
+                <a:spcPts val="1680"/>
+              </a:lnSpc>
+              <a:spcBef>
+                <a:spcPts val="300"/>
+              </a:spcBef>
+              <a:spcAft>
+                <a:spcPts val="300"/>
+              </a:spcAft>
+              <a:buNone/>
+            </a:pPr>
+            <a:r>
+              <a:rPr lang="en-US" sz="1200" dirty="0">
+                <a:solidFill>
+                  <a:srgbClr val="1C2833"/>
+                </a:solidFill>
+                <a:latin typeface="Arial" pitchFamily="34" charset="0"/>
+                <a:ea typeface="Arial" pitchFamily="34" charset="-122"/>
+                <a:cs typeface="Arial" pitchFamily="34" charset="-120"/>
+              </a:rPr>
+              <a:t>Middle ·  · IKS Curriculum</a:t>
+            </a:r>
+            <a:endParaRPr lang="en-US" sz="1200" dirty="0"/>
+          </a:p>
+        </p:txBody>
+      </p:sp>
+    </p:spTree>
+  </p:cSld>
+  <p:clrMapOvr>
+    <a:masterClrMapping/>
+  </p:clrMapOvr>
+</p:sld>
+</file>
+
+<file path=ppt/slides/slide14.xml><?xml version="1.0" encoding="utf-8"?>
+<p:sld xmlns:a="http://schemas.openxmlformats.org/drawingml/2006/main" xmlns:r="http://schemas.openxmlformats.org/officeDocument/2006/relationships" xmlns:p="http://schemas.openxmlformats.org/presentationml/2006/main">
+  <p:cSld name="Slide 14">
+    <p:bg>
+      <p:bgPr>
+        <a:solidFill>
+          <a:srgbClr val="FFFFFF"/>
+        </a:solidFill>
+      </p:bgPr>
+    </p:bg>
+    <p:spTree>
+      <p:nvGrpSpPr>
+        <p:cNvPr id="1" name=""/>
+        <p:cNvGrpSpPr/>
+        <p:nvPr/>
+      </p:nvGrpSpPr>
+      <p:grpSpPr>
+        <a:xfrm>
+          <a:off x="0" y="0"/>
+          <a:ext cx="0" cy="0"/>
+          <a:chOff x="0" y="0"/>
+          <a:chExt cx="0" cy="0"/>
+        </a:xfrm>
+      </p:grpSpPr>
+      <p:sp>
+        <p:nvSpPr>
+          <p:cNvPr id="2" name="Text 0"/>
+          <p:cNvSpPr/>
+          <p:nvPr/>
+        </p:nvSpPr>
+        <p:spPr>
+          <a:xfrm>
+            <a:off x="0" y="0"/>
+            <a:ext cx="9144000" cy="101501"/>
+          </a:xfrm>
+          <a:prstGeom prst="rect">
+            <a:avLst/>
+          </a:prstGeom>
+          <a:solidFill>
+            <a:srgbClr val="277884"/>
+          </a:solidFill>
+          <a:ln/>
+        </p:spPr>
+        <p:txBody>
+          <a:bodyPr wrap="square" rtlCol="0" anchor="ctr"/>
+          <a:lstStyle/>
+          <a:p>
+            <a:pPr indent="0" marL="0">
+              <a:buNone/>
+            </a:pPr>
+            <a:endParaRPr lang="en-US" dirty="0"/>
+          </a:p>
+        </p:txBody>
+      </p:sp>
+      <p:sp>
+        <p:nvSpPr>
+          <p:cNvPr id="3" name="Text 1"/>
+          <p:cNvSpPr/>
+          <p:nvPr/>
+        </p:nvSpPr>
+        <p:spPr>
+          <a:xfrm>
+            <a:off x="406301" y="457051"/>
+            <a:ext cx="8498026" cy="274290"/>
+          </a:xfrm>
+          <a:prstGeom prst="rect">
+            <a:avLst/>
+          </a:prstGeom>
+          <a:noFill/>
+          <a:ln/>
+        </p:spPr>
+        <p:txBody>
+          <a:bodyPr wrap="square" lIns="0" tIns="0" rIns="0" bIns="0" rtlCol="0" anchor="t"/>
+          <a:lstStyle/>
+          <a:p>
+            <a:pPr algn="l" indent="0" marL="0">
+              <a:lnSpc>
+                <a:spcPts val="2160"/>
+              </a:lnSpc>
+              <a:spcBef>
+                <a:spcPts val="600"/>
+              </a:spcBef>
+              <a:spcAft>
+                <a:spcPts val="800"/>
+              </a:spcAft>
+              <a:buNone/>
+            </a:pPr>
+            <a:r>
+              <a:rPr lang="en-US" sz="1800" b="1" dirty="0">
+                <a:solidFill>
+                  <a:srgbClr val="FE4447"/>
+                </a:solidFill>
+                <a:latin typeface="Georgia" pitchFamily="34" charset="0"/>
+                <a:ea typeface="Georgia" pitchFamily="34" charset="-122"/>
+                <a:cs typeface="Georgia" pitchFamily="34" charset="-120"/>
+              </a:rPr>
+              <a:t>Wrap-up (5 min)</a:t>
+            </a:r>
+            <a:endParaRPr lang="en-US" sz="1800" dirty="0"/>
+          </a:p>
+        </p:txBody>
+      </p:sp>
+      <p:sp>
+        <p:nvSpPr>
+          <p:cNvPr id="4" name="Text 2"/>
+          <p:cNvSpPr/>
+          <p:nvPr/>
+        </p:nvSpPr>
+        <p:spPr>
+          <a:xfrm>
+            <a:off x="634901" y="883593"/>
+            <a:ext cx="8102798" cy="731341"/>
+          </a:xfrm>
+          <a:prstGeom prst="rect">
+            <a:avLst/>
+          </a:prstGeom>
+          <a:noFill/>
+          <a:ln/>
+        </p:spPr>
+        <p:txBody>
+          <a:bodyPr wrap="square" lIns="0" tIns="0" rIns="0" bIns="0" rtlCol="0" anchor="t"/>
+          <a:lstStyle/>
+          <a:p>
+            <a:pPr algn="l" marL="342900" indent="-342900">
+              <a:lnSpc>
+                <a:spcPts val="1620"/>
+              </a:lnSpc>
+              <a:spcAft>
+                <a:spcPts val="300"/>
+              </a:spcAft>
+              <a:buSzPct val="100000"/>
+              <a:buChar char="•"/>
+            </a:pPr>
+            <a:r>
+              <a:rPr lang="en-US" sz="1200" dirty="0">
+                <a:solidFill>
+                  <a:srgbClr val="1C2833"/>
+                </a:solidFill>
+                <a:latin typeface="Arial" pitchFamily="34" charset="0"/>
+                <a:ea typeface="Arial" pitchFamily="34" charset="-122"/>
+                <a:cs typeface="Arial" pitchFamily="34" charset="-120"/>
+              </a:rPr>
+              <a:t>Whole-class share — </a:t>
+            </a:r>
+            <a:pPr algn="l" indent="0" marL="0">
+              <a:lnSpc>
+                <a:spcPts val="1620"/>
+              </a:lnSpc>
+              <a:spcAft>
+                <a:spcPts val="300"/>
+              </a:spcAft>
+              <a:buNone/>
+            </a:pPr>
+            <a:r>
+              <a:rPr lang="en-US" sz="1200" i="1" dirty="0">
+                <a:solidFill>
+                  <a:srgbClr val="1C2833"/>
+                </a:solidFill>
+                <a:latin typeface="Arial" pitchFamily="34" charset="0"/>
+                <a:ea typeface="Arial" pitchFamily="34" charset="-122"/>
+                <a:cs typeface="Arial" pitchFamily="34" charset="-120"/>
+              </a:rPr>
+              <a:t>"Which taste surprised you? Which felt familiar from your home cooking?"</a:t>
+            </a:r>
+            <a:endParaRPr lang="en-US" sz="1200" dirty="0"/>
+          </a:p>
+          <a:p>
+            <a:pPr algn="l" marL="342900" indent="-342900">
+              <a:lnSpc>
+                <a:spcPts val="1620"/>
+              </a:lnSpc>
+              <a:spcAft>
+                <a:spcPts val="300"/>
+              </a:spcAft>
+              <a:buSzPct val="100000"/>
+              <a:buChar char="•"/>
+            </a:pPr>
+            <a:r>
+              <a:rPr lang="en-US" sz="1200" dirty="0">
+                <a:solidFill>
+                  <a:srgbClr val="1C2833"/>
+                </a:solidFill>
+                <a:latin typeface="Arial" pitchFamily="34" charset="0"/>
+                <a:ea typeface="Arial" pitchFamily="34" charset="-122"/>
+                <a:cs typeface="Arial" pitchFamily="34" charset="-120"/>
+              </a:rPr>
+              <a:t>Preview Day 7: </a:t>
+            </a:r>
+            <a:pPr algn="l" indent="0" marL="0">
+              <a:lnSpc>
+                <a:spcPts val="1620"/>
+              </a:lnSpc>
+              <a:spcAft>
+                <a:spcPts val="300"/>
+              </a:spcAft>
+              <a:buNone/>
+            </a:pPr>
+            <a:r>
+              <a:rPr lang="en-US" sz="1200" i="1" dirty="0">
+                <a:solidFill>
+                  <a:srgbClr val="1C2833"/>
+                </a:solidFill>
+                <a:latin typeface="Arial" pitchFamily="34" charset="0"/>
+                <a:ea typeface="Arial" pitchFamily="34" charset="-122"/>
+                <a:cs typeface="Arial" pitchFamily="34" charset="-120"/>
+              </a:rPr>
+              <a:t>"Tomorrow — what does imbalance look like, and when do you stop using this framework and call a doctor?"</a:t>
+            </a:r>
+            <a:endParaRPr lang="en-US" sz="1200" dirty="0"/>
+          </a:p>
+        </p:txBody>
+      </p:sp>
+      <p:sp>
+        <p:nvSpPr>
+          <p:cNvPr id="5" name="Text 3"/>
+          <p:cNvSpPr/>
+          <p:nvPr/>
+        </p:nvSpPr>
+        <p:spPr>
+          <a:xfrm>
+            <a:off x="406301" y="4434929"/>
+            <a:ext cx="8498026" cy="213271"/>
+          </a:xfrm>
+          <a:prstGeom prst="rect">
+            <a:avLst/>
+          </a:prstGeom>
+          <a:noFill/>
+          <a:ln/>
+        </p:spPr>
+        <p:txBody>
+          <a:bodyPr wrap="square" lIns="0" tIns="0" rIns="0" bIns="0" rtlCol="0" anchor="t"/>
+          <a:lstStyle/>
+          <a:p>
+            <a:pPr algn="l" indent="0" marL="0">
+              <a:lnSpc>
+                <a:spcPts val="1680"/>
+              </a:lnSpc>
+              <a:spcBef>
+                <a:spcPts val="300"/>
+              </a:spcBef>
+              <a:spcAft>
+                <a:spcPts val="300"/>
+              </a:spcAft>
+              <a:buNone/>
+            </a:pPr>
+            <a:r>
+              <a:rPr lang="en-US" sz="1200" dirty="0">
+                <a:solidFill>
+                  <a:srgbClr val="1C2833"/>
+                </a:solidFill>
+                <a:latin typeface="Arial" pitchFamily="34" charset="0"/>
+                <a:ea typeface="Arial" pitchFamily="34" charset="-122"/>
+                <a:cs typeface="Arial" pitchFamily="34" charset="-120"/>
+              </a:rPr>
+              <a:t>Middle ·  · IKS Curriculum</a:t>
+            </a:r>
+            <a:endParaRPr lang="en-US" sz="1200" dirty="0"/>
+          </a:p>
+        </p:txBody>
+      </p:sp>
+    </p:spTree>
+  </p:cSld>
+  <p:clrMapOvr>
+    <a:masterClrMapping/>
+  </p:clrMapOvr>
+</p:sld>
+</file>
+
+<file path=ppt/slides/slide15.xml><?xml version="1.0" encoding="utf-8"?>
+<p:sld xmlns:a="http://schemas.openxmlformats.org/drawingml/2006/main" xmlns:r="http://schemas.openxmlformats.org/officeDocument/2006/relationships" xmlns:p="http://schemas.openxmlformats.org/presentationml/2006/main">
+  <p:cSld name="Slide 15">
+    <p:bg>
+      <p:bgPr>
+        <a:solidFill>
+          <a:srgbClr val="FFFFFF"/>
+        </a:solidFill>
+      </p:bgPr>
+    </p:bg>
+    <p:spTree>
+      <p:nvGrpSpPr>
+        <p:cNvPr id="1" name=""/>
+        <p:cNvGrpSpPr/>
+        <p:nvPr/>
+      </p:nvGrpSpPr>
+      <p:grpSpPr>
+        <a:xfrm>
+          <a:off x="0" y="0"/>
+          <a:ext cx="0" cy="0"/>
+          <a:chOff x="0" y="0"/>
+          <a:chExt cx="0" cy="0"/>
+        </a:xfrm>
+      </p:grpSpPr>
+      <p:sp>
+        <p:nvSpPr>
+          <p:cNvPr id="2" name="Text 0"/>
+          <p:cNvSpPr/>
+          <p:nvPr/>
+        </p:nvSpPr>
+        <p:spPr>
+          <a:xfrm>
+            <a:off x="0" y="0"/>
+            <a:ext cx="9144000" cy="101501"/>
+          </a:xfrm>
+          <a:prstGeom prst="rect">
+            <a:avLst/>
+          </a:prstGeom>
+          <a:solidFill>
+            <a:srgbClr val="277884"/>
+          </a:solidFill>
+          <a:ln/>
+        </p:spPr>
+        <p:txBody>
+          <a:bodyPr wrap="square" rtlCol="0" anchor="ctr"/>
+          <a:lstStyle/>
+          <a:p>
+            <a:pPr indent="0" marL="0">
+              <a:buNone/>
+            </a:pPr>
+            <a:endParaRPr lang="en-US" dirty="0"/>
+          </a:p>
+        </p:txBody>
+      </p:sp>
+      <p:sp>
+        <p:nvSpPr>
+          <p:cNvPr id="3" name="Text 1"/>
+          <p:cNvSpPr/>
+          <p:nvPr/>
+        </p:nvSpPr>
+        <p:spPr>
+          <a:xfrm>
+            <a:off x="406301" y="457051"/>
+            <a:ext cx="8498026" cy="274290"/>
+          </a:xfrm>
+          <a:prstGeom prst="rect">
+            <a:avLst/>
+          </a:prstGeom>
+          <a:noFill/>
+          <a:ln/>
+        </p:spPr>
+        <p:txBody>
+          <a:bodyPr wrap="square" lIns="0" tIns="0" rIns="0" bIns="0" rtlCol="0" anchor="t"/>
+          <a:lstStyle/>
+          <a:p>
+            <a:pPr algn="l" indent="0" marL="0">
+              <a:lnSpc>
+                <a:spcPts val="2160"/>
+              </a:lnSpc>
+              <a:spcBef>
+                <a:spcPts val="600"/>
+              </a:spcBef>
+              <a:spcAft>
+                <a:spcPts val="800"/>
+              </a:spcAft>
+              <a:buNone/>
+            </a:pPr>
+            <a:r>
+              <a:rPr lang="en-US" sz="1800" b="1" dirty="0">
+                <a:solidFill>
+                  <a:srgbClr val="FE4447"/>
+                </a:solidFill>
+                <a:latin typeface="Georgia" pitchFamily="34" charset="0"/>
+                <a:ea typeface="Georgia" pitchFamily="34" charset="-122"/>
+                <a:cs typeface="Georgia" pitchFamily="34" charset="-120"/>
+              </a:rPr>
+              <a:t>Student-facing content</a:t>
+            </a:r>
+            <a:endParaRPr lang="en-US" sz="1800" dirty="0"/>
+          </a:p>
+        </p:txBody>
+      </p:sp>
+      <p:sp>
+        <p:nvSpPr>
+          <p:cNvPr id="4" name="Text 2"/>
+          <p:cNvSpPr/>
+          <p:nvPr/>
+        </p:nvSpPr>
+        <p:spPr>
+          <a:xfrm>
+            <a:off x="406301" y="883593"/>
+            <a:ext cx="8331398" cy="2074069"/>
+          </a:xfrm>
+          <a:prstGeom prst="rect">
+            <a:avLst/>
+          </a:prstGeom>
+          <a:solidFill>
+            <a:srgbClr val="F4F8F9"/>
+          </a:solidFill>
+          <a:ln/>
+        </p:spPr>
+        <p:txBody>
+          <a:bodyPr wrap="square" rtlCol="0" anchor="ctr"/>
+          <a:lstStyle/>
+          <a:p>
+            <a:pPr indent="0" marL="0">
+              <a:buNone/>
+            </a:pPr>
+            <a:endParaRPr lang="en-US" dirty="0"/>
+          </a:p>
+        </p:txBody>
+      </p:sp>
+      <p:sp>
+        <p:nvSpPr>
+          <p:cNvPr id="5" name="Shape 3"/>
+          <p:cNvSpPr/>
+          <p:nvPr/>
+        </p:nvSpPr>
+        <p:spPr>
+          <a:xfrm>
+            <a:off x="434876" y="883593"/>
+            <a:ext cx="0" cy="2074069"/>
+          </a:xfrm>
+          <a:prstGeom prst="line">
+            <a:avLst/>
+          </a:prstGeom>
+          <a:noFill/>
+          <a:ln w="57150">
+            <a:solidFill>
+              <a:srgbClr val="FE4447"/>
+            </a:solidFill>
+            <a:prstDash val="solid"/>
+          </a:ln>
+        </p:spPr>
+      </p:sp>
+      <p:sp>
+        <p:nvSpPr>
+          <p:cNvPr id="6" name="Text 4"/>
+          <p:cNvSpPr/>
+          <p:nvPr/>
+        </p:nvSpPr>
+        <p:spPr>
+          <a:xfrm>
+            <a:off x="692051" y="1074093"/>
+            <a:ext cx="7973389" cy="230981"/>
+          </a:xfrm>
+          <a:prstGeom prst="rect">
+            <a:avLst/>
+          </a:prstGeom>
+          <a:noFill/>
+          <a:ln/>
+        </p:spPr>
+        <p:txBody>
+          <a:bodyPr wrap="square" lIns="0" tIns="0" rIns="0" bIns="0" rtlCol="0" anchor="t"/>
+          <a:lstStyle/>
+          <a:p>
+            <a:pPr algn="l" indent="0" marL="0">
+              <a:lnSpc>
+                <a:spcPts val="1820"/>
+              </a:lnSpc>
+              <a:spcBef>
+                <a:spcPts val="300"/>
+              </a:spcBef>
+              <a:spcAft>
+                <a:spcPts val="300"/>
+              </a:spcAft>
+              <a:buNone/>
+            </a:pPr>
+            <a:r>
+              <a:rPr lang="en-US" sz="1300" dirty="0">
+                <a:solidFill>
+                  <a:srgbClr val="1C2833"/>
+                </a:solidFill>
+                <a:latin typeface="Georgia" pitchFamily="34" charset="0"/>
+                <a:ea typeface="Georgia" pitchFamily="34" charset="-122"/>
+                <a:cs typeface="Georgia" pitchFamily="34" charset="-120"/>
+              </a:rPr>
+              <a:t>*</a:t>
+            </a:r>
+            <a:pPr algn="l" indent="0" marL="0">
+              <a:lnSpc>
+                <a:spcPts val="1820"/>
+              </a:lnSpc>
+              <a:spcBef>
+                <a:spcPts val="300"/>
+              </a:spcBef>
+              <a:spcAft>
+                <a:spcPts val="300"/>
+              </a:spcAft>
+              <a:buNone/>
+            </a:pPr>
+            <a:r>
+              <a:rPr lang="en-US" sz="1300" i="1" dirty="0">
+                <a:solidFill>
+                  <a:srgbClr val="1C2833"/>
+                </a:solidFill>
+                <a:latin typeface="Georgia" pitchFamily="34" charset="0"/>
+                <a:ea typeface="Georgia" pitchFamily="34" charset="-122"/>
+                <a:cs typeface="Georgia" pitchFamily="34" charset="-120"/>
+              </a:rPr>
+              <a:t>The six tastes (</a:t>
+            </a:r>
+            <a:pPr algn="l" indent="0" marL="0">
+              <a:lnSpc>
+                <a:spcPts val="1820"/>
+              </a:lnSpc>
+              <a:spcBef>
+                <a:spcPts val="300"/>
+              </a:spcBef>
+              <a:spcAft>
+                <a:spcPts val="300"/>
+              </a:spcAft>
+              <a:buNone/>
+            </a:pPr>
+            <a:r>
+              <a:rPr lang="en-US" sz="1300" dirty="0">
+                <a:solidFill>
+                  <a:srgbClr val="1C2833"/>
+                </a:solidFill>
+                <a:latin typeface="Georgia" pitchFamily="34" charset="0"/>
+                <a:ea typeface="Georgia" pitchFamily="34" charset="-122"/>
+                <a:cs typeface="Georgia" pitchFamily="34" charset="-120"/>
+              </a:rPr>
               <a:t>ṣaḍ-rasa</a:t>
             </a:r>
             <a:pPr algn="l" indent="0" marL="0">
               <a:lnSpc>
+                <a:spcPts val="1820"/>
+              </a:lnSpc>
+              <a:spcBef>
+                <a:spcPts val="300"/>
+              </a:spcBef>
+              <a:spcAft>
+                <a:spcPts val="300"/>
+              </a:spcAft>
+              <a:buNone/>
+            </a:pPr>
+            <a:r>
+              <a:rPr lang="en-US" sz="1300" i="1" dirty="0">
+                <a:solidFill>
+                  <a:srgbClr val="1C2833"/>
+                </a:solidFill>
+                <a:latin typeface="Georgia" pitchFamily="34" charset="0"/>
+                <a:ea typeface="Georgia" pitchFamily="34" charset="-122"/>
+                <a:cs typeface="Georgia" pitchFamily="34" charset="-120"/>
+              </a:rPr>
+              <a:t>):</a:t>
+            </a:r>
+            <a:pPr algn="l" indent="0" marL="0">
+              <a:lnSpc>
+                <a:spcPts val="1820"/>
+              </a:lnSpc>
+              <a:spcBef>
+                <a:spcPts val="300"/>
+              </a:spcBef>
+              <a:spcAft>
+                <a:spcPts val="300"/>
+              </a:spcAft>
+              <a:buNone/>
+            </a:pPr>
+            <a:r>
+              <a:rPr lang="en-US" sz="1300" dirty="0">
+                <a:solidFill>
+                  <a:srgbClr val="1C2833"/>
+                </a:solidFill>
+                <a:latin typeface="Georgia" pitchFamily="34" charset="0"/>
+                <a:ea typeface="Georgia" pitchFamily="34" charset="-122"/>
+                <a:cs typeface="Georgia" pitchFamily="34" charset="-120"/>
+              </a:rPr>
+              <a:t>*</a:t>
+            </a:r>
+            <a:endParaRPr lang="en-US" sz="1300" dirty="0"/>
+          </a:p>
+        </p:txBody>
+      </p:sp>
+      <p:sp>
+        <p:nvSpPr>
+          <p:cNvPr id="7" name="Text 5"/>
+          <p:cNvSpPr/>
+          <p:nvPr/>
+        </p:nvSpPr>
+        <p:spPr>
+          <a:xfrm>
+            <a:off x="692051" y="1343174"/>
+            <a:ext cx="7973389" cy="923925"/>
+          </a:xfrm>
+          <a:prstGeom prst="rect">
+            <a:avLst/>
+          </a:prstGeom>
+          <a:noFill/>
+          <a:ln/>
+        </p:spPr>
+        <p:txBody>
+          <a:bodyPr wrap="square" lIns="0" tIns="0" rIns="0" bIns="0" rtlCol="0" anchor="t"/>
+          <a:lstStyle/>
+          <a:p>
+            <a:pPr algn="l" indent="0" marL="0">
+              <a:lnSpc>
+                <a:spcPts val="1820"/>
+              </a:lnSpc>
+              <a:spcBef>
+                <a:spcPts val="300"/>
+              </a:spcBef>
+              <a:spcAft>
+                <a:spcPts val="300"/>
+              </a:spcAft>
+              <a:buNone/>
+            </a:pPr>
+            <a:r>
+              <a:rPr lang="en-US" sz="1300" dirty="0">
+                <a:solidFill>
+                  <a:srgbClr val="1C2833"/>
+                </a:solidFill>
+                <a:latin typeface="Georgia" pitchFamily="34" charset="0"/>
+                <a:ea typeface="Georgia" pitchFamily="34" charset="-122"/>
+                <a:cs typeface="Georgia" pitchFamily="34" charset="-120"/>
+              </a:rPr>
+              <a:t>| Taste | Example | Calms | Aggravates | |-------|---------|-------|------------| | </a:t>
+            </a:r>
+            <a:pPr algn="l" indent="0" marL="0">
+              <a:lnSpc>
+                <a:spcPts val="1820"/>
+              </a:lnSpc>
+              <a:spcBef>
+                <a:spcPts val="300"/>
+              </a:spcBef>
+              <a:spcAft>
+                <a:spcPts val="300"/>
+              </a:spcAft>
+              <a:buNone/>
+            </a:pPr>
+            <a:r>
+              <a:rPr lang="en-US" sz="1300" i="1" dirty="0">
+                <a:solidFill>
+                  <a:srgbClr val="1C2833"/>
+                </a:solidFill>
+                <a:latin typeface="Georgia" pitchFamily="34" charset="0"/>
+                <a:ea typeface="Georgia" pitchFamily="34" charset="-122"/>
+                <a:cs typeface="Georgia" pitchFamily="34" charset="-120"/>
+              </a:rPr>
+              <a:t>madhura</a:t>
+            </a:r>
+            <a:pPr algn="l" indent="0" marL="0">
+              <a:lnSpc>
+                <a:spcPts val="1820"/>
+              </a:lnSpc>
+              <a:spcBef>
+                <a:spcPts val="300"/>
+              </a:spcBef>
+              <a:spcAft>
+                <a:spcPts val="300"/>
+              </a:spcAft>
+              <a:buNone/>
+            </a:pPr>
+            <a:r>
+              <a:rPr lang="en-US" sz="1300" dirty="0">
+                <a:solidFill>
+                  <a:srgbClr val="1C2833"/>
+                </a:solidFill>
+                <a:latin typeface="Georgia" pitchFamily="34" charset="0"/>
+                <a:ea typeface="Georgia" pitchFamily="34" charset="-122"/>
+                <a:cs typeface="Georgia" pitchFamily="34" charset="-120"/>
+              </a:rPr>
+              <a:t> (sweet) | rice, milk, jaggery | vāta, pitta | kapha | | </a:t>
+            </a:r>
+            <a:pPr algn="l" indent="0" marL="0">
+              <a:lnSpc>
+                <a:spcPts val="1820"/>
+              </a:lnSpc>
+              <a:spcBef>
+                <a:spcPts val="300"/>
+              </a:spcBef>
+              <a:spcAft>
+                <a:spcPts val="300"/>
+              </a:spcAft>
+              <a:buNone/>
+            </a:pPr>
+            <a:r>
+              <a:rPr lang="en-US" sz="1300" i="1" dirty="0">
+                <a:solidFill>
+                  <a:srgbClr val="1C2833"/>
+                </a:solidFill>
+                <a:latin typeface="Georgia" pitchFamily="34" charset="0"/>
+                <a:ea typeface="Georgia" pitchFamily="34" charset="-122"/>
+                <a:cs typeface="Georgia" pitchFamily="34" charset="-120"/>
+              </a:rPr>
+              <a:t>amla</a:t>
+            </a:r>
+            <a:pPr algn="l" indent="0" marL="0">
+              <a:lnSpc>
+                <a:spcPts val="1820"/>
+              </a:lnSpc>
+              <a:spcBef>
+                <a:spcPts val="300"/>
+              </a:spcBef>
+              <a:spcAft>
+                <a:spcPts val="300"/>
+              </a:spcAft>
+              <a:buNone/>
+            </a:pPr>
+            <a:r>
+              <a:rPr lang="en-US" sz="1300" dirty="0">
+                <a:solidFill>
+                  <a:srgbClr val="1C2833"/>
+                </a:solidFill>
+                <a:latin typeface="Georgia" pitchFamily="34" charset="0"/>
+                <a:ea typeface="Georgia" pitchFamily="34" charset="-122"/>
+                <a:cs typeface="Georgia" pitchFamily="34" charset="-120"/>
+              </a:rPr>
+              <a:t> (sour) | lemon, yoghurt | vāta | pitta, kapha | | </a:t>
+            </a:r>
+            <a:pPr algn="l" indent="0" marL="0">
+              <a:lnSpc>
+                <a:spcPts val="1820"/>
+              </a:lnSpc>
+              <a:spcBef>
+                <a:spcPts val="300"/>
+              </a:spcBef>
+              <a:spcAft>
+                <a:spcPts val="300"/>
+              </a:spcAft>
+              <a:buNone/>
+            </a:pPr>
+            <a:r>
+              <a:rPr lang="en-US" sz="1300" i="1" dirty="0">
+                <a:solidFill>
+                  <a:srgbClr val="1C2833"/>
+                </a:solidFill>
+                <a:latin typeface="Georgia" pitchFamily="34" charset="0"/>
+                <a:ea typeface="Georgia" pitchFamily="34" charset="-122"/>
+                <a:cs typeface="Georgia" pitchFamily="34" charset="-120"/>
+              </a:rPr>
+              <a:t>lavaṇa</a:t>
+            </a:r>
+            <a:pPr algn="l" indent="0" marL="0">
+              <a:lnSpc>
+                <a:spcPts val="1820"/>
+              </a:lnSpc>
+              <a:spcBef>
+                <a:spcPts val="300"/>
+              </a:spcBef>
+              <a:spcAft>
+                <a:spcPts val="300"/>
+              </a:spcAft>
+              <a:buNone/>
+            </a:pPr>
+            <a:r>
+              <a:rPr lang="en-US" sz="1300" dirty="0">
+                <a:solidFill>
+                  <a:srgbClr val="1C2833"/>
+                </a:solidFill>
+                <a:latin typeface="Georgia" pitchFamily="34" charset="0"/>
+                <a:ea typeface="Georgia" pitchFamily="34" charset="-122"/>
+                <a:cs typeface="Georgia" pitchFamily="34" charset="-120"/>
+              </a:rPr>
+              <a:t> (salty) | rock salt | vāta | pitta, kapha | | </a:t>
+            </a:r>
+            <a:pPr algn="l" indent="0" marL="0">
+              <a:lnSpc>
+                <a:spcPts val="1820"/>
+              </a:lnSpc>
+              <a:spcBef>
+                <a:spcPts val="300"/>
+              </a:spcBef>
+              <a:spcAft>
+                <a:spcPts val="300"/>
+              </a:spcAft>
+              <a:buNone/>
+            </a:pPr>
+            <a:r>
+              <a:rPr lang="en-US" sz="1300" i="1" dirty="0">
+                <a:solidFill>
+                  <a:srgbClr val="1C2833"/>
+                </a:solidFill>
+                <a:latin typeface="Georgia" pitchFamily="34" charset="0"/>
+                <a:ea typeface="Georgia" pitchFamily="34" charset="-122"/>
+                <a:cs typeface="Georgia" pitchFamily="34" charset="-120"/>
+              </a:rPr>
+              <a:t>kaṭu</a:t>
+            </a:r>
+            <a:pPr algn="l" indent="0" marL="0">
+              <a:lnSpc>
+                <a:spcPts val="1820"/>
+              </a:lnSpc>
+              <a:spcBef>
+                <a:spcPts val="300"/>
+              </a:spcBef>
+              <a:spcAft>
+                <a:spcPts val="300"/>
+              </a:spcAft>
+              <a:buNone/>
+            </a:pPr>
+            <a:r>
+              <a:rPr lang="en-US" sz="1300" dirty="0">
+                <a:solidFill>
+                  <a:srgbClr val="1C2833"/>
+                </a:solidFill>
+                <a:latin typeface="Georgia" pitchFamily="34" charset="0"/>
+                <a:ea typeface="Georgia" pitchFamily="34" charset="-122"/>
+                <a:cs typeface="Georgia" pitchFamily="34" charset="-120"/>
+              </a:rPr>
+              <a:t> (pungent) | chili, ginger | kapha | vāta, pitta | | </a:t>
+            </a:r>
+            <a:pPr algn="l" indent="0" marL="0">
+              <a:lnSpc>
+                <a:spcPts val="1820"/>
+              </a:lnSpc>
+              <a:spcBef>
+                <a:spcPts val="300"/>
+              </a:spcBef>
+              <a:spcAft>
+                <a:spcPts val="300"/>
+              </a:spcAft>
+              <a:buNone/>
+            </a:pPr>
+            <a:r>
+              <a:rPr lang="en-US" sz="1300" i="1" dirty="0">
+                <a:solidFill>
+                  <a:srgbClr val="1C2833"/>
+                </a:solidFill>
+                <a:latin typeface="Georgia" pitchFamily="34" charset="0"/>
+                <a:ea typeface="Georgia" pitchFamily="34" charset="-122"/>
+                <a:cs typeface="Georgia" pitchFamily="34" charset="-120"/>
+              </a:rPr>
+              <a:t>tikta</a:t>
+            </a:r>
+            <a:pPr algn="l" indent="0" marL="0">
+              <a:lnSpc>
+                <a:spcPts val="1820"/>
+              </a:lnSpc>
+              <a:spcBef>
+                <a:spcPts val="300"/>
+              </a:spcBef>
+              <a:spcAft>
+                <a:spcPts val="300"/>
+              </a:spcAft>
+              <a:buNone/>
+            </a:pPr>
+            <a:r>
+              <a:rPr lang="en-US" sz="1300" dirty="0">
+                <a:solidFill>
+                  <a:srgbClr val="1C2833"/>
+                </a:solidFill>
+                <a:latin typeface="Georgia" pitchFamily="34" charset="0"/>
+                <a:ea typeface="Georgia" pitchFamily="34" charset="-122"/>
+                <a:cs typeface="Georgia" pitchFamily="34" charset="-120"/>
+              </a:rPr>
+              <a:t> (bitter) | methi, neem | pitta, kapha | vāta | | </a:t>
+            </a:r>
+            <a:pPr algn="l" indent="0" marL="0">
+              <a:lnSpc>
+                <a:spcPts val="1820"/>
+              </a:lnSpc>
+              <a:spcBef>
+                <a:spcPts val="300"/>
+              </a:spcBef>
+              <a:spcAft>
+                <a:spcPts val="300"/>
+              </a:spcAft>
+              <a:buNone/>
+            </a:pPr>
+            <a:r>
+              <a:rPr lang="en-US" sz="1300" i="1" dirty="0">
+                <a:solidFill>
+                  <a:srgbClr val="1C2833"/>
+                </a:solidFill>
+                <a:latin typeface="Georgia" pitchFamily="34" charset="0"/>
+                <a:ea typeface="Georgia" pitchFamily="34" charset="-122"/>
+                <a:cs typeface="Georgia" pitchFamily="34" charset="-120"/>
+              </a:rPr>
+              <a:t>kaṣāya</a:t>
+            </a:r>
+            <a:pPr algn="l" indent="0" marL="0">
+              <a:lnSpc>
+                <a:spcPts val="1820"/>
+              </a:lnSpc>
+              <a:spcBef>
+                <a:spcPts val="300"/>
+              </a:spcBef>
+              <a:spcAft>
+                <a:spcPts val="300"/>
+              </a:spcAft>
+              <a:buNone/>
+            </a:pPr>
+            <a:r>
+              <a:rPr lang="en-US" sz="1300" dirty="0">
+                <a:solidFill>
+                  <a:srgbClr val="1C2833"/>
+                </a:solidFill>
+                <a:latin typeface="Georgia" pitchFamily="34" charset="0"/>
+                <a:ea typeface="Georgia" pitchFamily="34" charset="-122"/>
+                <a:cs typeface="Georgia" pitchFamily="34" charset="-120"/>
+              </a:rPr>
+              <a:t> (astringent) | unripe banana, black tea | pitta, kapha | vāta |</a:t>
+            </a:r>
+            <a:endParaRPr lang="en-US" sz="1300" dirty="0"/>
+          </a:p>
+        </p:txBody>
+      </p:sp>
+      <p:sp>
+        <p:nvSpPr>
+          <p:cNvPr id="8" name="Text 6"/>
+          <p:cNvSpPr/>
+          <p:nvPr/>
+        </p:nvSpPr>
+        <p:spPr>
+          <a:xfrm>
+            <a:off x="692051" y="2305199"/>
+            <a:ext cx="7973389" cy="461963"/>
+          </a:xfrm>
+          <a:prstGeom prst="rect">
+            <a:avLst/>
+          </a:prstGeom>
+          <a:noFill/>
+          <a:ln/>
+        </p:spPr>
+        <p:txBody>
+          <a:bodyPr wrap="square" lIns="0" tIns="0" rIns="0" bIns="0" rtlCol="0" anchor="t"/>
+          <a:lstStyle/>
+          <a:p>
+            <a:pPr algn="l" indent="0" marL="0">
+              <a:lnSpc>
+                <a:spcPts val="1820"/>
+              </a:lnSpc>
+              <a:spcBef>
+                <a:spcPts val="300"/>
+              </a:spcBef>
+              <a:spcAft>
+                <a:spcPts val="300"/>
+              </a:spcAft>
+              <a:buNone/>
+            </a:pPr>
+            <a:r>
+              <a:rPr lang="en-US" sz="1300" i="1" dirty="0">
+                <a:solidFill>
+                  <a:srgbClr val="1C2833"/>
+                </a:solidFill>
+                <a:latin typeface="Georgia" pitchFamily="34" charset="0"/>
+                <a:ea typeface="Georgia" pitchFamily="34" charset="-122"/>
+                <a:cs typeface="Georgia" pitchFamily="34" charset="-120"/>
+              </a:rPr>
+              <a:t>A balanced meal touches all six. Indian thālīs often do this naturally (rice, dāl, vegetable, pickle, salad, raita, end-of-meal pān or yoghurt).</a:t>
+            </a:r>
+            <a:endParaRPr lang="en-US" sz="1300" dirty="0"/>
+          </a:p>
+        </p:txBody>
+      </p:sp>
+      <p:sp>
+        <p:nvSpPr>
+          <p:cNvPr id="9" name="Text 7"/>
+          <p:cNvSpPr/>
+          <p:nvPr/>
+        </p:nvSpPr>
+        <p:spPr>
+          <a:xfrm>
+            <a:off x="406301" y="4434929"/>
+            <a:ext cx="8498026" cy="213271"/>
+          </a:xfrm>
+          <a:prstGeom prst="rect">
+            <a:avLst/>
+          </a:prstGeom>
+          <a:noFill/>
+          <a:ln/>
+        </p:spPr>
+        <p:txBody>
+          <a:bodyPr wrap="square" lIns="0" tIns="0" rIns="0" bIns="0" rtlCol="0" anchor="t"/>
+          <a:lstStyle/>
+          <a:p>
+            <a:pPr algn="l" indent="0" marL="0">
+              <a:lnSpc>
                 <a:spcPts val="1680"/>
               </a:lnSpc>
               <a:spcBef>
@@ -3132,15 +5244,1076 @@
                 <a:ea typeface="Arial" pitchFamily="34" charset="-122"/>
                 <a:cs typeface="Arial" pitchFamily="34" charset="-120"/>
               </a:rPr>
+              <a:t>Middle ·  · IKS Curriculum</a:t>
+            </a:r>
+            <a:endParaRPr lang="en-US" sz="1200" dirty="0"/>
+          </a:p>
+        </p:txBody>
+      </p:sp>
+    </p:spTree>
+  </p:cSld>
+  <p:clrMapOvr>
+    <a:masterClrMapping/>
+  </p:clrMapOvr>
+</p:sld>
+</file>
+
+<file path=ppt/slides/slide16.xml><?xml version="1.0" encoding="utf-8"?>
+<p:sld xmlns:a="http://schemas.openxmlformats.org/drawingml/2006/main" xmlns:r="http://schemas.openxmlformats.org/officeDocument/2006/relationships" xmlns:p="http://schemas.openxmlformats.org/presentationml/2006/main">
+  <p:cSld name="Slide 16">
+    <p:bg>
+      <p:bgPr>
+        <a:solidFill>
+          <a:srgbClr val="FFFFFF"/>
+        </a:solidFill>
+      </p:bgPr>
+    </p:bg>
+    <p:spTree>
+      <p:nvGrpSpPr>
+        <p:cNvPr id="1" name=""/>
+        <p:cNvGrpSpPr/>
+        <p:nvPr/>
+      </p:nvGrpSpPr>
+      <p:grpSpPr>
+        <a:xfrm>
+          <a:off x="0" y="0"/>
+          <a:ext cx="0" cy="0"/>
+          <a:chOff x="0" y="0"/>
+          <a:chExt cx="0" cy="0"/>
+        </a:xfrm>
+      </p:grpSpPr>
+      <p:sp>
+        <p:nvSpPr>
+          <p:cNvPr id="2" name="Text 0"/>
+          <p:cNvSpPr/>
+          <p:nvPr/>
+        </p:nvSpPr>
+        <p:spPr>
+          <a:xfrm>
+            <a:off x="0" y="0"/>
+            <a:ext cx="9144000" cy="101501"/>
+          </a:xfrm>
+          <a:prstGeom prst="rect">
+            <a:avLst/>
+          </a:prstGeom>
+          <a:solidFill>
+            <a:srgbClr val="277884"/>
+          </a:solidFill>
+          <a:ln/>
+        </p:spPr>
+        <p:txBody>
+          <a:bodyPr wrap="square" rtlCol="0" anchor="ctr"/>
+          <a:lstStyle/>
+          <a:p>
+            <a:pPr indent="0" marL="0">
+              <a:buNone/>
+            </a:pPr>
+            <a:endParaRPr lang="en-US" dirty="0"/>
+          </a:p>
+        </p:txBody>
+      </p:sp>
+      <p:sp>
+        <p:nvSpPr>
+          <p:cNvPr id="3" name="Text 1"/>
+          <p:cNvSpPr/>
+          <p:nvPr/>
+        </p:nvSpPr>
+        <p:spPr>
+          <a:xfrm>
+            <a:off x="406301" y="457051"/>
+            <a:ext cx="8498026" cy="274290"/>
+          </a:xfrm>
+          <a:prstGeom prst="rect">
+            <a:avLst/>
+          </a:prstGeom>
+          <a:noFill/>
+          <a:ln/>
+        </p:spPr>
+        <p:txBody>
+          <a:bodyPr wrap="square" lIns="0" tIns="0" rIns="0" bIns="0" rtlCol="0" anchor="t"/>
+          <a:lstStyle/>
+          <a:p>
+            <a:pPr algn="l" indent="0" marL="0">
+              <a:lnSpc>
+                <a:spcPts val="2160"/>
+              </a:lnSpc>
+              <a:spcBef>
+                <a:spcPts val="600"/>
+              </a:spcBef>
+              <a:spcAft>
+                <a:spcPts val="800"/>
+              </a:spcAft>
+              <a:buNone/>
+            </a:pPr>
+            <a:r>
+              <a:rPr lang="en-US" sz="1800" b="1" dirty="0">
+                <a:solidFill>
+                  <a:srgbClr val="FE4447"/>
+                </a:solidFill>
+                <a:latin typeface="Georgia" pitchFamily="34" charset="0"/>
+                <a:ea typeface="Georgia" pitchFamily="34" charset="-122"/>
+                <a:cs typeface="Georgia" pitchFamily="34" charset="-120"/>
+              </a:rPr>
+              <a:t>Homework</a:t>
+            </a:r>
+            <a:endParaRPr lang="en-US" sz="1800" dirty="0"/>
+          </a:p>
+        </p:txBody>
+      </p:sp>
+      <p:sp>
+        <p:nvSpPr>
+          <p:cNvPr id="4" name="Text 2"/>
+          <p:cNvSpPr/>
+          <p:nvPr/>
+        </p:nvSpPr>
+        <p:spPr>
+          <a:xfrm>
+            <a:off x="634901" y="883593"/>
+            <a:ext cx="8102798" cy="487561"/>
+          </a:xfrm>
+          <a:prstGeom prst="rect">
+            <a:avLst/>
+          </a:prstGeom>
+          <a:noFill/>
+          <a:ln/>
+        </p:spPr>
+        <p:txBody>
+          <a:bodyPr wrap="square" lIns="0" tIns="0" rIns="0" bIns="0" rtlCol="0" anchor="t"/>
+          <a:lstStyle/>
+          <a:p>
+            <a:pPr algn="l" marL="342900" indent="-342900">
+              <a:lnSpc>
+                <a:spcPts val="1620"/>
+              </a:lnSpc>
+              <a:spcAft>
+                <a:spcPts val="300"/>
+              </a:spcAft>
+              <a:buSzPct val="100000"/>
+              <a:buChar char="•"/>
+            </a:pPr>
+            <a:r>
+              <a:rPr lang="en-US" sz="1200" dirty="0">
+                <a:solidFill>
+                  <a:srgbClr val="1C2833"/>
+                </a:solidFill>
+                <a:latin typeface="Arial" pitchFamily="34" charset="0"/>
+                <a:ea typeface="Arial" pitchFamily="34" charset="-122"/>
+                <a:cs typeface="Arial" pitchFamily="34" charset="-120"/>
+              </a:rPr>
+              <a:t>At dinner tonight, count how many of the six tastes are on your plate. Note which are missing. (No need to "fix" anything — just observe.)</a:t>
+            </a:r>
+            <a:endParaRPr lang="en-US" sz="1200" dirty="0"/>
+          </a:p>
+        </p:txBody>
+      </p:sp>
+      <p:sp>
+        <p:nvSpPr>
+          <p:cNvPr id="5" name="Text 3"/>
+          <p:cNvSpPr/>
+          <p:nvPr/>
+        </p:nvSpPr>
+        <p:spPr>
+          <a:xfrm>
+            <a:off x="406301" y="4434929"/>
+            <a:ext cx="8498026" cy="213271"/>
+          </a:xfrm>
+          <a:prstGeom prst="rect">
+            <a:avLst/>
+          </a:prstGeom>
+          <a:noFill/>
+          <a:ln/>
+        </p:spPr>
+        <p:txBody>
+          <a:bodyPr wrap="square" lIns="0" tIns="0" rIns="0" bIns="0" rtlCol="0" anchor="t"/>
+          <a:lstStyle/>
+          <a:p>
+            <a:pPr algn="l" indent="0" marL="0">
+              <a:lnSpc>
+                <a:spcPts val="1680"/>
+              </a:lnSpc>
+              <a:spcBef>
+                <a:spcPts val="300"/>
+              </a:spcBef>
+              <a:spcAft>
+                <a:spcPts val="300"/>
+              </a:spcAft>
+              <a:buNone/>
+            </a:pPr>
+            <a:r>
+              <a:rPr lang="en-US" sz="1200" dirty="0">
+                <a:solidFill>
+                  <a:srgbClr val="1C2833"/>
+                </a:solidFill>
+                <a:latin typeface="Arial" pitchFamily="34" charset="0"/>
+                <a:ea typeface="Arial" pitchFamily="34" charset="-122"/>
+                <a:cs typeface="Arial" pitchFamily="34" charset="-120"/>
+              </a:rPr>
+              <a:t>Middle ·  · IKS Curriculum</a:t>
+            </a:r>
+            <a:endParaRPr lang="en-US" sz="1200" dirty="0"/>
+          </a:p>
+        </p:txBody>
+      </p:sp>
+    </p:spTree>
+  </p:cSld>
+  <p:clrMapOvr>
+    <a:masterClrMapping/>
+  </p:clrMapOvr>
+</p:sld>
+</file>
+
+<file path=ppt/slides/slide17.xml><?xml version="1.0" encoding="utf-8"?>
+<p:sld xmlns:a="http://schemas.openxmlformats.org/drawingml/2006/main" xmlns:r="http://schemas.openxmlformats.org/officeDocument/2006/relationships" xmlns:p="http://schemas.openxmlformats.org/presentationml/2006/main">
+  <p:cSld name="Slide 17">
+    <p:bg>
+      <p:bgPr>
+        <a:solidFill>
+          <a:srgbClr val="FFFFFF"/>
+        </a:solidFill>
+      </p:bgPr>
+    </p:bg>
+    <p:spTree>
+      <p:nvGrpSpPr>
+        <p:cNvPr id="1" name=""/>
+        <p:cNvGrpSpPr/>
+        <p:nvPr/>
+      </p:nvGrpSpPr>
+      <p:grpSpPr>
+        <a:xfrm>
+          <a:off x="0" y="0"/>
+          <a:ext cx="0" cy="0"/>
+          <a:chOff x="0" y="0"/>
+          <a:chExt cx="0" cy="0"/>
+        </a:xfrm>
+      </p:grpSpPr>
+      <p:sp>
+        <p:nvSpPr>
+          <p:cNvPr id="2" name="Text 0"/>
+          <p:cNvSpPr/>
+          <p:nvPr/>
+        </p:nvSpPr>
+        <p:spPr>
+          <a:xfrm>
+            <a:off x="0" y="0"/>
+            <a:ext cx="9144000" cy="101501"/>
+          </a:xfrm>
+          <a:prstGeom prst="rect">
+            <a:avLst/>
+          </a:prstGeom>
+          <a:solidFill>
+            <a:srgbClr val="277884"/>
+          </a:solidFill>
+          <a:ln/>
+        </p:spPr>
+        <p:txBody>
+          <a:bodyPr wrap="square" rtlCol="0" anchor="ctr"/>
+          <a:lstStyle/>
+          <a:p>
+            <a:pPr indent="0" marL="0">
+              <a:buNone/>
+            </a:pPr>
+            <a:endParaRPr lang="en-US" dirty="0"/>
+          </a:p>
+        </p:txBody>
+      </p:sp>
+      <p:sp>
+        <p:nvSpPr>
+          <p:cNvPr id="3" name="Text 1"/>
+          <p:cNvSpPr/>
+          <p:nvPr/>
+        </p:nvSpPr>
+        <p:spPr>
+          <a:xfrm>
+            <a:off x="406301" y="457051"/>
+            <a:ext cx="8498026" cy="274290"/>
+          </a:xfrm>
+          <a:prstGeom prst="rect">
+            <a:avLst/>
+          </a:prstGeom>
+          <a:noFill/>
+          <a:ln/>
+        </p:spPr>
+        <p:txBody>
+          <a:bodyPr wrap="square" lIns="0" tIns="0" rIns="0" bIns="0" rtlCol="0" anchor="t"/>
+          <a:lstStyle/>
+          <a:p>
+            <a:pPr algn="l" indent="0" marL="0">
+              <a:lnSpc>
+                <a:spcPts val="2160"/>
+              </a:lnSpc>
+              <a:spcBef>
+                <a:spcPts val="600"/>
+              </a:spcBef>
+              <a:spcAft>
+                <a:spcPts val="800"/>
+              </a:spcAft>
+              <a:buNone/>
+            </a:pPr>
+            <a:r>
+              <a:rPr lang="en-US" sz="1800" b="1" dirty="0">
+                <a:solidFill>
+                  <a:srgbClr val="FE4447"/>
+                </a:solidFill>
+                <a:latin typeface="Georgia" pitchFamily="34" charset="0"/>
+                <a:ea typeface="Georgia" pitchFamily="34" charset="-122"/>
+                <a:cs typeface="Georgia" pitchFamily="34" charset="-120"/>
+              </a:rPr>
+              <a:t>Differentiation</a:t>
+            </a:r>
+            <a:endParaRPr lang="en-US" sz="1800" dirty="0"/>
+          </a:p>
+        </p:txBody>
+      </p:sp>
+      <p:sp>
+        <p:nvSpPr>
+          <p:cNvPr id="4" name="Text 2"/>
+          <p:cNvSpPr/>
+          <p:nvPr/>
+        </p:nvSpPr>
+        <p:spPr>
+          <a:xfrm>
+            <a:off x="634901" y="883593"/>
+            <a:ext cx="8102798" cy="937022"/>
+          </a:xfrm>
+          <a:prstGeom prst="rect">
+            <a:avLst/>
+          </a:prstGeom>
+          <a:noFill/>
+          <a:ln/>
+        </p:spPr>
+        <p:txBody>
+          <a:bodyPr wrap="square" lIns="0" tIns="0" rIns="0" bIns="0" rtlCol="0" anchor="t"/>
+          <a:lstStyle/>
+          <a:p>
+            <a:pPr algn="l" marL="342900" indent="-342900">
+              <a:lnSpc>
+                <a:spcPts val="1620"/>
+              </a:lnSpc>
+              <a:spcAft>
+                <a:spcPts val="300"/>
+              </a:spcAft>
+              <a:buSzPct val="100000"/>
+              <a:buChar char="•"/>
+            </a:pPr>
+            <a:r>
+              <a:rPr lang="en-US" sz="1200" b="1" dirty="0">
+                <a:solidFill>
+                  <a:srgbClr val="1C2833"/>
+                </a:solidFill>
+                <a:latin typeface="Arial" pitchFamily="34" charset="0"/>
+                <a:ea typeface="Arial" pitchFamily="34" charset="-122"/>
+                <a:cs typeface="Arial" pitchFamily="34" charset="-120"/>
+              </a:rPr>
+              <a:t>One tier up:</a:t>
+            </a:r>
+            <a:pPr algn="l" indent="0" marL="0">
+              <a:lnSpc>
+                <a:spcPts val="1620"/>
+              </a:lnSpc>
+              <a:spcAft>
+                <a:spcPts val="300"/>
+              </a:spcAft>
+              <a:buNone/>
+            </a:pPr>
+            <a:r>
+              <a:rPr lang="en-US" sz="1200" dirty="0">
+                <a:solidFill>
+                  <a:srgbClr val="1C2833"/>
+                </a:solidFill>
+                <a:latin typeface="Arial" pitchFamily="34" charset="0"/>
+                <a:ea typeface="Arial" pitchFamily="34" charset="-122"/>
+                <a:cs typeface="Arial" pitchFamily="34" charset="-120"/>
+              </a:rPr>
+              <a:t> Pick a classic dish from any cuisine (your family's, or anyone's). Identify the six tastes in it. What balance is the recipe achieving?</a:t>
+            </a:r>
+            <a:endParaRPr lang="en-US" sz="1200" dirty="0"/>
+          </a:p>
+          <a:p>
+            <a:pPr algn="l" marL="342900" indent="-342900">
+              <a:lnSpc>
+                <a:spcPts val="1620"/>
+              </a:lnSpc>
+              <a:spcAft>
+                <a:spcPts val="300"/>
+              </a:spcAft>
+              <a:buSzPct val="100000"/>
+              <a:buChar char="•"/>
+            </a:pPr>
+            <a:r>
+              <a:rPr lang="en-US" sz="1200" b="1" dirty="0">
+                <a:solidFill>
+                  <a:srgbClr val="1C2833"/>
+                </a:solidFill>
+                <a:latin typeface="Arial" pitchFamily="34" charset="0"/>
+                <a:ea typeface="Arial" pitchFamily="34" charset="-122"/>
+                <a:cs typeface="Arial" pitchFamily="34" charset="-120"/>
+              </a:rPr>
+              <a:t>One tier down:</a:t>
+            </a:r>
+            <a:pPr algn="l" indent="0" marL="0">
+              <a:lnSpc>
+                <a:spcPts val="1620"/>
+              </a:lnSpc>
+              <a:spcAft>
+                <a:spcPts val="300"/>
+              </a:spcAft>
+              <a:buNone/>
+            </a:pPr>
+            <a:r>
+              <a:rPr lang="en-US" sz="1200" dirty="0">
+                <a:solidFill>
+                  <a:srgbClr val="1C2833"/>
+                </a:solidFill>
+                <a:latin typeface="Arial" pitchFamily="34" charset="0"/>
+                <a:ea typeface="Arial" pitchFamily="34" charset="-122"/>
+                <a:cs typeface="Arial" pitchFamily="34" charset="-120"/>
+              </a:rPr>
+              <a:t> Remember just three tastes — sweet, sour, salty (the </a:t>
+            </a:r>
+            <a:pPr algn="l" indent="0" marL="0">
+              <a:lnSpc>
+                <a:spcPts val="1620"/>
+              </a:lnSpc>
+              <a:spcAft>
+                <a:spcPts val="300"/>
+              </a:spcAft>
+              <a:buNone/>
+            </a:pPr>
+            <a:r>
+              <a:rPr lang="en-US" sz="1200" i="1" dirty="0">
+                <a:solidFill>
+                  <a:srgbClr val="1C2833"/>
+                </a:solidFill>
+                <a:latin typeface="Arial" pitchFamily="34" charset="0"/>
+                <a:ea typeface="Arial" pitchFamily="34" charset="-122"/>
+                <a:cs typeface="Arial" pitchFamily="34" charset="-120"/>
+              </a:rPr>
+              <a:t>vāta</a:t>
+            </a:r>
+            <a:pPr algn="l" indent="0" marL="0">
+              <a:lnSpc>
+                <a:spcPts val="1620"/>
+              </a:lnSpc>
+              <a:spcAft>
+                <a:spcPts val="300"/>
+              </a:spcAft>
+              <a:buNone/>
+            </a:pPr>
+            <a:r>
+              <a:rPr lang="en-US" sz="1200" dirty="0">
+                <a:solidFill>
+                  <a:srgbClr val="1C2833"/>
+                </a:solidFill>
+                <a:latin typeface="Arial" pitchFamily="34" charset="0"/>
+                <a:ea typeface="Arial" pitchFamily="34" charset="-122"/>
+                <a:cs typeface="Arial" pitchFamily="34" charset="-120"/>
+              </a:rPr>
+              <a:t>-calming three). They're the ones in most home meals.</a:t>
+            </a:r>
+            <a:endParaRPr lang="en-US" sz="1200" dirty="0"/>
+          </a:p>
+        </p:txBody>
+      </p:sp>
+      <p:sp>
+        <p:nvSpPr>
+          <p:cNvPr id="5" name="Text 3"/>
+          <p:cNvSpPr/>
+          <p:nvPr/>
+        </p:nvSpPr>
+        <p:spPr>
+          <a:xfrm>
+            <a:off x="406301" y="4434929"/>
+            <a:ext cx="8498026" cy="213271"/>
+          </a:xfrm>
+          <a:prstGeom prst="rect">
+            <a:avLst/>
+          </a:prstGeom>
+          <a:noFill/>
+          <a:ln/>
+        </p:spPr>
+        <p:txBody>
+          <a:bodyPr wrap="square" lIns="0" tIns="0" rIns="0" bIns="0" rtlCol="0" anchor="t"/>
+          <a:lstStyle/>
+          <a:p>
+            <a:pPr algn="l" indent="0" marL="0">
+              <a:lnSpc>
+                <a:spcPts val="1680"/>
+              </a:lnSpc>
+              <a:spcBef>
+                <a:spcPts val="300"/>
+              </a:spcBef>
+              <a:spcAft>
+                <a:spcPts val="300"/>
+              </a:spcAft>
+              <a:buNone/>
+            </a:pPr>
+            <a:r>
+              <a:rPr lang="en-US" sz="1200" dirty="0">
+                <a:solidFill>
+                  <a:srgbClr val="1C2833"/>
+                </a:solidFill>
+                <a:latin typeface="Arial" pitchFamily="34" charset="0"/>
+                <a:ea typeface="Arial" pitchFamily="34" charset="-122"/>
+                <a:cs typeface="Arial" pitchFamily="34" charset="-120"/>
+              </a:rPr>
+              <a:t>Middle ·  · IKS Curriculum</a:t>
+            </a:r>
+            <a:endParaRPr lang="en-US" sz="1200" dirty="0"/>
+          </a:p>
+        </p:txBody>
+      </p:sp>
+    </p:spTree>
+  </p:cSld>
+  <p:clrMapOvr>
+    <a:masterClrMapping/>
+  </p:clrMapOvr>
+</p:sld>
+</file>
+
+<file path=ppt/slides/slide18.xml><?xml version="1.0" encoding="utf-8"?>
+<p:sld xmlns:a="http://schemas.openxmlformats.org/drawingml/2006/main" xmlns:r="http://schemas.openxmlformats.org/officeDocument/2006/relationships" xmlns:p="http://schemas.openxmlformats.org/presentationml/2006/main">
+  <p:cSld name="Slide 18">
+    <p:bg>
+      <p:bgPr>
+        <a:solidFill>
+          <a:srgbClr val="FFFFFF"/>
+        </a:solidFill>
+      </p:bgPr>
+    </p:bg>
+    <p:spTree>
+      <p:nvGrpSpPr>
+        <p:cNvPr id="1" name=""/>
+        <p:cNvGrpSpPr/>
+        <p:nvPr/>
+      </p:nvGrpSpPr>
+      <p:grpSpPr>
+        <a:xfrm>
+          <a:off x="0" y="0"/>
+          <a:ext cx="0" cy="0"/>
+          <a:chOff x="0" y="0"/>
+          <a:chExt cx="0" cy="0"/>
+        </a:xfrm>
+      </p:grpSpPr>
+      <p:sp>
+        <p:nvSpPr>
+          <p:cNvPr id="2" name="Text 0"/>
+          <p:cNvSpPr/>
+          <p:nvPr/>
+        </p:nvSpPr>
+        <p:spPr>
+          <a:xfrm>
+            <a:off x="0" y="0"/>
+            <a:ext cx="9144000" cy="101501"/>
+          </a:xfrm>
+          <a:prstGeom prst="rect">
+            <a:avLst/>
+          </a:prstGeom>
+          <a:solidFill>
+            <a:srgbClr val="277884"/>
+          </a:solidFill>
+          <a:ln/>
+        </p:spPr>
+        <p:txBody>
+          <a:bodyPr wrap="square" rtlCol="0" anchor="ctr"/>
+          <a:lstStyle/>
+          <a:p>
+            <a:pPr indent="0" marL="0">
+              <a:buNone/>
+            </a:pPr>
+            <a:endParaRPr lang="en-US" dirty="0"/>
+          </a:p>
+        </p:txBody>
+      </p:sp>
+      <p:sp>
+        <p:nvSpPr>
+          <p:cNvPr id="3" name="Text 1"/>
+          <p:cNvSpPr/>
+          <p:nvPr/>
+        </p:nvSpPr>
+        <p:spPr>
+          <a:xfrm>
+            <a:off x="406301" y="457051"/>
+            <a:ext cx="8498026" cy="274290"/>
+          </a:xfrm>
+          <a:prstGeom prst="rect">
+            <a:avLst/>
+          </a:prstGeom>
+          <a:noFill/>
+          <a:ln/>
+        </p:spPr>
+        <p:txBody>
+          <a:bodyPr wrap="square" lIns="0" tIns="0" rIns="0" bIns="0" rtlCol="0" anchor="t"/>
+          <a:lstStyle/>
+          <a:p>
+            <a:pPr algn="l" indent="0" marL="0">
+              <a:lnSpc>
+                <a:spcPts val="2160"/>
+              </a:lnSpc>
+              <a:spcBef>
+                <a:spcPts val="600"/>
+              </a:spcBef>
+              <a:spcAft>
+                <a:spcPts val="800"/>
+              </a:spcAft>
+              <a:buNone/>
+            </a:pPr>
+            <a:r>
+              <a:rPr lang="en-US" sz="1800" b="1" dirty="0">
+                <a:solidFill>
+                  <a:srgbClr val="FE4447"/>
+                </a:solidFill>
+                <a:latin typeface="Georgia" pitchFamily="34" charset="0"/>
+                <a:ea typeface="Georgia" pitchFamily="34" charset="-122"/>
+                <a:cs typeface="Georgia" pitchFamily="34" charset="-120"/>
+              </a:rPr>
+              <a:t>Teacher notes</a:t>
+            </a:r>
+            <a:endParaRPr lang="en-US" sz="1800" dirty="0"/>
+          </a:p>
+        </p:txBody>
+      </p:sp>
+      <p:sp>
+        <p:nvSpPr>
+          <p:cNvPr id="4" name="Text 2"/>
+          <p:cNvSpPr/>
+          <p:nvPr/>
+        </p:nvSpPr>
+        <p:spPr>
+          <a:xfrm>
+            <a:off x="634901" y="883593"/>
+            <a:ext cx="8102798" cy="1218902"/>
+          </a:xfrm>
+          <a:prstGeom prst="rect">
+            <a:avLst/>
+          </a:prstGeom>
+          <a:noFill/>
+          <a:ln/>
+        </p:spPr>
+        <p:txBody>
+          <a:bodyPr wrap="square" lIns="0" tIns="0" rIns="0" bIns="0" rtlCol="0" anchor="t"/>
+          <a:lstStyle/>
+          <a:p>
+            <a:pPr algn="l" marL="342900" indent="-342900">
+              <a:lnSpc>
+                <a:spcPts val="1620"/>
+              </a:lnSpc>
+              <a:spcAft>
+                <a:spcPts val="300"/>
+              </a:spcAft>
+              <a:buSzPct val="100000"/>
+              <a:buChar char="•"/>
+            </a:pPr>
+            <a:r>
+              <a:rPr lang="en-US" sz="1200" dirty="0">
+                <a:solidFill>
+                  <a:srgbClr val="1C2833"/>
+                </a:solidFill>
+                <a:latin typeface="Arial" pitchFamily="34" charset="0"/>
+                <a:ea typeface="Arial" pitchFamily="34" charset="-122"/>
+                <a:cs typeface="Arial" pitchFamily="34" charset="-120"/>
+              </a:rPr>
+              <a:t>Reminder: NOT a diet plan. Don't let students decide "I must eat bitter from now on." It's awareness.</a:t>
+            </a:r>
+            <a:endParaRPr lang="en-US" sz="1200" dirty="0"/>
+          </a:p>
+          <a:p>
+            <a:pPr algn="l" marL="342900" indent="-342900">
+              <a:lnSpc>
+                <a:spcPts val="1620"/>
+              </a:lnSpc>
+              <a:spcAft>
+                <a:spcPts val="300"/>
+              </a:spcAft>
+              <a:buSzPct val="100000"/>
+              <a:buChar char="•"/>
+            </a:pPr>
+            <a:r>
+              <a:rPr lang="en-US" sz="1200" dirty="0">
+                <a:solidFill>
+                  <a:srgbClr val="1C2833"/>
+                </a:solidFill>
+                <a:latin typeface="Arial" pitchFamily="34" charset="0"/>
+                <a:ea typeface="Arial" pitchFamily="34" charset="-122"/>
+                <a:cs typeface="Arial" pitchFamily="34" charset="-120"/>
+              </a:rPr>
+              <a:t>The </a:t>
+            </a:r>
+            <a:pPr algn="l" indent="0" marL="0">
+              <a:lnSpc>
+                <a:spcPts val="1620"/>
+              </a:lnSpc>
+              <a:spcAft>
+                <a:spcPts val="300"/>
+              </a:spcAft>
+              <a:buNone/>
+            </a:pPr>
+            <a:r>
+              <a:rPr lang="en-US" sz="1200" i="1" dirty="0">
+                <a:solidFill>
+                  <a:srgbClr val="1C2833"/>
+                </a:solidFill>
+                <a:latin typeface="Arial" pitchFamily="34" charset="0"/>
+                <a:ea typeface="Arial" pitchFamily="34" charset="-122"/>
+                <a:cs typeface="Arial" pitchFamily="34" charset="-120"/>
+              </a:rPr>
+              <a:t>kaṭu</a:t>
+            </a:r>
+            <a:pPr algn="l" indent="0" marL="0">
+              <a:lnSpc>
+                <a:spcPts val="1620"/>
+              </a:lnSpc>
+              <a:spcAft>
+                <a:spcPts val="300"/>
+              </a:spcAft>
+              <a:buNone/>
+            </a:pPr>
+            <a:r>
+              <a:rPr lang="en-US" sz="1200" dirty="0">
+                <a:solidFill>
+                  <a:srgbClr val="1C2833"/>
+                </a:solidFill>
+                <a:latin typeface="Arial" pitchFamily="34" charset="0"/>
+                <a:ea typeface="Arial" pitchFamily="34" charset="-122"/>
+                <a:cs typeface="Arial" pitchFamily="34" charset="-120"/>
+              </a:rPr>
+              <a:t> (pungent) station can be a strong sample — let students opt for sniffing only.</a:t>
+            </a:r>
+            <a:endParaRPr lang="en-US" sz="1200" dirty="0"/>
+          </a:p>
+          <a:p>
+            <a:pPr algn="l" marL="342900" indent="-342900">
+              <a:lnSpc>
+                <a:spcPts val="1620"/>
+              </a:lnSpc>
+              <a:spcAft>
+                <a:spcPts val="300"/>
+              </a:spcAft>
+              <a:buSzPct val="100000"/>
+              <a:buChar char="•"/>
+            </a:pPr>
+            <a:r>
+              <a:rPr lang="en-US" sz="1200" dirty="0">
+                <a:solidFill>
+                  <a:srgbClr val="1C2833"/>
+                </a:solidFill>
+                <a:latin typeface="Arial" pitchFamily="34" charset="0"/>
+                <a:ea typeface="Arial" pitchFamily="34" charset="-122"/>
+                <a:cs typeface="Arial" pitchFamily="34" charset="-120"/>
+              </a:rPr>
+              <a:t>Some students will discover they hate astringent or bitter. Note the cultural-conditioning point: most Indian cuisines train astringent (raw banana) and bitter (methi) deliberately, because they balance the heavy-sweet majority of the meal.</a:t>
+            </a:r>
+            <a:endParaRPr lang="en-US" sz="1200" dirty="0"/>
+          </a:p>
+          <a:p>
+            <a:pPr algn="l" marL="342900" indent="-342900">
+              <a:lnSpc>
+                <a:spcPts val="1620"/>
+              </a:lnSpc>
+              <a:spcAft>
+                <a:spcPts val="300"/>
+              </a:spcAft>
+              <a:buSzPct val="100000"/>
+              <a:buChar char="•"/>
+            </a:pPr>
+            <a:r>
+              <a:rPr lang="en-US" sz="1200" dirty="0">
+                <a:solidFill>
+                  <a:srgbClr val="1C2833"/>
+                </a:solidFill>
+                <a:latin typeface="Arial" pitchFamily="34" charset="0"/>
+                <a:ea typeface="Arial" pitchFamily="34" charset="-122"/>
+                <a:cs typeface="Arial" pitchFamily="34" charset="-120"/>
+              </a:rPr>
+              <a:t>Avoid talking about </a:t>
+            </a:r>
+            <a:pPr algn="l" indent="0" marL="0">
+              <a:lnSpc>
+                <a:spcPts val="1620"/>
+              </a:lnSpc>
+              <a:spcAft>
+                <a:spcPts val="300"/>
+              </a:spcAft>
+              <a:buNone/>
+            </a:pPr>
+            <a:r>
+              <a:rPr lang="en-US" sz="1200" i="1" dirty="0">
+                <a:solidFill>
+                  <a:srgbClr val="1C2833"/>
+                </a:solidFill>
+                <a:latin typeface="Arial" pitchFamily="34" charset="0"/>
+                <a:ea typeface="Arial" pitchFamily="34" charset="-122"/>
+                <a:cs typeface="Arial" pitchFamily="34" charset="-120"/>
+              </a:rPr>
+              <a:t>doṣa</a:t>
+            </a:r>
+            <a:pPr algn="l" indent="0" marL="0">
+              <a:lnSpc>
+                <a:spcPts val="1620"/>
+              </a:lnSpc>
+              <a:spcAft>
+                <a:spcPts val="300"/>
+              </a:spcAft>
+              <a:buNone/>
+            </a:pPr>
+            <a:r>
+              <a:rPr lang="en-US" sz="1200" dirty="0">
+                <a:solidFill>
+                  <a:srgbClr val="1C2833"/>
+                </a:solidFill>
+                <a:latin typeface="Arial" pitchFamily="34" charset="0"/>
+                <a:ea typeface="Arial" pitchFamily="34" charset="-122"/>
+                <a:cs typeface="Arial" pitchFamily="34" charset="-120"/>
+              </a:rPr>
+              <a:t>-specific diets in detail. This isn't a meal-planning class.</a:t>
+            </a:r>
+            <a:endParaRPr lang="en-US" sz="1200" dirty="0"/>
+          </a:p>
+        </p:txBody>
+      </p:sp>
+      <p:sp>
+        <p:nvSpPr>
+          <p:cNvPr id="5" name="Text 3"/>
+          <p:cNvSpPr/>
+          <p:nvPr/>
+        </p:nvSpPr>
+        <p:spPr>
+          <a:xfrm>
+            <a:off x="406301" y="4434929"/>
+            <a:ext cx="8498026" cy="213271"/>
+          </a:xfrm>
+          <a:prstGeom prst="rect">
+            <a:avLst/>
+          </a:prstGeom>
+          <a:noFill/>
+          <a:ln/>
+        </p:spPr>
+        <p:txBody>
+          <a:bodyPr wrap="square" lIns="0" tIns="0" rIns="0" bIns="0" rtlCol="0" anchor="t"/>
+          <a:lstStyle/>
+          <a:p>
+            <a:pPr algn="l" indent="0" marL="0">
+              <a:lnSpc>
+                <a:spcPts val="1680"/>
+              </a:lnSpc>
+              <a:spcBef>
+                <a:spcPts val="300"/>
+              </a:spcBef>
+              <a:spcAft>
+                <a:spcPts val="300"/>
+              </a:spcAft>
+              <a:buNone/>
+            </a:pPr>
+            <a:r>
+              <a:rPr lang="en-US" sz="1200" dirty="0">
+                <a:solidFill>
+                  <a:srgbClr val="1C2833"/>
+                </a:solidFill>
+                <a:latin typeface="Arial" pitchFamily="34" charset="0"/>
+                <a:ea typeface="Arial" pitchFamily="34" charset="-122"/>
+                <a:cs typeface="Arial" pitchFamily="34" charset="-120"/>
+              </a:rPr>
+              <a:t>Middle ·  · IKS Curriculum</a:t>
+            </a:r>
+            <a:endParaRPr lang="en-US" sz="1200" dirty="0"/>
+          </a:p>
+        </p:txBody>
+      </p:sp>
+    </p:spTree>
+  </p:cSld>
+  <p:clrMapOvr>
+    <a:masterClrMapping/>
+  </p:clrMapOvr>
+</p:sld>
+</file>
+
+<file path=ppt/slides/slide19.xml><?xml version="1.0" encoding="utf-8"?>
+<p:sld xmlns:a="http://schemas.openxmlformats.org/drawingml/2006/main" xmlns:r="http://schemas.openxmlformats.org/officeDocument/2006/relationships" xmlns:p="http://schemas.openxmlformats.org/presentationml/2006/main">
+  <p:cSld name="Slide 19">
+    <p:bg>
+      <p:bgPr>
+        <a:solidFill>
+          <a:srgbClr val="FFFFFF"/>
+        </a:solidFill>
+      </p:bgPr>
+    </p:bg>
+    <p:spTree>
+      <p:nvGrpSpPr>
+        <p:cNvPr id="1" name=""/>
+        <p:cNvGrpSpPr/>
+        <p:nvPr/>
+      </p:nvGrpSpPr>
+      <p:grpSpPr>
+        <a:xfrm>
+          <a:off x="0" y="0"/>
+          <a:ext cx="0" cy="0"/>
+          <a:chOff x="0" y="0"/>
+          <a:chExt cx="0" cy="0"/>
+        </a:xfrm>
+      </p:grpSpPr>
+      <p:sp>
+        <p:nvSpPr>
+          <p:cNvPr id="2" name="Text 0"/>
+          <p:cNvSpPr/>
+          <p:nvPr/>
+        </p:nvSpPr>
+        <p:spPr>
+          <a:xfrm>
+            <a:off x="0" y="0"/>
+            <a:ext cx="9144000" cy="101501"/>
+          </a:xfrm>
+          <a:prstGeom prst="rect">
+            <a:avLst/>
+          </a:prstGeom>
+          <a:solidFill>
+            <a:srgbClr val="277884"/>
+          </a:solidFill>
+          <a:ln/>
+        </p:spPr>
+        <p:txBody>
+          <a:bodyPr wrap="square" rtlCol="0" anchor="ctr"/>
+          <a:lstStyle/>
+          <a:p>
+            <a:pPr indent="0" marL="0">
+              <a:buNone/>
+            </a:pPr>
+            <a:endParaRPr lang="en-US" dirty="0"/>
+          </a:p>
+        </p:txBody>
+      </p:sp>
+      <p:sp>
+        <p:nvSpPr>
+          <p:cNvPr id="3" name="Text 1"/>
+          <p:cNvSpPr/>
+          <p:nvPr/>
+        </p:nvSpPr>
+        <p:spPr>
+          <a:xfrm>
+            <a:off x="406301" y="457051"/>
+            <a:ext cx="8498026" cy="274290"/>
+          </a:xfrm>
+          <a:prstGeom prst="rect">
+            <a:avLst/>
+          </a:prstGeom>
+          <a:noFill/>
+          <a:ln/>
+        </p:spPr>
+        <p:txBody>
+          <a:bodyPr wrap="square" lIns="0" tIns="0" rIns="0" bIns="0" rtlCol="0" anchor="t"/>
+          <a:lstStyle/>
+          <a:p>
+            <a:pPr algn="l" indent="0" marL="0">
+              <a:lnSpc>
+                <a:spcPts val="2160"/>
+              </a:lnSpc>
+              <a:spcBef>
+                <a:spcPts val="600"/>
+              </a:spcBef>
+              <a:spcAft>
+                <a:spcPts val="800"/>
+              </a:spcAft>
+              <a:buNone/>
+            </a:pPr>
+            <a:r>
+              <a:rPr lang="en-US" sz="1800" b="1" dirty="0">
+                <a:solidFill>
+                  <a:srgbClr val="FE4447"/>
+                </a:solidFill>
+                <a:latin typeface="Georgia" pitchFamily="34" charset="0"/>
+                <a:ea typeface="Georgia" pitchFamily="34" charset="-122"/>
+                <a:cs typeface="Georgia" pitchFamily="34" charset="-120"/>
+              </a:rPr>
+              <a:t>Citation(s) used in this lesson</a:t>
+            </a:r>
+            <a:endParaRPr lang="en-US" sz="1800" dirty="0"/>
+          </a:p>
+        </p:txBody>
+      </p:sp>
+      <p:sp>
+        <p:nvSpPr>
+          <p:cNvPr id="4" name="Text 2"/>
+          <p:cNvSpPr/>
+          <p:nvPr/>
+        </p:nvSpPr>
+        <p:spPr>
+          <a:xfrm>
+            <a:off x="634901" y="883593"/>
+            <a:ext cx="8102798" cy="487561"/>
+          </a:xfrm>
+          <a:prstGeom prst="rect">
+            <a:avLst/>
+          </a:prstGeom>
+          <a:noFill/>
+          <a:ln/>
+        </p:spPr>
+        <p:txBody>
+          <a:bodyPr wrap="square" lIns="0" tIns="0" rIns="0" bIns="0" rtlCol="0" anchor="t"/>
+          <a:lstStyle/>
+          <a:p>
+            <a:pPr algn="l" marL="342900" indent="-342900">
+              <a:lnSpc>
+                <a:spcPts val="1620"/>
+              </a:lnSpc>
+              <a:spcAft>
+                <a:spcPts val="300"/>
+              </a:spcAft>
+              <a:buSzPct val="100000"/>
+              <a:buChar char="•"/>
+            </a:pPr>
+            <a:r>
+              <a:rPr lang="en-US" sz="1200" dirty="0">
+                <a:solidFill>
+                  <a:srgbClr val="1C2833"/>
+                </a:solidFill>
+                <a:latin typeface="Arial" pitchFamily="34" charset="0"/>
+                <a:ea typeface="Arial" pitchFamily="34" charset="-122"/>
+                <a:cs typeface="Arial" pitchFamily="34" charset="-120"/>
+              </a:rPr>
+              <a:t>The </a:t>
+            </a:r>
+            <a:pPr algn="l" indent="0" marL="0">
+              <a:lnSpc>
+                <a:spcPts val="1620"/>
+              </a:lnSpc>
+              <a:spcAft>
+                <a:spcPts val="300"/>
+              </a:spcAft>
+              <a:buNone/>
+            </a:pPr>
+            <a:r>
+              <a:rPr lang="en-US" sz="1200" i="1" dirty="0">
+                <a:solidFill>
+                  <a:srgbClr val="1C2833"/>
+                </a:solidFill>
+                <a:latin typeface="Arial" pitchFamily="34" charset="0"/>
+                <a:ea typeface="Arial" pitchFamily="34" charset="-122"/>
+                <a:cs typeface="Arial" pitchFamily="34" charset="-120"/>
+              </a:rPr>
+              <a:t>ṣaḍ-rasa</a:t>
+            </a:r>
+            <a:pPr algn="l" indent="0" marL="0">
+              <a:lnSpc>
+                <a:spcPts val="1620"/>
+              </a:lnSpc>
+              <a:spcAft>
+                <a:spcPts val="300"/>
+              </a:spcAft>
+              <a:buNone/>
+            </a:pPr>
+            <a:r>
+              <a:rPr lang="en-US" sz="1200" dirty="0">
+                <a:solidFill>
+                  <a:srgbClr val="1C2833"/>
+                </a:solidFill>
+                <a:latin typeface="Arial" pitchFamily="34" charset="0"/>
+                <a:ea typeface="Arial" pitchFamily="34" charset="-122"/>
+                <a:cs typeface="Arial" pitchFamily="34" charset="-120"/>
+              </a:rPr>
               <a:t> enumeration appears in Caraka Saṁhitā </a:t>
             </a:r>
             <a:pPr algn="l" indent="0" marL="0">
               <a:lnSpc>
-                <a:spcPts val="1680"/>
-              </a:lnSpc>
-              <a:spcBef>
-                <a:spcPts val="300"/>
-              </a:spcBef>
+                <a:spcPts val="1620"/>
+              </a:lnSpc>
               <a:spcAft>
                 <a:spcPts val="300"/>
               </a:spcAft>
@@ -3159,11 +6332,8 @@
             </a:r>
             <a:pPr algn="l" indent="0" marL="0">
               <a:lnSpc>
-                <a:spcPts val="1680"/>
-              </a:lnSpc>
-              <a:spcBef>
-                <a:spcPts val="300"/>
-              </a:spcBef>
+                <a:spcPts val="1620"/>
+              </a:lnSpc>
               <a:spcAft>
                 <a:spcPts val="300"/>
               </a:spcAft>
@@ -3182,11 +6352,8 @@
             </a:r>
             <a:pPr algn="l" indent="0" marL="0">
               <a:lnSpc>
-                <a:spcPts val="1680"/>
-              </a:lnSpc>
-              <a:spcBef>
-                <a:spcPts val="300"/>
-              </a:spcBef>
+                <a:spcPts val="1620"/>
+              </a:lnSpc>
               <a:spcAft>
                 <a:spcPts val="300"/>
               </a:spcAft>
@@ -3205,11 +6372,8 @@
             </a:r>
             <a:pPr algn="l" indent="0" marL="0">
               <a:lnSpc>
-                <a:spcPts val="1680"/>
-              </a:lnSpc>
-              <a:spcBef>
-                <a:spcPts val="300"/>
-              </a:spcBef>
+                <a:spcPts val="1620"/>
+              </a:lnSpc>
               <a:spcAft>
                 <a:spcPts val="300"/>
               </a:spcAft>
@@ -3382,7 +6546,7 @@
                 <a:ea typeface="Georgia" pitchFamily="34" charset="-122"/>
                 <a:cs typeface="Georgia" pitchFamily="34" charset="-120"/>
               </a:rPr>
-              <a:t>Materials</a:t>
+              <a:t>Learning objective</a:t>
             </a:r>
             <a:endParaRPr lang="en-US" sz="1800" dirty="0"/>
           </a:p>
@@ -3397,7 +6561,7 @@
         <p:spPr>
           <a:xfrm>
             <a:off x="406301" y="870942"/>
-            <a:ext cx="8498026" cy="853083"/>
+            <a:ext cx="8498026" cy="426541"/>
           </a:xfrm>
           <a:prstGeom prst="rect">
             <a:avLst/>
@@ -3430,7 +6594,7 @@
                 <a:ea typeface="Arial" pitchFamily="34" charset="-122"/>
                 <a:cs typeface="Arial" pitchFamily="34" charset="-120"/>
               </a:rPr>
-              <a:t>– Six small samples (covered before the lesson starts): – Sweet (</a:t>
+              <a:t>By the end of this lesson, students name the </a:t>
             </a:r>
             <a:pPr algn="l" indent="0" marL="0">
               <a:lnSpc>
@@ -3453,7 +6617,7 @@
                 <a:ea typeface="Arial" pitchFamily="34" charset="-122"/>
                 <a:cs typeface="Arial" pitchFamily="34" charset="-120"/>
               </a:rPr>
-              <a:t>madhura</a:t>
+              <a:t>ṣaḍ-rasa</a:t>
             </a:r>
             <a:pPr algn="l" indent="0" marL="0">
               <a:lnSpc>
@@ -3476,7 +6640,7 @@
                 <a:ea typeface="Arial" pitchFamily="34" charset="-122"/>
                 <a:cs typeface="Arial" pitchFamily="34" charset="-120"/>
               </a:rPr>
-              <a:t>) — jaggery / a piece of date – Sour (</a:t>
+              <a:t> (six tastes) in IAST with English meaning, identify which tastes calm and which aggravate each </a:t>
             </a:r>
             <a:pPr algn="l" indent="0" marL="0">
               <a:lnSpc>
@@ -3499,7 +6663,7 @@
                 <a:ea typeface="Arial" pitchFamily="34" charset="-122"/>
                 <a:cs typeface="Arial" pitchFamily="34" charset="-120"/>
               </a:rPr>
-              <a:t>amla</a:t>
+              <a:t>doṣa</a:t>
             </a:r>
             <a:pPr algn="l" indent="0" marL="0">
               <a:lnSpc>
@@ -3522,191 +6686,7 @@
                 <a:ea typeface="Arial" pitchFamily="34" charset="-122"/>
                 <a:cs typeface="Arial" pitchFamily="34" charset="-120"/>
               </a:rPr>
-              <a:t>) — lemon wedge / amla powder – Salty (</a:t>
-            </a:r>
-            <a:pPr algn="l" indent="0" marL="0">
-              <a:lnSpc>
-                <a:spcPts val="1680"/>
-              </a:lnSpc>
-              <a:spcBef>
-                <a:spcPts val="300"/>
-              </a:spcBef>
-              <a:spcAft>
-                <a:spcPts val="300"/>
-              </a:spcAft>
-              <a:buNone/>
-            </a:pPr>
-            <a:r>
-              <a:rPr lang="en-US" sz="1200" i="1" dirty="0">
-                <a:solidFill>
-                  <a:srgbClr val="1C2833"/>
-                </a:solidFill>
-                <a:latin typeface="Arial" pitchFamily="34" charset="0"/>
-                <a:ea typeface="Arial" pitchFamily="34" charset="-122"/>
-                <a:cs typeface="Arial" pitchFamily="34" charset="-120"/>
-              </a:rPr>
-              <a:t>lavaṇa</a:t>
-            </a:r>
-            <a:pPr algn="l" indent="0" marL="0">
-              <a:lnSpc>
-                <a:spcPts val="1680"/>
-              </a:lnSpc>
-              <a:spcBef>
-                <a:spcPts val="300"/>
-              </a:spcBef>
-              <a:spcAft>
-                <a:spcPts val="300"/>
-              </a:spcAft>
-              <a:buNone/>
-            </a:pPr>
-            <a:r>
-              <a:rPr lang="en-US" sz="1200" dirty="0">
-                <a:solidFill>
-                  <a:srgbClr val="1C2833"/>
-                </a:solidFill>
-                <a:latin typeface="Arial" pitchFamily="34" charset="0"/>
-                <a:ea typeface="Arial" pitchFamily="34" charset="-122"/>
-                <a:cs typeface="Arial" pitchFamily="34" charset="-120"/>
-              </a:rPr>
-              <a:t>) — rock salt – Pungent (</a:t>
-            </a:r>
-            <a:pPr algn="l" indent="0" marL="0">
-              <a:lnSpc>
-                <a:spcPts val="1680"/>
-              </a:lnSpc>
-              <a:spcBef>
-                <a:spcPts val="300"/>
-              </a:spcBef>
-              <a:spcAft>
-                <a:spcPts val="300"/>
-              </a:spcAft>
-              <a:buNone/>
-            </a:pPr>
-            <a:r>
-              <a:rPr lang="en-US" sz="1200" i="1" dirty="0">
-                <a:solidFill>
-                  <a:srgbClr val="1C2833"/>
-                </a:solidFill>
-                <a:latin typeface="Arial" pitchFamily="34" charset="0"/>
-                <a:ea typeface="Arial" pitchFamily="34" charset="-122"/>
-                <a:cs typeface="Arial" pitchFamily="34" charset="-120"/>
-              </a:rPr>
-              <a:t>kaṭu</a:t>
-            </a:r>
-            <a:pPr algn="l" indent="0" marL="0">
-              <a:lnSpc>
-                <a:spcPts val="1680"/>
-              </a:lnSpc>
-              <a:spcBef>
-                <a:spcPts val="300"/>
-              </a:spcBef>
-              <a:spcAft>
-                <a:spcPts val="300"/>
-              </a:spcAft>
-              <a:buNone/>
-            </a:pPr>
-            <a:r>
-              <a:rPr lang="en-US" sz="1200" dirty="0">
-                <a:solidFill>
-                  <a:srgbClr val="1C2833"/>
-                </a:solidFill>
-                <a:latin typeface="Arial" pitchFamily="34" charset="0"/>
-                <a:ea typeface="Arial" pitchFamily="34" charset="-122"/>
-                <a:cs typeface="Arial" pitchFamily="34" charset="-120"/>
-              </a:rPr>
-              <a:t>) — fresh ginger / a peppercorn – Bitter (</a:t>
-            </a:r>
-            <a:pPr algn="l" indent="0" marL="0">
-              <a:lnSpc>
-                <a:spcPts val="1680"/>
-              </a:lnSpc>
-              <a:spcBef>
-                <a:spcPts val="300"/>
-              </a:spcBef>
-              <a:spcAft>
-                <a:spcPts val="300"/>
-              </a:spcAft>
-              <a:buNone/>
-            </a:pPr>
-            <a:r>
-              <a:rPr lang="en-US" sz="1200" i="1" dirty="0">
-                <a:solidFill>
-                  <a:srgbClr val="1C2833"/>
-                </a:solidFill>
-                <a:latin typeface="Arial" pitchFamily="34" charset="0"/>
-                <a:ea typeface="Arial" pitchFamily="34" charset="-122"/>
-                <a:cs typeface="Arial" pitchFamily="34" charset="-120"/>
-              </a:rPr>
-              <a:t>tikta</a:t>
-            </a:r>
-            <a:pPr algn="l" indent="0" marL="0">
-              <a:lnSpc>
-                <a:spcPts val="1680"/>
-              </a:lnSpc>
-              <a:spcBef>
-                <a:spcPts val="300"/>
-              </a:spcBef>
-              <a:spcAft>
-                <a:spcPts val="300"/>
-              </a:spcAft>
-              <a:buNone/>
-            </a:pPr>
-            <a:r>
-              <a:rPr lang="en-US" sz="1200" dirty="0">
-                <a:solidFill>
-                  <a:srgbClr val="1C2833"/>
-                </a:solidFill>
-                <a:latin typeface="Arial" pitchFamily="34" charset="0"/>
-                <a:ea typeface="Arial" pitchFamily="34" charset="-122"/>
-                <a:cs typeface="Arial" pitchFamily="34" charset="-120"/>
-              </a:rPr>
-              <a:t>) — methi leaf / a tiny bit of neem powder – Astringent (</a:t>
-            </a:r>
-            <a:pPr algn="l" indent="0" marL="0">
-              <a:lnSpc>
-                <a:spcPts val="1680"/>
-              </a:lnSpc>
-              <a:spcBef>
-                <a:spcPts val="300"/>
-              </a:spcBef>
-              <a:spcAft>
-                <a:spcPts val="300"/>
-              </a:spcAft>
-              <a:buNone/>
-            </a:pPr>
-            <a:r>
-              <a:rPr lang="en-US" sz="1200" i="1" dirty="0">
-                <a:solidFill>
-                  <a:srgbClr val="1C2833"/>
-                </a:solidFill>
-                <a:latin typeface="Arial" pitchFamily="34" charset="0"/>
-                <a:ea typeface="Arial" pitchFamily="34" charset="-122"/>
-                <a:cs typeface="Arial" pitchFamily="34" charset="-120"/>
-              </a:rPr>
-              <a:t>kaṣāya</a:t>
-            </a:r>
-            <a:pPr algn="l" indent="0" marL="0">
-              <a:lnSpc>
-                <a:spcPts val="1680"/>
-              </a:lnSpc>
-              <a:spcBef>
-                <a:spcPts val="300"/>
-              </a:spcBef>
-              <a:spcAft>
-                <a:spcPts val="300"/>
-              </a:spcAft>
-              <a:buNone/>
-            </a:pPr>
-            <a:r>
-              <a:rPr lang="en-US" sz="1200" dirty="0">
-                <a:solidFill>
-                  <a:srgbClr val="1C2833"/>
-                </a:solidFill>
-                <a:latin typeface="Arial" pitchFamily="34" charset="0"/>
-                <a:ea typeface="Arial" pitchFamily="34" charset="-122"/>
-                <a:cs typeface="Arial" pitchFamily="34" charset="-120"/>
-              </a:rPr>
-              <a:t>) — unripe banana / strong black tea – 6 paper plates / labelled cups – Toothpicks for sampling – A glass of water per student for rinsing – Allergy/dietary check completed in advance</a:t>
+              <a:t>, and articulate why food is a primary lever in Ayurvedic balance.</a:t>
             </a:r>
             <a:endParaRPr lang="en-US" sz="1200" dirty="0"/>
           </a:p>
@@ -3864,7 +6844,7 @@
                 <a:ea typeface="Georgia" pitchFamily="34" charset="-122"/>
                 <a:cs typeface="Georgia" pitchFamily="34" charset="-120"/>
               </a:rPr>
-              <a:t>Vocabulary introduced today</a:t>
+              <a:t>Materials</a:t>
             </a:r>
             <a:endParaRPr lang="en-US" sz="1800" dirty="0"/>
           </a:p>
@@ -3879,7 +6859,7 @@
         <p:spPr>
           <a:xfrm>
             <a:off x="634901" y="883593"/>
-            <a:ext cx="8102798" cy="525661"/>
+            <a:ext cx="8102798" cy="2719685"/>
           </a:xfrm>
           <a:prstGeom prst="rect">
             <a:avLst/>
@@ -3902,26 +6882,6 @@
               <a:buChar char="•"/>
             </a:pPr>
             <a:r>
-              <a:rPr lang="en-US" sz="1200" i="1" dirty="0">
-                <a:solidFill>
-                  <a:srgbClr val="1C2833"/>
-                </a:solidFill>
-                <a:latin typeface="Arial" pitchFamily="34" charset="0"/>
-                <a:ea typeface="Arial" pitchFamily="34" charset="-122"/>
-                <a:cs typeface="Arial" pitchFamily="34" charset="-120"/>
-              </a:rPr>
-              <a:t>ṣaḍ-rasa</a:t>
-            </a:r>
-            <a:pPr algn="l" indent="0" marL="0">
-              <a:lnSpc>
-                <a:spcPts val="1620"/>
-              </a:lnSpc>
-              <a:spcAft>
-                <a:spcPts val="300"/>
-              </a:spcAft>
-              <a:buNone/>
-            </a:pPr>
-            <a:r>
               <a:rPr lang="en-US" sz="1200" dirty="0">
                 <a:solidFill>
                   <a:srgbClr val="1C2833"/>
@@ -3930,7 +6890,7 @@
                 <a:ea typeface="Arial" pitchFamily="34" charset="-122"/>
                 <a:cs typeface="Arial" pitchFamily="34" charset="-120"/>
               </a:rPr>
-              <a:t> (IAST: ṣaḍ-rasa; lit. "six tastes") — the Ayurvedic taste classification.</a:t>
+              <a:t>Six small samples (covered before the lesson starts):</a:t>
             </a:r>
             <a:endParaRPr lang="en-US" sz="1200" dirty="0"/>
           </a:p>
@@ -3946,6 +6906,26 @@
               <a:buChar char="•"/>
             </a:pPr>
             <a:r>
+              <a:rPr lang="en-US" sz="1200" dirty="0">
+                <a:solidFill>
+                  <a:srgbClr val="1C2833"/>
+                </a:solidFill>
+                <a:latin typeface="Arial" pitchFamily="34" charset="0"/>
+                <a:ea typeface="Arial" pitchFamily="34" charset="-122"/>
+                <a:cs typeface="Arial" pitchFamily="34" charset="-120"/>
+              </a:rPr>
+              <a:t>Sweet (</a:t>
+            </a:r>
+            <a:pPr algn="l" indent="0" marL="0">
+              <a:lnSpc>
+                <a:spcPts val="1620"/>
+              </a:lnSpc>
+              <a:spcAft>
+                <a:spcPts val="300"/>
+              </a:spcAft>
+              <a:buNone/>
+            </a:pPr>
+            <a:r>
               <a:rPr lang="en-US" sz="1200" i="1" dirty="0">
                 <a:solidFill>
                   <a:srgbClr val="1C2833"/>
@@ -3954,7 +6934,7 @@
                 <a:ea typeface="Arial" pitchFamily="34" charset="-122"/>
                 <a:cs typeface="Arial" pitchFamily="34" charset="-120"/>
               </a:rPr>
-              <a:t>madhura, amla, lavaṇa, kaṭu, tikta, kaṣāya</a:t>
+              <a:t>madhura</a:t>
             </a:r>
             <a:pPr algn="l" indent="0" marL="0">
               <a:lnSpc>
@@ -3974,7 +6954,423 @@
                 <a:ea typeface="Arial" pitchFamily="34" charset="-122"/>
                 <a:cs typeface="Arial" pitchFamily="34" charset="-120"/>
               </a:rPr>
-              <a:t> (sweet, sour, salty, pungent, bitter, astringent) — the six tastes.</a:t>
+              <a:t>) — jaggery / a piece of date</a:t>
+            </a:r>
+            <a:endParaRPr lang="en-US" sz="1200" dirty="0"/>
+          </a:p>
+          <a:p>
+            <a:pPr algn="l" marL="342900" indent="-342900">
+              <a:lnSpc>
+                <a:spcPts val="1620"/>
+              </a:lnSpc>
+              <a:spcAft>
+                <a:spcPts val="300"/>
+              </a:spcAft>
+              <a:buSzPct val="100000"/>
+              <a:buChar char="•"/>
+            </a:pPr>
+            <a:r>
+              <a:rPr lang="en-US" sz="1200" dirty="0">
+                <a:solidFill>
+                  <a:srgbClr val="1C2833"/>
+                </a:solidFill>
+                <a:latin typeface="Arial" pitchFamily="34" charset="0"/>
+                <a:ea typeface="Arial" pitchFamily="34" charset="-122"/>
+                <a:cs typeface="Arial" pitchFamily="34" charset="-120"/>
+              </a:rPr>
+              <a:t>Sour (</a:t>
+            </a:r>
+            <a:pPr algn="l" indent="0" marL="0">
+              <a:lnSpc>
+                <a:spcPts val="1620"/>
+              </a:lnSpc>
+              <a:spcAft>
+                <a:spcPts val="300"/>
+              </a:spcAft>
+              <a:buNone/>
+            </a:pPr>
+            <a:r>
+              <a:rPr lang="en-US" sz="1200" i="1" dirty="0">
+                <a:solidFill>
+                  <a:srgbClr val="1C2833"/>
+                </a:solidFill>
+                <a:latin typeface="Arial" pitchFamily="34" charset="0"/>
+                <a:ea typeface="Arial" pitchFamily="34" charset="-122"/>
+                <a:cs typeface="Arial" pitchFamily="34" charset="-120"/>
+              </a:rPr>
+              <a:t>amla</a:t>
+            </a:r>
+            <a:pPr algn="l" indent="0" marL="0">
+              <a:lnSpc>
+                <a:spcPts val="1620"/>
+              </a:lnSpc>
+              <a:spcAft>
+                <a:spcPts val="300"/>
+              </a:spcAft>
+              <a:buNone/>
+            </a:pPr>
+            <a:r>
+              <a:rPr lang="en-US" sz="1200" dirty="0">
+                <a:solidFill>
+                  <a:srgbClr val="1C2833"/>
+                </a:solidFill>
+                <a:latin typeface="Arial" pitchFamily="34" charset="0"/>
+                <a:ea typeface="Arial" pitchFamily="34" charset="-122"/>
+                <a:cs typeface="Arial" pitchFamily="34" charset="-120"/>
+              </a:rPr>
+              <a:t>) — lemon wedge / amla powder</a:t>
+            </a:r>
+            <a:endParaRPr lang="en-US" sz="1200" dirty="0"/>
+          </a:p>
+          <a:p>
+            <a:pPr algn="l" marL="342900" indent="-342900">
+              <a:lnSpc>
+                <a:spcPts val="1620"/>
+              </a:lnSpc>
+              <a:spcAft>
+                <a:spcPts val="300"/>
+              </a:spcAft>
+              <a:buSzPct val="100000"/>
+              <a:buChar char="•"/>
+            </a:pPr>
+            <a:r>
+              <a:rPr lang="en-US" sz="1200" dirty="0">
+                <a:solidFill>
+                  <a:srgbClr val="1C2833"/>
+                </a:solidFill>
+                <a:latin typeface="Arial" pitchFamily="34" charset="0"/>
+                <a:ea typeface="Arial" pitchFamily="34" charset="-122"/>
+                <a:cs typeface="Arial" pitchFamily="34" charset="-120"/>
+              </a:rPr>
+              <a:t>Salty (</a:t>
+            </a:r>
+            <a:pPr algn="l" indent="0" marL="0">
+              <a:lnSpc>
+                <a:spcPts val="1620"/>
+              </a:lnSpc>
+              <a:spcAft>
+                <a:spcPts val="300"/>
+              </a:spcAft>
+              <a:buNone/>
+            </a:pPr>
+            <a:r>
+              <a:rPr lang="en-US" sz="1200" i="1" dirty="0">
+                <a:solidFill>
+                  <a:srgbClr val="1C2833"/>
+                </a:solidFill>
+                <a:latin typeface="Arial" pitchFamily="34" charset="0"/>
+                <a:ea typeface="Arial" pitchFamily="34" charset="-122"/>
+                <a:cs typeface="Arial" pitchFamily="34" charset="-120"/>
+              </a:rPr>
+              <a:t>lavaṇa</a:t>
+            </a:r>
+            <a:pPr algn="l" indent="0" marL="0">
+              <a:lnSpc>
+                <a:spcPts val="1620"/>
+              </a:lnSpc>
+              <a:spcAft>
+                <a:spcPts val="300"/>
+              </a:spcAft>
+              <a:buNone/>
+            </a:pPr>
+            <a:r>
+              <a:rPr lang="en-US" sz="1200" dirty="0">
+                <a:solidFill>
+                  <a:srgbClr val="1C2833"/>
+                </a:solidFill>
+                <a:latin typeface="Arial" pitchFamily="34" charset="0"/>
+                <a:ea typeface="Arial" pitchFamily="34" charset="-122"/>
+                <a:cs typeface="Arial" pitchFamily="34" charset="-120"/>
+              </a:rPr>
+              <a:t>) — rock salt</a:t>
+            </a:r>
+            <a:endParaRPr lang="en-US" sz="1200" dirty="0"/>
+          </a:p>
+          <a:p>
+            <a:pPr algn="l" marL="342900" indent="-342900">
+              <a:lnSpc>
+                <a:spcPts val="1620"/>
+              </a:lnSpc>
+              <a:spcAft>
+                <a:spcPts val="300"/>
+              </a:spcAft>
+              <a:buSzPct val="100000"/>
+              <a:buChar char="•"/>
+            </a:pPr>
+            <a:r>
+              <a:rPr lang="en-US" sz="1200" dirty="0">
+                <a:solidFill>
+                  <a:srgbClr val="1C2833"/>
+                </a:solidFill>
+                <a:latin typeface="Arial" pitchFamily="34" charset="0"/>
+                <a:ea typeface="Arial" pitchFamily="34" charset="-122"/>
+                <a:cs typeface="Arial" pitchFamily="34" charset="-120"/>
+              </a:rPr>
+              <a:t>Pungent (</a:t>
+            </a:r>
+            <a:pPr algn="l" indent="0" marL="0">
+              <a:lnSpc>
+                <a:spcPts val="1620"/>
+              </a:lnSpc>
+              <a:spcAft>
+                <a:spcPts val="300"/>
+              </a:spcAft>
+              <a:buNone/>
+            </a:pPr>
+            <a:r>
+              <a:rPr lang="en-US" sz="1200" i="1" dirty="0">
+                <a:solidFill>
+                  <a:srgbClr val="1C2833"/>
+                </a:solidFill>
+                <a:latin typeface="Arial" pitchFamily="34" charset="0"/>
+                <a:ea typeface="Arial" pitchFamily="34" charset="-122"/>
+                <a:cs typeface="Arial" pitchFamily="34" charset="-120"/>
+              </a:rPr>
+              <a:t>kaṭu</a:t>
+            </a:r>
+            <a:pPr algn="l" indent="0" marL="0">
+              <a:lnSpc>
+                <a:spcPts val="1620"/>
+              </a:lnSpc>
+              <a:spcAft>
+                <a:spcPts val="300"/>
+              </a:spcAft>
+              <a:buNone/>
+            </a:pPr>
+            <a:r>
+              <a:rPr lang="en-US" sz="1200" dirty="0">
+                <a:solidFill>
+                  <a:srgbClr val="1C2833"/>
+                </a:solidFill>
+                <a:latin typeface="Arial" pitchFamily="34" charset="0"/>
+                <a:ea typeface="Arial" pitchFamily="34" charset="-122"/>
+                <a:cs typeface="Arial" pitchFamily="34" charset="-120"/>
+              </a:rPr>
+              <a:t>) — fresh ginger / a peppercorn</a:t>
+            </a:r>
+            <a:endParaRPr lang="en-US" sz="1200" dirty="0"/>
+          </a:p>
+          <a:p>
+            <a:pPr algn="l" marL="342900" indent="-342900">
+              <a:lnSpc>
+                <a:spcPts val="1620"/>
+              </a:lnSpc>
+              <a:spcAft>
+                <a:spcPts val="300"/>
+              </a:spcAft>
+              <a:buSzPct val="100000"/>
+              <a:buChar char="•"/>
+            </a:pPr>
+            <a:r>
+              <a:rPr lang="en-US" sz="1200" dirty="0">
+                <a:solidFill>
+                  <a:srgbClr val="1C2833"/>
+                </a:solidFill>
+                <a:latin typeface="Arial" pitchFamily="34" charset="0"/>
+                <a:ea typeface="Arial" pitchFamily="34" charset="-122"/>
+                <a:cs typeface="Arial" pitchFamily="34" charset="-120"/>
+              </a:rPr>
+              <a:t>Bitter (</a:t>
+            </a:r>
+            <a:pPr algn="l" indent="0" marL="0">
+              <a:lnSpc>
+                <a:spcPts val="1620"/>
+              </a:lnSpc>
+              <a:spcAft>
+                <a:spcPts val="300"/>
+              </a:spcAft>
+              <a:buNone/>
+            </a:pPr>
+            <a:r>
+              <a:rPr lang="en-US" sz="1200" i="1" dirty="0">
+                <a:solidFill>
+                  <a:srgbClr val="1C2833"/>
+                </a:solidFill>
+                <a:latin typeface="Arial" pitchFamily="34" charset="0"/>
+                <a:ea typeface="Arial" pitchFamily="34" charset="-122"/>
+                <a:cs typeface="Arial" pitchFamily="34" charset="-120"/>
+              </a:rPr>
+              <a:t>tikta</a:t>
+            </a:r>
+            <a:pPr algn="l" indent="0" marL="0">
+              <a:lnSpc>
+                <a:spcPts val="1620"/>
+              </a:lnSpc>
+              <a:spcAft>
+                <a:spcPts val="300"/>
+              </a:spcAft>
+              <a:buNone/>
+            </a:pPr>
+            <a:r>
+              <a:rPr lang="en-US" sz="1200" dirty="0">
+                <a:solidFill>
+                  <a:srgbClr val="1C2833"/>
+                </a:solidFill>
+                <a:latin typeface="Arial" pitchFamily="34" charset="0"/>
+                <a:ea typeface="Arial" pitchFamily="34" charset="-122"/>
+                <a:cs typeface="Arial" pitchFamily="34" charset="-120"/>
+              </a:rPr>
+              <a:t>) — methi leaf / a tiny bit of neem powder</a:t>
+            </a:r>
+            <a:endParaRPr lang="en-US" sz="1200" dirty="0"/>
+          </a:p>
+          <a:p>
+            <a:pPr algn="l" marL="342900" indent="-342900">
+              <a:lnSpc>
+                <a:spcPts val="1620"/>
+              </a:lnSpc>
+              <a:spcAft>
+                <a:spcPts val="300"/>
+              </a:spcAft>
+              <a:buSzPct val="100000"/>
+              <a:buChar char="•"/>
+            </a:pPr>
+            <a:r>
+              <a:rPr lang="en-US" sz="1200" dirty="0">
+                <a:solidFill>
+                  <a:srgbClr val="1C2833"/>
+                </a:solidFill>
+                <a:latin typeface="Arial" pitchFamily="34" charset="0"/>
+                <a:ea typeface="Arial" pitchFamily="34" charset="-122"/>
+                <a:cs typeface="Arial" pitchFamily="34" charset="-120"/>
+              </a:rPr>
+              <a:t>Astringent (</a:t>
+            </a:r>
+            <a:pPr algn="l" indent="0" marL="0">
+              <a:lnSpc>
+                <a:spcPts val="1620"/>
+              </a:lnSpc>
+              <a:spcAft>
+                <a:spcPts val="300"/>
+              </a:spcAft>
+              <a:buNone/>
+            </a:pPr>
+            <a:r>
+              <a:rPr lang="en-US" sz="1200" i="1" dirty="0">
+                <a:solidFill>
+                  <a:srgbClr val="1C2833"/>
+                </a:solidFill>
+                <a:latin typeface="Arial" pitchFamily="34" charset="0"/>
+                <a:ea typeface="Arial" pitchFamily="34" charset="-122"/>
+                <a:cs typeface="Arial" pitchFamily="34" charset="-120"/>
+              </a:rPr>
+              <a:t>kaṣāya</a:t>
+            </a:r>
+            <a:pPr algn="l" indent="0" marL="0">
+              <a:lnSpc>
+                <a:spcPts val="1620"/>
+              </a:lnSpc>
+              <a:spcAft>
+                <a:spcPts val="300"/>
+              </a:spcAft>
+              <a:buNone/>
+            </a:pPr>
+            <a:r>
+              <a:rPr lang="en-US" sz="1200" dirty="0">
+                <a:solidFill>
+                  <a:srgbClr val="1C2833"/>
+                </a:solidFill>
+                <a:latin typeface="Arial" pitchFamily="34" charset="0"/>
+                <a:ea typeface="Arial" pitchFamily="34" charset="-122"/>
+                <a:cs typeface="Arial" pitchFamily="34" charset="-120"/>
+              </a:rPr>
+              <a:t>) — unripe banana / strong black tea</a:t>
+            </a:r>
+            <a:endParaRPr lang="en-US" sz="1200" dirty="0"/>
+          </a:p>
+          <a:p>
+            <a:pPr algn="l" marL="342900" indent="-342900">
+              <a:lnSpc>
+                <a:spcPts val="1620"/>
+              </a:lnSpc>
+              <a:spcAft>
+                <a:spcPts val="300"/>
+              </a:spcAft>
+              <a:buSzPct val="100000"/>
+              <a:buChar char="•"/>
+            </a:pPr>
+            <a:r>
+              <a:rPr lang="en-US" sz="1200" dirty="0">
+                <a:solidFill>
+                  <a:srgbClr val="1C2833"/>
+                </a:solidFill>
+                <a:latin typeface="Arial" pitchFamily="34" charset="0"/>
+                <a:ea typeface="Arial" pitchFamily="34" charset="-122"/>
+                <a:cs typeface="Arial" pitchFamily="34" charset="-120"/>
+              </a:rPr>
+              <a:t>6 paper plates / labelled cups</a:t>
+            </a:r>
+            <a:endParaRPr lang="en-US" sz="1200" dirty="0"/>
+          </a:p>
+          <a:p>
+            <a:pPr algn="l" marL="342900" indent="-342900">
+              <a:lnSpc>
+                <a:spcPts val="1620"/>
+              </a:lnSpc>
+              <a:spcAft>
+                <a:spcPts val="300"/>
+              </a:spcAft>
+              <a:buSzPct val="100000"/>
+              <a:buChar char="•"/>
+            </a:pPr>
+            <a:r>
+              <a:rPr lang="en-US" sz="1200" dirty="0">
+                <a:solidFill>
+                  <a:srgbClr val="1C2833"/>
+                </a:solidFill>
+                <a:latin typeface="Arial" pitchFamily="34" charset="0"/>
+                <a:ea typeface="Arial" pitchFamily="34" charset="-122"/>
+                <a:cs typeface="Arial" pitchFamily="34" charset="-120"/>
+              </a:rPr>
+              <a:t>Toothpicks for sampling</a:t>
+            </a:r>
+            <a:endParaRPr lang="en-US" sz="1200" dirty="0"/>
+          </a:p>
+          <a:p>
+            <a:pPr algn="l" marL="342900" indent="-342900">
+              <a:lnSpc>
+                <a:spcPts val="1620"/>
+              </a:lnSpc>
+              <a:spcAft>
+                <a:spcPts val="300"/>
+              </a:spcAft>
+              <a:buSzPct val="100000"/>
+              <a:buChar char="•"/>
+            </a:pPr>
+            <a:r>
+              <a:rPr lang="en-US" sz="1200" dirty="0">
+                <a:solidFill>
+                  <a:srgbClr val="1C2833"/>
+                </a:solidFill>
+                <a:latin typeface="Arial" pitchFamily="34" charset="0"/>
+                <a:ea typeface="Arial" pitchFamily="34" charset="-122"/>
+                <a:cs typeface="Arial" pitchFamily="34" charset="-120"/>
+              </a:rPr>
+              <a:t>A glass of water per student for rinsing</a:t>
+            </a:r>
+            <a:endParaRPr lang="en-US" sz="1200" dirty="0"/>
+          </a:p>
+          <a:p>
+            <a:pPr algn="l" marL="342900" indent="-342900">
+              <a:lnSpc>
+                <a:spcPts val="1620"/>
+              </a:lnSpc>
+              <a:spcAft>
+                <a:spcPts val="300"/>
+              </a:spcAft>
+              <a:buSzPct val="100000"/>
+              <a:buChar char="•"/>
+            </a:pPr>
+            <a:r>
+              <a:rPr lang="en-US" sz="1200" dirty="0">
+                <a:solidFill>
+                  <a:srgbClr val="1C2833"/>
+                </a:solidFill>
+                <a:latin typeface="Arial" pitchFamily="34" charset="0"/>
+                <a:ea typeface="Arial" pitchFamily="34" charset="-122"/>
+                <a:cs typeface="Arial" pitchFamily="34" charset="-120"/>
+              </a:rPr>
+              <a:t>Allergy/dietary check completed in advance</a:t>
             </a:r>
             <a:endParaRPr lang="en-US" sz="1200" dirty="0"/>
           </a:p>
@@ -4132,7 +7528,7 @@
                 <a:ea typeface="Georgia" pitchFamily="34" charset="-122"/>
                 <a:cs typeface="Georgia" pitchFamily="34" charset="-120"/>
               </a:rPr>
-              <a:t>Lesson flow</a:t>
+              <a:t>Vocabulary introduced today</a:t>
             </a:r>
             <a:endParaRPr lang="en-US" sz="1800" dirty="0"/>
           </a:p>
@@ -4141,6 +7537,116 @@
       <p:sp>
         <p:nvSpPr>
           <p:cNvPr id="4" name="Text 2"/>
+          <p:cNvSpPr/>
+          <p:nvPr/>
+        </p:nvSpPr>
+        <p:spPr>
+          <a:xfrm>
+            <a:off x="634901" y="883593"/>
+            <a:ext cx="8102798" cy="525661"/>
+          </a:xfrm>
+          <a:prstGeom prst="rect">
+            <a:avLst/>
+          </a:prstGeom>
+          <a:noFill/>
+          <a:ln/>
+        </p:spPr>
+        <p:txBody>
+          <a:bodyPr wrap="square" lIns="0" tIns="0" rIns="0" bIns="0" rtlCol="0" anchor="t"/>
+          <a:lstStyle/>
+          <a:p>
+            <a:pPr algn="l" marL="342900" indent="-342900">
+              <a:lnSpc>
+                <a:spcPts val="1620"/>
+              </a:lnSpc>
+              <a:spcAft>
+                <a:spcPts val="300"/>
+              </a:spcAft>
+              <a:buSzPct val="100000"/>
+              <a:buChar char="•"/>
+            </a:pPr>
+            <a:r>
+              <a:rPr lang="en-US" sz="1200" i="1" dirty="0">
+                <a:solidFill>
+                  <a:srgbClr val="1C2833"/>
+                </a:solidFill>
+                <a:latin typeface="Arial" pitchFamily="34" charset="0"/>
+                <a:ea typeface="Arial" pitchFamily="34" charset="-122"/>
+                <a:cs typeface="Arial" pitchFamily="34" charset="-120"/>
+              </a:rPr>
+              <a:t>ṣaḍ-rasa</a:t>
+            </a:r>
+            <a:pPr algn="l" indent="0" marL="0">
+              <a:lnSpc>
+                <a:spcPts val="1620"/>
+              </a:lnSpc>
+              <a:spcAft>
+                <a:spcPts val="300"/>
+              </a:spcAft>
+              <a:buNone/>
+            </a:pPr>
+            <a:r>
+              <a:rPr lang="en-US" sz="1200" dirty="0">
+                <a:solidFill>
+                  <a:srgbClr val="1C2833"/>
+                </a:solidFill>
+                <a:latin typeface="Arial" pitchFamily="34" charset="0"/>
+                <a:ea typeface="Arial" pitchFamily="34" charset="-122"/>
+                <a:cs typeface="Arial" pitchFamily="34" charset="-120"/>
+              </a:rPr>
+              <a:t> (IAST: ṣaḍ-rasa; lit. "six tastes") — the Ayurvedic taste classification.</a:t>
+            </a:r>
+            <a:endParaRPr lang="en-US" sz="1200" dirty="0"/>
+          </a:p>
+          <a:p>
+            <a:pPr algn="l" marL="342900" indent="-342900">
+              <a:lnSpc>
+                <a:spcPts val="1620"/>
+              </a:lnSpc>
+              <a:spcAft>
+                <a:spcPts val="300"/>
+              </a:spcAft>
+              <a:buSzPct val="100000"/>
+              <a:buChar char="•"/>
+            </a:pPr>
+            <a:r>
+              <a:rPr lang="en-US" sz="1200" i="1" dirty="0">
+                <a:solidFill>
+                  <a:srgbClr val="1C2833"/>
+                </a:solidFill>
+                <a:latin typeface="Arial" pitchFamily="34" charset="0"/>
+                <a:ea typeface="Arial" pitchFamily="34" charset="-122"/>
+                <a:cs typeface="Arial" pitchFamily="34" charset="-120"/>
+              </a:rPr>
+              <a:t>madhura, amla, lavaṇa, kaṭu, tikta, kaṣāya</a:t>
+            </a:r>
+            <a:pPr algn="l" indent="0" marL="0">
+              <a:lnSpc>
+                <a:spcPts val="1620"/>
+              </a:lnSpc>
+              <a:spcAft>
+                <a:spcPts val="300"/>
+              </a:spcAft>
+              <a:buNone/>
+            </a:pPr>
+            <a:r>
+              <a:rPr lang="en-US" sz="1200" dirty="0">
+                <a:solidFill>
+                  <a:srgbClr val="1C2833"/>
+                </a:solidFill>
+                <a:latin typeface="Arial" pitchFamily="34" charset="0"/>
+                <a:ea typeface="Arial" pitchFamily="34" charset="-122"/>
+                <a:cs typeface="Arial" pitchFamily="34" charset="-120"/>
+              </a:rPr>
+              <a:t> (sweet, sour, salty, pungent, bitter, astringent) — the six tastes.</a:t>
+            </a:r>
+            <a:endParaRPr lang="en-US" sz="1200" dirty="0"/>
+          </a:p>
+        </p:txBody>
+      </p:sp>
+      <p:sp>
+        <p:nvSpPr>
+          <p:cNvPr id="5" name="Text 3"/>
           <p:cNvSpPr/>
           <p:nvPr/>
         </p:nvSpPr>
@@ -4290,7 +7796,7 @@
                 <a:ea typeface="Georgia" pitchFamily="34" charset="-122"/>
                 <a:cs typeface="Georgia" pitchFamily="34" charset="-120"/>
               </a:rPr>
-              <a:t>Warm-up (5 min)</a:t>
+              <a:t>Lesson flow</a:t>
             </a:r>
             <a:endParaRPr lang="en-US" sz="1800" dirty="0"/>
           </a:p>
@@ -4299,96 +7805,6 @@
       <p:sp>
         <p:nvSpPr>
           <p:cNvPr id="4" name="Text 2"/>
-          <p:cNvSpPr/>
-          <p:nvPr/>
-        </p:nvSpPr>
-        <p:spPr>
-          <a:xfrm>
-            <a:off x="634901" y="883593"/>
-            <a:ext cx="8102798" cy="937022"/>
-          </a:xfrm>
-          <a:prstGeom prst="rect">
-            <a:avLst/>
-          </a:prstGeom>
-          <a:noFill/>
-          <a:ln/>
-        </p:spPr>
-        <p:txBody>
-          <a:bodyPr wrap="square" lIns="0" tIns="0" rIns="0" bIns="0" rtlCol="0" anchor="t"/>
-          <a:lstStyle/>
-          <a:p>
-            <a:pPr algn="l" marL="342900" indent="-342900">
-              <a:lnSpc>
-                <a:spcPts val="1620"/>
-              </a:lnSpc>
-              <a:spcAft>
-                <a:spcPts val="300"/>
-              </a:spcAft>
-              <a:buSzPct val="100000"/>
-              <a:buChar char="•"/>
-            </a:pPr>
-            <a:r>
-              <a:rPr lang="en-US" sz="1200" i="1" dirty="0">
-                <a:solidFill>
-                  <a:srgbClr val="1C2833"/>
-                </a:solidFill>
-                <a:latin typeface="Arial" pitchFamily="34" charset="0"/>
-                <a:ea typeface="Arial" pitchFamily="34" charset="-122"/>
-                <a:cs typeface="Arial" pitchFamily="34" charset="-120"/>
-              </a:rPr>
-              <a:t>"How many tastes are there?"</a:t>
-            </a:r>
-            <a:pPr algn="l" indent="0" marL="0">
-              <a:lnSpc>
-                <a:spcPts val="1620"/>
-              </a:lnSpc>
-              <a:spcAft>
-                <a:spcPts val="300"/>
-              </a:spcAft>
-              <a:buNone/>
-            </a:pPr>
-            <a:r>
-              <a:rPr lang="en-US" sz="1200" dirty="0">
-                <a:solidFill>
-                  <a:srgbClr val="1C2833"/>
-                </a:solidFill>
-                <a:latin typeface="Arial" pitchFamily="34" charset="0"/>
-                <a:ea typeface="Arial" pitchFamily="34" charset="-122"/>
-                <a:cs typeface="Arial" pitchFamily="34" charset="-120"/>
-              </a:rPr>
-              <a:t> Take answers. Most students will say 5 (sweet, sour, salty, bitter, umami). Some will say 4.</a:t>
-            </a:r>
-            <a:endParaRPr lang="en-US" sz="1200" dirty="0"/>
-          </a:p>
-          <a:p>
-            <a:pPr algn="l" marL="342900" indent="-342900">
-              <a:lnSpc>
-                <a:spcPts val="1620"/>
-              </a:lnSpc>
-              <a:spcAft>
-                <a:spcPts val="300"/>
-              </a:spcAft>
-              <a:buSzPct val="100000"/>
-              <a:buChar char="•"/>
-            </a:pPr>
-            <a:r>
-              <a:rPr lang="en-US" sz="1200" i="1" dirty="0">
-                <a:solidFill>
-                  <a:srgbClr val="1C2833"/>
-                </a:solidFill>
-                <a:latin typeface="Arial" pitchFamily="34" charset="0"/>
-                <a:ea typeface="Arial" pitchFamily="34" charset="-122"/>
-                <a:cs typeface="Arial" pitchFamily="34" charset="-120"/>
-              </a:rPr>
-              <a:t>"Ayurveda counts six. The extras — pungent and astringent — are textural-chemical, not strictly the same as the modern taste-receptor 5."</a:t>
-            </a:r>
-            <a:endParaRPr lang="en-US" sz="1200" dirty="0"/>
-          </a:p>
-        </p:txBody>
-      </p:sp>
-      <p:sp>
-        <p:nvSpPr>
-          <p:cNvPr id="5" name="Text 3"/>
           <p:cNvSpPr/>
           <p:nvPr/>
         </p:nvSpPr>
@@ -4538,7 +7954,7 @@
                 <a:ea typeface="Georgia" pitchFamily="34" charset="-122"/>
                 <a:cs typeface="Georgia" pitchFamily="34" charset="-120"/>
               </a:rPr>
-              <a:t>Activity (20 min) — Taste station rotation</a:t>
+              <a:t>Warm-up (5 min)</a:t>
             </a:r>
             <a:endParaRPr lang="en-US" sz="1800" dirty="0"/>
           </a:p>
@@ -4552,8 +7968,8 @@
         </p:nvSpPr>
         <p:spPr>
           <a:xfrm>
-            <a:off x="406301" y="870942"/>
-            <a:ext cx="8498026" cy="222796"/>
+            <a:off x="634901" y="883593"/>
+            <a:ext cx="8102798" cy="937022"/>
           </a:xfrm>
           <a:prstGeom prst="rect">
             <a:avLst/>
@@ -4565,194 +7981,6 @@
           <a:bodyPr wrap="square" lIns="0" tIns="0" rIns="0" bIns="0" rtlCol="0" anchor="t"/>
           <a:lstStyle/>
           <a:p>
-            <a:pPr algn="l" indent="0" marL="0">
-              <a:lnSpc>
-                <a:spcPts val="1680"/>
-              </a:lnSpc>
-              <a:spcBef>
-                <a:spcPts val="300"/>
-              </a:spcBef>
-              <a:spcAft>
-                <a:spcPts val="300"/>
-              </a:spcAft>
-              <a:buNone/>
-            </a:pPr>
-            <a:r>
-              <a:rPr lang="en-US" sz="1200" dirty="0">
-                <a:solidFill>
-                  <a:srgbClr val="1C2833"/>
-                </a:solidFill>
-                <a:latin typeface="Arial" pitchFamily="34" charset="0"/>
-                <a:ea typeface="Arial" pitchFamily="34" charset="-122"/>
-                <a:cs typeface="Arial" pitchFamily="34" charset="-120"/>
-              </a:rPr>
-              <a:t>Detailed protocol in </a:t>
-            </a:r>
-            <a:pPr algn="l" indent="0" marL="0">
-              <a:lnSpc>
-                <a:spcPts val="1680"/>
-              </a:lnSpc>
-              <a:spcBef>
-                <a:spcPts val="300"/>
-              </a:spcBef>
-              <a:spcAft>
-                <a:spcPts val="300"/>
-              </a:spcAft>
-              <a:buNone/>
-            </a:pPr>
-            <a:r>
-              <a:rPr lang="en-US" sz="1200" dirty="0">
-                <a:solidFill>
-                  <a:srgbClr val="1C2833"/>
-                </a:solidFill>
-                <a:latin typeface="Arial" pitchFamily="34" charset="0"/>
-                <a:ea typeface="Arial" pitchFamily="34" charset="-122"/>
-                <a:cs typeface="Arial" pitchFamily="34" charset="-120"/>
-              </a:rPr>
-              <a:t>activities/activity-02-taste-station.md</a:t>
-            </a:r>
-            <a:pPr algn="l" indent="0" marL="0">
-              <a:lnSpc>
-                <a:spcPts val="1680"/>
-              </a:lnSpc>
-              <a:spcBef>
-                <a:spcPts val="300"/>
-              </a:spcBef>
-              <a:spcAft>
-                <a:spcPts val="300"/>
-              </a:spcAft>
-              <a:buNone/>
-            </a:pPr>
-            <a:r>
-              <a:rPr lang="en-US" sz="1200" dirty="0">
-                <a:solidFill>
-                  <a:srgbClr val="1C2833"/>
-                </a:solidFill>
-                <a:latin typeface="Arial" pitchFamily="34" charset="0"/>
-                <a:ea typeface="Arial" pitchFamily="34" charset="-122"/>
-                <a:cs typeface="Arial" pitchFamily="34" charset="-120"/>
-              </a:rPr>
-              <a:t>. Summary:</a:t>
-            </a:r>
-            <a:endParaRPr lang="en-US" sz="1200" dirty="0"/>
-          </a:p>
-        </p:txBody>
-      </p:sp>
-      <p:sp>
-        <p:nvSpPr>
-          <p:cNvPr id="5" name="Text 3"/>
-          <p:cNvSpPr/>
-          <p:nvPr/>
-        </p:nvSpPr>
-        <p:spPr>
-          <a:xfrm>
-            <a:off x="406301" y="1169938"/>
-            <a:ext cx="8498026" cy="639812"/>
-          </a:xfrm>
-          <a:prstGeom prst="rect">
-            <a:avLst/>
-          </a:prstGeom>
-          <a:noFill/>
-          <a:ln/>
-        </p:spPr>
-        <p:txBody>
-          <a:bodyPr wrap="square" lIns="0" tIns="0" rIns="0" bIns="0" rtlCol="0" anchor="t"/>
-          <a:lstStyle/>
-          <a:p>
-            <a:pPr algn="l" indent="0" marL="0">
-              <a:lnSpc>
-                <a:spcPts val="1680"/>
-              </a:lnSpc>
-              <a:spcBef>
-                <a:spcPts val="300"/>
-              </a:spcBef>
-              <a:spcAft>
-                <a:spcPts val="300"/>
-              </a:spcAft>
-              <a:buNone/>
-            </a:pPr>
-            <a:r>
-              <a:rPr lang="en-US" sz="1200" dirty="0">
-                <a:solidFill>
-                  <a:srgbClr val="1C2833"/>
-                </a:solidFill>
-                <a:latin typeface="Arial" pitchFamily="34" charset="0"/>
-                <a:ea typeface="Arial" pitchFamily="34" charset="-122"/>
-                <a:cs typeface="Arial" pitchFamily="34" charset="-120"/>
-              </a:rPr>
-              <a:t>– Six small stations around the room. Each has the sample, a label, and a worksheet question. – Students rotate in pairs. 2 minutes per station. – At each station: taste a small sample. Write (a) the IAST + English name; (b) one descriptor word (cooling, warming, sharp, mild); (c) which </a:t>
-            </a:r>
-            <a:pPr algn="l" indent="0" marL="0">
-              <a:lnSpc>
-                <a:spcPts val="1680"/>
-              </a:lnSpc>
-              <a:spcBef>
-                <a:spcPts val="300"/>
-              </a:spcBef>
-              <a:spcAft>
-                <a:spcPts val="300"/>
-              </a:spcAft>
-              <a:buNone/>
-            </a:pPr>
-            <a:r>
-              <a:rPr lang="en-US" sz="1200" i="1" dirty="0">
-                <a:solidFill>
-                  <a:srgbClr val="1C2833"/>
-                </a:solidFill>
-                <a:latin typeface="Arial" pitchFamily="34" charset="0"/>
-                <a:ea typeface="Arial" pitchFamily="34" charset="-122"/>
-                <a:cs typeface="Arial" pitchFamily="34" charset="-120"/>
-              </a:rPr>
-              <a:t>doṣa</a:t>
-            </a:r>
-            <a:pPr algn="l" indent="0" marL="0">
-              <a:lnSpc>
-                <a:spcPts val="1680"/>
-              </a:lnSpc>
-              <a:spcBef>
-                <a:spcPts val="300"/>
-              </a:spcBef>
-              <a:spcAft>
-                <a:spcPts val="300"/>
-              </a:spcAft>
-              <a:buNone/>
-            </a:pPr>
-            <a:r>
-              <a:rPr lang="en-US" sz="1200" dirty="0">
-                <a:solidFill>
-                  <a:srgbClr val="1C2833"/>
-                </a:solidFill>
-                <a:latin typeface="Arial" pitchFamily="34" charset="0"/>
-                <a:ea typeface="Arial" pitchFamily="34" charset="-122"/>
-                <a:cs typeface="Arial" pitchFamily="34" charset="-120"/>
-              </a:rPr>
-              <a:t> you'd predict it calms.</a:t>
-            </a:r>
-            <a:endParaRPr lang="en-US" sz="1200" dirty="0"/>
-          </a:p>
-        </p:txBody>
-      </p:sp>
-      <p:sp>
-        <p:nvSpPr>
-          <p:cNvPr id="6" name="Text 4"/>
-          <p:cNvSpPr/>
-          <p:nvPr/>
-        </p:nvSpPr>
-        <p:spPr>
-          <a:xfrm>
-            <a:off x="634901" y="1898600"/>
-            <a:ext cx="8102798" cy="281880"/>
-          </a:xfrm>
-          <a:prstGeom prst="rect">
-            <a:avLst/>
-          </a:prstGeom>
-          <a:noFill/>
-          <a:ln/>
-        </p:spPr>
-        <p:txBody>
-          <a:bodyPr wrap="square" lIns="0" tIns="0" rIns="0" bIns="0" rtlCol="0" anchor="t"/>
-          <a:lstStyle/>
-          <a:p>
             <a:pPr algn="l" marL="342900" indent="-342900">
               <a:lnSpc>
                 <a:spcPts val="1620"/>
@@ -4764,15 +7992,15 @@
               <a:buChar char="•"/>
             </a:pPr>
             <a:r>
-              <a:rPr lang="en-US" sz="1200" b="1" dirty="0">
-                <a:solidFill>
-                  <a:srgbClr val="1C2833"/>
-                </a:solidFill>
-                <a:latin typeface="Arial" pitchFamily="34" charset="0"/>
-                <a:ea typeface="Arial" pitchFamily="34" charset="-122"/>
-                <a:cs typeface="Arial" pitchFamily="34" charset="-120"/>
-              </a:rPr>
-              <a:t>Allergies / dietary restrictions:</a:t>
+              <a:rPr lang="en-US" sz="1200" i="1" dirty="0">
+                <a:solidFill>
+                  <a:srgbClr val="1C2833"/>
+                </a:solidFill>
+                <a:latin typeface="Arial" pitchFamily="34" charset="0"/>
+                <a:ea typeface="Arial" pitchFamily="34" charset="-122"/>
+                <a:cs typeface="Arial" pitchFamily="34" charset="-120"/>
+              </a:rPr>
+              <a:t>"How many tastes are there?"</a:t>
             </a:r>
             <a:pPr algn="l" indent="0" marL="0">
               <a:lnSpc>
@@ -4792,15 +8020,39 @@
                 <a:ea typeface="Arial" pitchFamily="34" charset="-122"/>
                 <a:cs typeface="Arial" pitchFamily="34" charset="-120"/>
               </a:rPr>
-              <a:t> opt-out at any station. No questions asked. Smell-only counts.</a:t>
+              <a:t> Take answers. Most students will say 5 (sweet, sour, salty, bitter, umami). Some will say 4.</a:t>
             </a:r>
             <a:endParaRPr lang="en-US" sz="1200" dirty="0"/>
           </a:p>
-        </p:txBody>
-      </p:sp>
-      <p:sp>
-        <p:nvSpPr>
-          <p:cNvPr id="7" name="Text 5"/>
+          <a:p>
+            <a:pPr algn="l" marL="342900" indent="-342900">
+              <a:lnSpc>
+                <a:spcPts val="1620"/>
+              </a:lnSpc>
+              <a:spcAft>
+                <a:spcPts val="300"/>
+              </a:spcAft>
+              <a:buSzPct val="100000"/>
+              <a:buChar char="•"/>
+            </a:pPr>
+            <a:r>
+              <a:rPr lang="en-US" sz="1200" i="1" dirty="0">
+                <a:solidFill>
+                  <a:srgbClr val="1C2833"/>
+                </a:solidFill>
+                <a:latin typeface="Arial" pitchFamily="34" charset="0"/>
+                <a:ea typeface="Arial" pitchFamily="34" charset="-122"/>
+                <a:cs typeface="Arial" pitchFamily="34" charset="-120"/>
+              </a:rPr>
+              <a:t>"Ayurveda counts six. The extras — pungent and astringent — are textural-chemical, not strictly the same as the modern taste-receptor 5."</a:t>
+            </a:r>
+            <a:endParaRPr lang="en-US" sz="1200" dirty="0"/>
+          </a:p>
+        </p:txBody>
+      </p:sp>
+      <p:sp>
+        <p:nvSpPr>
+          <p:cNvPr id="5" name="Text 3"/>
           <p:cNvSpPr/>
           <p:nvPr/>
         </p:nvSpPr>
@@ -4950,7 +8202,7 @@
                 <a:ea typeface="Georgia" pitchFamily="34" charset="-122"/>
                 <a:cs typeface="Georgia" pitchFamily="34" charset="-120"/>
               </a:rPr>
-              <a:t>Wrap-up (5 min)</a:t>
+              <a:t>Core (15 min)</a:t>
             </a:r>
             <a:endParaRPr lang="en-US" sz="1800" dirty="0"/>
           </a:p>
@@ -4964,8 +8216,8 @@
         </p:nvSpPr>
         <p:spPr>
           <a:xfrm>
-            <a:off x="406301" y="870942"/>
-            <a:ext cx="8498026" cy="426541"/>
+            <a:off x="634901" y="883593"/>
+            <a:ext cx="8102798" cy="281880"/>
           </a:xfrm>
           <a:prstGeom prst="rect">
             <a:avLst/>
@@ -4977,6 +8229,52 @@
           <a:bodyPr wrap="square" lIns="0" tIns="0" rIns="0" bIns="0" rtlCol="0" anchor="t"/>
           <a:lstStyle/>
           <a:p>
+            <a:pPr algn="l" marL="342900" indent="-342900">
+              <a:lnSpc>
+                <a:spcPts val="1620"/>
+              </a:lnSpc>
+              <a:spcAft>
+                <a:spcPts val="300"/>
+              </a:spcAft>
+              <a:buSzPct val="100000"/>
+              <a:buChar char="•"/>
+            </a:pPr>
+            <a:r>
+              <a:rPr lang="en-US" sz="1200" b="1" dirty="0">
+                <a:solidFill>
+                  <a:srgbClr val="1C2833"/>
+                </a:solidFill>
+                <a:latin typeface="Arial" pitchFamily="34" charset="0"/>
+                <a:ea typeface="Arial" pitchFamily="34" charset="-122"/>
+                <a:cs typeface="Arial" pitchFamily="34" charset="-120"/>
+              </a:rPr>
+              <a:t>The six tastes — build the table on the board:</a:t>
+            </a:r>
+            <a:endParaRPr lang="en-US" sz="1200" dirty="0"/>
+          </a:p>
+        </p:txBody>
+      </p:sp>
+      <p:sp>
+        <p:nvSpPr>
+          <p:cNvPr id="5" name="Text 3"/>
+          <p:cNvSpPr/>
+          <p:nvPr/>
+        </p:nvSpPr>
+        <p:spPr>
+          <a:xfrm>
+            <a:off x="406301" y="1254323"/>
+            <a:ext cx="8498026" cy="213271"/>
+          </a:xfrm>
+          <a:prstGeom prst="rect">
+            <a:avLst/>
+          </a:prstGeom>
+          <a:noFill/>
+          <a:ln/>
+        </p:spPr>
+        <p:txBody>
+          <a:bodyPr wrap="square" lIns="0" tIns="0" rIns="0" bIns="0" rtlCol="0" anchor="t"/>
+          <a:lstStyle/>
+          <a:p>
             <a:pPr algn="l" indent="0" marL="0">
               <a:lnSpc>
                 <a:spcPts val="1680"/>
@@ -4990,29 +8288,6 @@
               <a:buNone/>
             </a:pPr>
             <a:r>
-              <a:rPr lang="en-US" sz="1200" dirty="0">
-                <a:solidFill>
-                  <a:srgbClr val="1C2833"/>
-                </a:solidFill>
-                <a:latin typeface="Arial" pitchFamily="34" charset="0"/>
-                <a:ea typeface="Arial" pitchFamily="34" charset="-122"/>
-                <a:cs typeface="Arial" pitchFamily="34" charset="-120"/>
-              </a:rPr>
-              <a:t>– Whole-class share — </a:t>
-            </a:r>
-            <a:pPr algn="l" indent="0" marL="0">
-              <a:lnSpc>
-                <a:spcPts val="1680"/>
-              </a:lnSpc>
-              <a:spcBef>
-                <a:spcPts val="300"/>
-              </a:spcBef>
-              <a:spcAft>
-                <a:spcPts val="300"/>
-              </a:spcAft>
-              <a:buNone/>
-            </a:pPr>
-            <a:r>
               <a:rPr lang="en-US" sz="1200" i="1" dirty="0">
                 <a:solidFill>
                   <a:srgbClr val="1C2833"/>
@@ -5021,53 +8296,7 @@
                 <a:ea typeface="Arial" pitchFamily="34" charset="-122"/>
                 <a:cs typeface="Arial" pitchFamily="34" charset="-120"/>
               </a:rPr>
-              <a:t>"Which taste surprised you? Which felt familiar from your home cooking?"</a:t>
-            </a:r>
-            <a:pPr algn="l" indent="0" marL="0">
-              <a:lnSpc>
-                <a:spcPts val="1680"/>
-              </a:lnSpc>
-              <a:spcBef>
-                <a:spcPts val="300"/>
-              </a:spcBef>
-              <a:spcAft>
-                <a:spcPts val="300"/>
-              </a:spcAft>
-              <a:buNone/>
-            </a:pPr>
-            <a:r>
-              <a:rPr lang="en-US" sz="1200" dirty="0">
-                <a:solidFill>
-                  <a:srgbClr val="1C2833"/>
-                </a:solidFill>
-                <a:latin typeface="Arial" pitchFamily="34" charset="0"/>
-                <a:ea typeface="Arial" pitchFamily="34" charset="-122"/>
-                <a:cs typeface="Arial" pitchFamily="34" charset="-120"/>
-              </a:rPr>
-              <a:t> – Preview Day 7: </a:t>
-            </a:r>
-            <a:pPr algn="l" indent="0" marL="0">
-              <a:lnSpc>
-                <a:spcPts val="1680"/>
-              </a:lnSpc>
-              <a:spcBef>
-                <a:spcPts val="300"/>
-              </a:spcBef>
-              <a:spcAft>
-                <a:spcPts val="300"/>
-              </a:spcAft>
-              <a:buNone/>
-            </a:pPr>
-            <a:r>
-              <a:rPr lang="en-US" sz="1200" i="1" dirty="0">
-                <a:solidFill>
-                  <a:srgbClr val="1C2833"/>
-                </a:solidFill>
-                <a:latin typeface="Arial" pitchFamily="34" charset="0"/>
-                <a:ea typeface="Arial" pitchFamily="34" charset="-122"/>
-                <a:cs typeface="Arial" pitchFamily="34" charset="-120"/>
-              </a:rPr>
-              <a:t>"Tomorrow — what does imbalance look like, and when do you stop using this framework and call a doctor?"</a:t>
+              <a:t>Each row: Sanskrit · English · Example · Elements that dominate · Increases · Calms.</a:t>
             </a:r>
             <a:endParaRPr lang="en-US" sz="1200" dirty="0"/>
           </a:p>
@@ -5075,7 +8304,7 @@
       </p:sp>
       <p:sp>
         <p:nvSpPr>
-          <p:cNvPr id="5" name="Text 3"/>
+          <p:cNvPr id="6" name="Text 4"/>
           <p:cNvSpPr/>
           <p:nvPr/>
         </p:nvSpPr>
@@ -5225,7 +8454,7 @@
                 <a:ea typeface="Georgia" pitchFamily="34" charset="-122"/>
                 <a:cs typeface="Georgia" pitchFamily="34" charset="-120"/>
               </a:rPr>
-              <a:t>Student-facing content</a:t>
+              <a:t>Core (15 min) (cont.)</a:t>
             </a:r>
             <a:endParaRPr lang="en-US" sz="1800" dirty="0"/>
           </a:p>
@@ -5239,61 +8468,8 @@
         </p:nvSpPr>
         <p:spPr>
           <a:xfrm>
-            <a:off x="406301" y="883593"/>
-            <a:ext cx="8331398" cy="2074069"/>
-          </a:xfrm>
-          <a:prstGeom prst="rect">
-            <a:avLst/>
-          </a:prstGeom>
-          <a:solidFill>
-            <a:srgbClr val="F4F8F9"/>
-          </a:solidFill>
-          <a:ln/>
-        </p:spPr>
-        <p:txBody>
-          <a:bodyPr wrap="square" rtlCol="0" anchor="ctr"/>
-          <a:lstStyle/>
-          <a:p>
-            <a:pPr indent="0" marL="0">
-              <a:buNone/>
-            </a:pPr>
-            <a:endParaRPr lang="en-US" dirty="0"/>
-          </a:p>
-        </p:txBody>
-      </p:sp>
-      <p:sp>
-        <p:nvSpPr>
-          <p:cNvPr id="5" name="Shape 3"/>
-          <p:cNvSpPr/>
-          <p:nvPr/>
-        </p:nvSpPr>
-        <p:spPr>
-          <a:xfrm>
-            <a:off x="434876" y="883593"/>
-            <a:ext cx="0" cy="2074069"/>
-          </a:xfrm>
-          <a:prstGeom prst="line">
-            <a:avLst/>
-          </a:prstGeom>
-          <a:noFill/>
-          <a:ln w="57150">
-            <a:solidFill>
-              <a:srgbClr val="FE4447"/>
-            </a:solidFill>
-            <a:prstDash val="solid"/>
-          </a:ln>
-        </p:spPr>
-      </p:sp>
-      <p:sp>
-        <p:nvSpPr>
-          <p:cNvPr id="6" name="Text 4"/>
-          <p:cNvSpPr/>
-          <p:nvPr/>
-        </p:nvSpPr>
-        <p:spPr>
-          <a:xfrm>
-            <a:off x="692051" y="1074093"/>
-            <a:ext cx="7973389" cy="230981"/>
+            <a:off x="634901" y="883593"/>
+            <a:ext cx="8102798" cy="1257002"/>
           </a:xfrm>
           <a:prstGeom prst="rect">
             <a:avLst/>
@@ -5305,500 +8481,530 @@
           <a:bodyPr wrap="square" lIns="0" tIns="0" rIns="0" bIns="0" rtlCol="0" anchor="t"/>
           <a:lstStyle/>
           <a:p>
-            <a:pPr algn="l" indent="0" marL="0">
-              <a:lnSpc>
-                <a:spcPts val="1820"/>
-              </a:lnSpc>
-              <a:spcBef>
-                <a:spcPts val="300"/>
-              </a:spcBef>
-              <a:spcAft>
-                <a:spcPts val="300"/>
-              </a:spcAft>
-              <a:buNone/>
-            </a:pPr>
-            <a:r>
-              <a:rPr lang="en-US" sz="1300" dirty="0">
-                <a:solidFill>
-                  <a:srgbClr val="1C2833"/>
-                </a:solidFill>
-                <a:latin typeface="Georgia" pitchFamily="34" charset="0"/>
-                <a:ea typeface="Georgia" pitchFamily="34" charset="-122"/>
-                <a:cs typeface="Georgia" pitchFamily="34" charset="-120"/>
-              </a:rPr>
-              <a:t>*</a:t>
-            </a:r>
-            <a:pPr algn="l" indent="0" marL="0">
-              <a:lnSpc>
-                <a:spcPts val="1820"/>
-              </a:lnSpc>
-              <a:spcBef>
-                <a:spcPts val="300"/>
-              </a:spcBef>
-              <a:spcAft>
-                <a:spcPts val="300"/>
-              </a:spcAft>
-              <a:buNone/>
-            </a:pPr>
-            <a:r>
-              <a:rPr lang="en-US" sz="1300" i="1" dirty="0">
-                <a:solidFill>
-                  <a:srgbClr val="1C2833"/>
-                </a:solidFill>
-                <a:latin typeface="Georgia" pitchFamily="34" charset="0"/>
-                <a:ea typeface="Georgia" pitchFamily="34" charset="-122"/>
-                <a:cs typeface="Georgia" pitchFamily="34" charset="-120"/>
-              </a:rPr>
-              <a:t>The six tastes (</a:t>
-            </a:r>
-            <a:pPr algn="l" indent="0" marL="0">
-              <a:lnSpc>
-                <a:spcPts val="1820"/>
-              </a:lnSpc>
-              <a:spcBef>
-                <a:spcPts val="300"/>
-              </a:spcBef>
-              <a:spcAft>
-                <a:spcPts val="300"/>
-              </a:spcAft>
-              <a:buNone/>
-            </a:pPr>
-            <a:r>
-              <a:rPr lang="en-US" sz="1300" dirty="0">
-                <a:solidFill>
-                  <a:srgbClr val="1C2833"/>
-                </a:solidFill>
-                <a:latin typeface="Georgia" pitchFamily="34" charset="0"/>
-                <a:ea typeface="Georgia" pitchFamily="34" charset="-122"/>
-                <a:cs typeface="Georgia" pitchFamily="34" charset="-120"/>
-              </a:rPr>
-              <a:t>ṣaḍ-rasa</a:t>
-            </a:r>
-            <a:pPr algn="l" indent="0" marL="0">
-              <a:lnSpc>
-                <a:spcPts val="1820"/>
-              </a:lnSpc>
-              <a:spcBef>
-                <a:spcPts val="300"/>
-              </a:spcBef>
-              <a:spcAft>
-                <a:spcPts val="300"/>
-              </a:spcAft>
-              <a:buNone/>
-            </a:pPr>
-            <a:r>
-              <a:rPr lang="en-US" sz="1300" i="1" dirty="0">
-                <a:solidFill>
-                  <a:srgbClr val="1C2833"/>
-                </a:solidFill>
-                <a:latin typeface="Georgia" pitchFamily="34" charset="0"/>
-                <a:ea typeface="Georgia" pitchFamily="34" charset="-122"/>
-                <a:cs typeface="Georgia" pitchFamily="34" charset="-120"/>
-              </a:rPr>
-              <a:t>):</a:t>
-            </a:r>
-            <a:pPr algn="l" indent="0" marL="0">
-              <a:lnSpc>
-                <a:spcPts val="1820"/>
-              </a:lnSpc>
-              <a:spcBef>
-                <a:spcPts val="300"/>
-              </a:spcBef>
-              <a:spcAft>
-                <a:spcPts val="300"/>
-              </a:spcAft>
-              <a:buNone/>
-            </a:pPr>
-            <a:r>
-              <a:rPr lang="en-US" sz="1300" dirty="0">
-                <a:solidFill>
-                  <a:srgbClr val="1C2833"/>
-                </a:solidFill>
-                <a:latin typeface="Georgia" pitchFamily="34" charset="0"/>
-                <a:ea typeface="Georgia" pitchFamily="34" charset="-122"/>
-                <a:cs typeface="Georgia" pitchFamily="34" charset="-120"/>
-              </a:rPr>
-              <a:t>*</a:t>
-            </a:r>
-            <a:endParaRPr lang="en-US" sz="1300" dirty="0"/>
-          </a:p>
-        </p:txBody>
-      </p:sp>
-      <p:sp>
-        <p:nvSpPr>
-          <p:cNvPr id="7" name="Text 5"/>
-          <p:cNvSpPr/>
-          <p:nvPr/>
-        </p:nvSpPr>
-        <p:spPr>
-          <a:xfrm>
-            <a:off x="692051" y="1343174"/>
-            <a:ext cx="7973389" cy="923925"/>
-          </a:xfrm>
-          <a:prstGeom prst="rect">
-            <a:avLst/>
-          </a:prstGeom>
-          <a:noFill/>
-          <a:ln/>
-        </p:spPr>
-        <p:txBody>
-          <a:bodyPr wrap="square" lIns="0" tIns="0" rIns="0" bIns="0" rtlCol="0" anchor="t"/>
-          <a:lstStyle/>
-          <a:p>
-            <a:pPr algn="l" indent="0" marL="0">
-              <a:lnSpc>
-                <a:spcPts val="1820"/>
-              </a:lnSpc>
-              <a:spcBef>
-                <a:spcPts val="300"/>
-              </a:spcBef>
-              <a:spcAft>
-                <a:spcPts val="300"/>
-              </a:spcAft>
-              <a:buNone/>
-            </a:pPr>
-            <a:r>
-              <a:rPr lang="en-US" sz="1300" dirty="0">
-                <a:solidFill>
-                  <a:srgbClr val="1C2833"/>
-                </a:solidFill>
-                <a:latin typeface="Georgia" pitchFamily="34" charset="0"/>
-                <a:ea typeface="Georgia" pitchFamily="34" charset="-122"/>
-                <a:cs typeface="Georgia" pitchFamily="34" charset="-120"/>
-              </a:rPr>
-              <a:t>| Taste | Example | Calms | Aggravates | |-------|---------|-------|------------| | </a:t>
-            </a:r>
-            <a:pPr algn="l" indent="0" marL="0">
-              <a:lnSpc>
-                <a:spcPts val="1820"/>
-              </a:lnSpc>
-              <a:spcBef>
-                <a:spcPts val="300"/>
-              </a:spcBef>
-              <a:spcAft>
-                <a:spcPts val="300"/>
-              </a:spcAft>
-              <a:buNone/>
-            </a:pPr>
-            <a:r>
-              <a:rPr lang="en-US" sz="1300" i="1" dirty="0">
-                <a:solidFill>
-                  <a:srgbClr val="1C2833"/>
-                </a:solidFill>
-                <a:latin typeface="Georgia" pitchFamily="34" charset="0"/>
-                <a:ea typeface="Georgia" pitchFamily="34" charset="-122"/>
-                <a:cs typeface="Georgia" pitchFamily="34" charset="-120"/>
+            <a:pPr algn="l" marL="342900" indent="-342900">
+              <a:lnSpc>
+                <a:spcPts val="1620"/>
+              </a:lnSpc>
+              <a:spcAft>
+                <a:spcPts val="300"/>
+              </a:spcAft>
+              <a:buSzPct val="100000"/>
+              <a:buChar char="•"/>
+            </a:pPr>
+            <a:r>
+              <a:rPr lang="en-US" sz="1200" i="1" dirty="0">
+                <a:solidFill>
+                  <a:srgbClr val="1C2833"/>
+                </a:solidFill>
+                <a:latin typeface="Arial" pitchFamily="34" charset="0"/>
+                <a:ea typeface="Arial" pitchFamily="34" charset="-122"/>
+                <a:cs typeface="Arial" pitchFamily="34" charset="-120"/>
               </a:rPr>
               <a:t>madhura</a:t>
             </a:r>
             <a:pPr algn="l" indent="0" marL="0">
               <a:lnSpc>
-                <a:spcPts val="1820"/>
-              </a:lnSpc>
-              <a:spcBef>
-                <a:spcPts val="300"/>
-              </a:spcBef>
-              <a:spcAft>
-                <a:spcPts val="300"/>
-              </a:spcAft>
-              <a:buNone/>
-            </a:pPr>
-            <a:r>
-              <a:rPr lang="en-US" sz="1300" dirty="0">
-                <a:solidFill>
-                  <a:srgbClr val="1C2833"/>
-                </a:solidFill>
-                <a:latin typeface="Georgia" pitchFamily="34" charset="0"/>
-                <a:ea typeface="Georgia" pitchFamily="34" charset="-122"/>
-                <a:cs typeface="Georgia" pitchFamily="34" charset="-120"/>
-              </a:rPr>
-              <a:t> (sweet) | rice, milk, jaggery | vāta, pitta | kapha | | </a:t>
-            </a:r>
-            <a:pPr algn="l" indent="0" marL="0">
-              <a:lnSpc>
-                <a:spcPts val="1820"/>
-              </a:lnSpc>
-              <a:spcBef>
-                <a:spcPts val="300"/>
-              </a:spcBef>
-              <a:spcAft>
-                <a:spcPts val="300"/>
-              </a:spcAft>
-              <a:buNone/>
-            </a:pPr>
-            <a:r>
-              <a:rPr lang="en-US" sz="1300" i="1" dirty="0">
-                <a:solidFill>
-                  <a:srgbClr val="1C2833"/>
-                </a:solidFill>
-                <a:latin typeface="Georgia" pitchFamily="34" charset="0"/>
-                <a:ea typeface="Georgia" pitchFamily="34" charset="-122"/>
-                <a:cs typeface="Georgia" pitchFamily="34" charset="-120"/>
+                <a:spcPts val="1620"/>
+              </a:lnSpc>
+              <a:spcAft>
+                <a:spcPts val="300"/>
+              </a:spcAft>
+              <a:buNone/>
+            </a:pPr>
+            <a:r>
+              <a:rPr lang="en-US" sz="1200" dirty="0">
+                <a:solidFill>
+                  <a:srgbClr val="1C2833"/>
+                </a:solidFill>
+                <a:latin typeface="Arial" pitchFamily="34" charset="0"/>
+                <a:ea typeface="Arial" pitchFamily="34" charset="-122"/>
+                <a:cs typeface="Arial" pitchFamily="34" charset="-120"/>
+              </a:rPr>
+              <a:t> — sweet · sugar, ghee, rice, milk · earth + water · </a:t>
+            </a:r>
+            <a:pPr algn="l" indent="0" marL="0">
+              <a:lnSpc>
+                <a:spcPts val="1620"/>
+              </a:lnSpc>
+              <a:spcAft>
+                <a:spcPts val="300"/>
+              </a:spcAft>
+              <a:buNone/>
+            </a:pPr>
+            <a:r>
+              <a:rPr lang="en-US" sz="1200" i="1" dirty="0">
+                <a:solidFill>
+                  <a:srgbClr val="1C2833"/>
+                </a:solidFill>
+                <a:latin typeface="Arial" pitchFamily="34" charset="0"/>
+                <a:ea typeface="Arial" pitchFamily="34" charset="-122"/>
+                <a:cs typeface="Arial" pitchFamily="34" charset="-120"/>
+              </a:rPr>
+              <a:t>kapha</a:t>
+            </a:r>
+            <a:pPr algn="l" indent="0" marL="0">
+              <a:lnSpc>
+                <a:spcPts val="1620"/>
+              </a:lnSpc>
+              <a:spcAft>
+                <a:spcPts val="300"/>
+              </a:spcAft>
+              <a:buNone/>
+            </a:pPr>
+            <a:r>
+              <a:rPr lang="en-US" sz="1200" dirty="0">
+                <a:solidFill>
+                  <a:srgbClr val="1C2833"/>
+                </a:solidFill>
+                <a:latin typeface="Arial" pitchFamily="34" charset="0"/>
+                <a:ea typeface="Arial" pitchFamily="34" charset="-122"/>
+                <a:cs typeface="Arial" pitchFamily="34" charset="-120"/>
+              </a:rPr>
+              <a:t> · </a:t>
+            </a:r>
+            <a:pPr algn="l" indent="0" marL="0">
+              <a:lnSpc>
+                <a:spcPts val="1620"/>
+              </a:lnSpc>
+              <a:spcAft>
+                <a:spcPts val="300"/>
+              </a:spcAft>
+              <a:buNone/>
+            </a:pPr>
+            <a:r>
+              <a:rPr lang="en-US" sz="1200" i="1" dirty="0">
+                <a:solidFill>
+                  <a:srgbClr val="1C2833"/>
+                </a:solidFill>
+                <a:latin typeface="Arial" pitchFamily="34" charset="0"/>
+                <a:ea typeface="Arial" pitchFamily="34" charset="-122"/>
+                <a:cs typeface="Arial" pitchFamily="34" charset="-120"/>
+              </a:rPr>
+              <a:t>vāta, pitta</a:t>
+            </a:r>
+            <a:endParaRPr lang="en-US" sz="1200" dirty="0"/>
+          </a:p>
+          <a:p>
+            <a:pPr algn="l" marL="342900" indent="-342900">
+              <a:lnSpc>
+                <a:spcPts val="1620"/>
+              </a:lnSpc>
+              <a:spcAft>
+                <a:spcPts val="300"/>
+              </a:spcAft>
+              <a:buSzPct val="100000"/>
+              <a:buChar char="•"/>
+            </a:pPr>
+            <a:r>
+              <a:rPr lang="en-US" sz="1200" i="1" dirty="0">
+                <a:solidFill>
+                  <a:srgbClr val="1C2833"/>
+                </a:solidFill>
+                <a:latin typeface="Arial" pitchFamily="34" charset="0"/>
+                <a:ea typeface="Arial" pitchFamily="34" charset="-122"/>
+                <a:cs typeface="Arial" pitchFamily="34" charset="-120"/>
               </a:rPr>
               <a:t>amla</a:t>
             </a:r>
             <a:pPr algn="l" indent="0" marL="0">
               <a:lnSpc>
-                <a:spcPts val="1820"/>
-              </a:lnSpc>
-              <a:spcBef>
-                <a:spcPts val="300"/>
-              </a:spcBef>
-              <a:spcAft>
-                <a:spcPts val="300"/>
-              </a:spcAft>
-              <a:buNone/>
-            </a:pPr>
-            <a:r>
-              <a:rPr lang="en-US" sz="1300" dirty="0">
-                <a:solidFill>
-                  <a:srgbClr val="1C2833"/>
-                </a:solidFill>
-                <a:latin typeface="Georgia" pitchFamily="34" charset="0"/>
-                <a:ea typeface="Georgia" pitchFamily="34" charset="-122"/>
-                <a:cs typeface="Georgia" pitchFamily="34" charset="-120"/>
-              </a:rPr>
-              <a:t> (sour) | lemon, yoghurt | vāta | pitta, kapha | | </a:t>
-            </a:r>
-            <a:pPr algn="l" indent="0" marL="0">
-              <a:lnSpc>
-                <a:spcPts val="1820"/>
-              </a:lnSpc>
-              <a:spcBef>
-                <a:spcPts val="300"/>
-              </a:spcBef>
-              <a:spcAft>
-                <a:spcPts val="300"/>
-              </a:spcAft>
-              <a:buNone/>
-            </a:pPr>
-            <a:r>
-              <a:rPr lang="en-US" sz="1300" i="1" dirty="0">
-                <a:solidFill>
-                  <a:srgbClr val="1C2833"/>
-                </a:solidFill>
-                <a:latin typeface="Georgia" pitchFamily="34" charset="0"/>
-                <a:ea typeface="Georgia" pitchFamily="34" charset="-122"/>
-                <a:cs typeface="Georgia" pitchFamily="34" charset="-120"/>
+                <a:spcPts val="1620"/>
+              </a:lnSpc>
+              <a:spcAft>
+                <a:spcPts val="300"/>
+              </a:spcAft>
+              <a:buNone/>
+            </a:pPr>
+            <a:r>
+              <a:rPr lang="en-US" sz="1200" dirty="0">
+                <a:solidFill>
+                  <a:srgbClr val="1C2833"/>
+                </a:solidFill>
+                <a:latin typeface="Arial" pitchFamily="34" charset="0"/>
+                <a:ea typeface="Arial" pitchFamily="34" charset="-122"/>
+                <a:cs typeface="Arial" pitchFamily="34" charset="-120"/>
+              </a:rPr>
+              <a:t> — sour · lemon, yoghurt, vinegar · earth + fire · </a:t>
+            </a:r>
+            <a:pPr algn="l" indent="0" marL="0">
+              <a:lnSpc>
+                <a:spcPts val="1620"/>
+              </a:lnSpc>
+              <a:spcAft>
+                <a:spcPts val="300"/>
+              </a:spcAft>
+              <a:buNone/>
+            </a:pPr>
+            <a:r>
+              <a:rPr lang="en-US" sz="1200" i="1" dirty="0">
+                <a:solidFill>
+                  <a:srgbClr val="1C2833"/>
+                </a:solidFill>
+                <a:latin typeface="Arial" pitchFamily="34" charset="0"/>
+                <a:ea typeface="Arial" pitchFamily="34" charset="-122"/>
+                <a:cs typeface="Arial" pitchFamily="34" charset="-120"/>
+              </a:rPr>
+              <a:t>pitta, kapha</a:t>
+            </a:r>
+            <a:pPr algn="l" indent="0" marL="0">
+              <a:lnSpc>
+                <a:spcPts val="1620"/>
+              </a:lnSpc>
+              <a:spcAft>
+                <a:spcPts val="300"/>
+              </a:spcAft>
+              <a:buNone/>
+            </a:pPr>
+            <a:r>
+              <a:rPr lang="en-US" sz="1200" dirty="0">
+                <a:solidFill>
+                  <a:srgbClr val="1C2833"/>
+                </a:solidFill>
+                <a:latin typeface="Arial" pitchFamily="34" charset="0"/>
+                <a:ea typeface="Arial" pitchFamily="34" charset="-122"/>
+                <a:cs typeface="Arial" pitchFamily="34" charset="-120"/>
+              </a:rPr>
+              <a:t> · </a:t>
+            </a:r>
+            <a:pPr algn="l" indent="0" marL="0">
+              <a:lnSpc>
+                <a:spcPts val="1620"/>
+              </a:lnSpc>
+              <a:spcAft>
+                <a:spcPts val="300"/>
+              </a:spcAft>
+              <a:buNone/>
+            </a:pPr>
+            <a:r>
+              <a:rPr lang="en-US" sz="1200" i="1" dirty="0">
+                <a:solidFill>
+                  <a:srgbClr val="1C2833"/>
+                </a:solidFill>
+                <a:latin typeface="Arial" pitchFamily="34" charset="0"/>
+                <a:ea typeface="Arial" pitchFamily="34" charset="-122"/>
+                <a:cs typeface="Arial" pitchFamily="34" charset="-120"/>
+              </a:rPr>
+              <a:t>vāta</a:t>
+            </a:r>
+            <a:endParaRPr lang="en-US" sz="1200" dirty="0"/>
+          </a:p>
+          <a:p>
+            <a:pPr algn="l" marL="342900" indent="-342900">
+              <a:lnSpc>
+                <a:spcPts val="1620"/>
+              </a:lnSpc>
+              <a:spcAft>
+                <a:spcPts val="300"/>
+              </a:spcAft>
+              <a:buSzPct val="100000"/>
+              <a:buChar char="•"/>
+            </a:pPr>
+            <a:r>
+              <a:rPr lang="en-US" sz="1200" i="1" dirty="0">
+                <a:solidFill>
+                  <a:srgbClr val="1C2833"/>
+                </a:solidFill>
+                <a:latin typeface="Arial" pitchFamily="34" charset="0"/>
+                <a:ea typeface="Arial" pitchFamily="34" charset="-122"/>
+                <a:cs typeface="Arial" pitchFamily="34" charset="-120"/>
               </a:rPr>
               <a:t>lavaṇa</a:t>
             </a:r>
             <a:pPr algn="l" indent="0" marL="0">
               <a:lnSpc>
-                <a:spcPts val="1820"/>
-              </a:lnSpc>
-              <a:spcBef>
-                <a:spcPts val="300"/>
-              </a:spcBef>
-              <a:spcAft>
-                <a:spcPts val="300"/>
-              </a:spcAft>
-              <a:buNone/>
-            </a:pPr>
-            <a:r>
-              <a:rPr lang="en-US" sz="1300" dirty="0">
-                <a:solidFill>
-                  <a:srgbClr val="1C2833"/>
-                </a:solidFill>
-                <a:latin typeface="Georgia" pitchFamily="34" charset="0"/>
-                <a:ea typeface="Georgia" pitchFamily="34" charset="-122"/>
-                <a:cs typeface="Georgia" pitchFamily="34" charset="-120"/>
-              </a:rPr>
-              <a:t> (salty) | rock salt | vāta | pitta, kapha | | </a:t>
-            </a:r>
-            <a:pPr algn="l" indent="0" marL="0">
-              <a:lnSpc>
-                <a:spcPts val="1820"/>
-              </a:lnSpc>
-              <a:spcBef>
-                <a:spcPts val="300"/>
-              </a:spcBef>
-              <a:spcAft>
-                <a:spcPts val="300"/>
-              </a:spcAft>
-              <a:buNone/>
-            </a:pPr>
-            <a:r>
-              <a:rPr lang="en-US" sz="1300" i="1" dirty="0">
-                <a:solidFill>
-                  <a:srgbClr val="1C2833"/>
-                </a:solidFill>
-                <a:latin typeface="Georgia" pitchFamily="34" charset="0"/>
-                <a:ea typeface="Georgia" pitchFamily="34" charset="-122"/>
-                <a:cs typeface="Georgia" pitchFamily="34" charset="-120"/>
+                <a:spcPts val="1620"/>
+              </a:lnSpc>
+              <a:spcAft>
+                <a:spcPts val="300"/>
+              </a:spcAft>
+              <a:buNone/>
+            </a:pPr>
+            <a:r>
+              <a:rPr lang="en-US" sz="1200" dirty="0">
+                <a:solidFill>
+                  <a:srgbClr val="1C2833"/>
+                </a:solidFill>
+                <a:latin typeface="Arial" pitchFamily="34" charset="0"/>
+                <a:ea typeface="Arial" pitchFamily="34" charset="-122"/>
+                <a:cs typeface="Arial" pitchFamily="34" charset="-120"/>
+              </a:rPr>
+              <a:t> — salty · rock salt, sea salt · water + fire · </a:t>
+            </a:r>
+            <a:pPr algn="l" indent="0" marL="0">
+              <a:lnSpc>
+                <a:spcPts val="1620"/>
+              </a:lnSpc>
+              <a:spcAft>
+                <a:spcPts val="300"/>
+              </a:spcAft>
+              <a:buNone/>
+            </a:pPr>
+            <a:r>
+              <a:rPr lang="en-US" sz="1200" i="1" dirty="0">
+                <a:solidFill>
+                  <a:srgbClr val="1C2833"/>
+                </a:solidFill>
+                <a:latin typeface="Arial" pitchFamily="34" charset="0"/>
+                <a:ea typeface="Arial" pitchFamily="34" charset="-122"/>
+                <a:cs typeface="Arial" pitchFamily="34" charset="-120"/>
+              </a:rPr>
+              <a:t>pitta, kapha</a:t>
+            </a:r>
+            <a:pPr algn="l" indent="0" marL="0">
+              <a:lnSpc>
+                <a:spcPts val="1620"/>
+              </a:lnSpc>
+              <a:spcAft>
+                <a:spcPts val="300"/>
+              </a:spcAft>
+              <a:buNone/>
+            </a:pPr>
+            <a:r>
+              <a:rPr lang="en-US" sz="1200" dirty="0">
+                <a:solidFill>
+                  <a:srgbClr val="1C2833"/>
+                </a:solidFill>
+                <a:latin typeface="Arial" pitchFamily="34" charset="0"/>
+                <a:ea typeface="Arial" pitchFamily="34" charset="-122"/>
+                <a:cs typeface="Arial" pitchFamily="34" charset="-120"/>
+              </a:rPr>
+              <a:t> · </a:t>
+            </a:r>
+            <a:pPr algn="l" indent="0" marL="0">
+              <a:lnSpc>
+                <a:spcPts val="1620"/>
+              </a:lnSpc>
+              <a:spcAft>
+                <a:spcPts val="300"/>
+              </a:spcAft>
+              <a:buNone/>
+            </a:pPr>
+            <a:r>
+              <a:rPr lang="en-US" sz="1200" i="1" dirty="0">
+                <a:solidFill>
+                  <a:srgbClr val="1C2833"/>
+                </a:solidFill>
+                <a:latin typeface="Arial" pitchFamily="34" charset="0"/>
+                <a:ea typeface="Arial" pitchFamily="34" charset="-122"/>
+                <a:cs typeface="Arial" pitchFamily="34" charset="-120"/>
+              </a:rPr>
+              <a:t>vāta</a:t>
+            </a:r>
+            <a:endParaRPr lang="en-US" sz="1200" dirty="0"/>
+          </a:p>
+          <a:p>
+            <a:pPr algn="l" marL="342900" indent="-342900">
+              <a:lnSpc>
+                <a:spcPts val="1620"/>
+              </a:lnSpc>
+              <a:spcAft>
+                <a:spcPts val="300"/>
+              </a:spcAft>
+              <a:buSzPct val="100000"/>
+              <a:buChar char="•"/>
+            </a:pPr>
+            <a:r>
+              <a:rPr lang="en-US" sz="1200" i="1" dirty="0">
+                <a:solidFill>
+                  <a:srgbClr val="1C2833"/>
+                </a:solidFill>
+                <a:latin typeface="Arial" pitchFamily="34" charset="0"/>
+                <a:ea typeface="Arial" pitchFamily="34" charset="-122"/>
+                <a:cs typeface="Arial" pitchFamily="34" charset="-120"/>
               </a:rPr>
               <a:t>kaṭu</a:t>
             </a:r>
             <a:pPr algn="l" indent="0" marL="0">
               <a:lnSpc>
-                <a:spcPts val="1820"/>
-              </a:lnSpc>
-              <a:spcBef>
-                <a:spcPts val="300"/>
-              </a:spcBef>
-              <a:spcAft>
-                <a:spcPts val="300"/>
-              </a:spcAft>
-              <a:buNone/>
-            </a:pPr>
-            <a:r>
-              <a:rPr lang="en-US" sz="1300" dirty="0">
-                <a:solidFill>
-                  <a:srgbClr val="1C2833"/>
-                </a:solidFill>
-                <a:latin typeface="Georgia" pitchFamily="34" charset="0"/>
-                <a:ea typeface="Georgia" pitchFamily="34" charset="-122"/>
-                <a:cs typeface="Georgia" pitchFamily="34" charset="-120"/>
-              </a:rPr>
-              <a:t> (pungent) | chili, ginger | kapha | vāta, pitta | | </a:t>
-            </a:r>
-            <a:pPr algn="l" indent="0" marL="0">
-              <a:lnSpc>
-                <a:spcPts val="1820"/>
-              </a:lnSpc>
-              <a:spcBef>
-                <a:spcPts val="300"/>
-              </a:spcBef>
-              <a:spcAft>
-                <a:spcPts val="300"/>
-              </a:spcAft>
-              <a:buNone/>
-            </a:pPr>
-            <a:r>
-              <a:rPr lang="en-US" sz="1300" i="1" dirty="0">
-                <a:solidFill>
-                  <a:srgbClr val="1C2833"/>
-                </a:solidFill>
-                <a:latin typeface="Georgia" pitchFamily="34" charset="0"/>
-                <a:ea typeface="Georgia" pitchFamily="34" charset="-122"/>
-                <a:cs typeface="Georgia" pitchFamily="34" charset="-120"/>
+                <a:spcPts val="1620"/>
+              </a:lnSpc>
+              <a:spcAft>
+                <a:spcPts val="300"/>
+              </a:spcAft>
+              <a:buNone/>
+            </a:pPr>
+            <a:r>
+              <a:rPr lang="en-US" sz="1200" dirty="0">
+                <a:solidFill>
+                  <a:srgbClr val="1C2833"/>
+                </a:solidFill>
+                <a:latin typeface="Arial" pitchFamily="34" charset="0"/>
+                <a:ea typeface="Arial" pitchFamily="34" charset="-122"/>
+                <a:cs typeface="Arial" pitchFamily="34" charset="-120"/>
+              </a:rPr>
+              <a:t> — pungent · chili, ginger, pepper, garlic · fire + air · </a:t>
+            </a:r>
+            <a:pPr algn="l" indent="0" marL="0">
+              <a:lnSpc>
+                <a:spcPts val="1620"/>
+              </a:lnSpc>
+              <a:spcAft>
+                <a:spcPts val="300"/>
+              </a:spcAft>
+              <a:buNone/>
+            </a:pPr>
+            <a:r>
+              <a:rPr lang="en-US" sz="1200" i="1" dirty="0">
+                <a:solidFill>
+                  <a:srgbClr val="1C2833"/>
+                </a:solidFill>
+                <a:latin typeface="Arial" pitchFamily="34" charset="0"/>
+                <a:ea typeface="Arial" pitchFamily="34" charset="-122"/>
+                <a:cs typeface="Arial" pitchFamily="34" charset="-120"/>
+              </a:rPr>
+              <a:t>pitta, vāta</a:t>
+            </a:r>
+            <a:pPr algn="l" indent="0" marL="0">
+              <a:lnSpc>
+                <a:spcPts val="1620"/>
+              </a:lnSpc>
+              <a:spcAft>
+                <a:spcPts val="300"/>
+              </a:spcAft>
+              <a:buNone/>
+            </a:pPr>
+            <a:r>
+              <a:rPr lang="en-US" sz="1200" dirty="0">
+                <a:solidFill>
+                  <a:srgbClr val="1C2833"/>
+                </a:solidFill>
+                <a:latin typeface="Arial" pitchFamily="34" charset="0"/>
+                <a:ea typeface="Arial" pitchFamily="34" charset="-122"/>
+                <a:cs typeface="Arial" pitchFamily="34" charset="-120"/>
+              </a:rPr>
+              <a:t> · </a:t>
+            </a:r>
+            <a:pPr algn="l" indent="0" marL="0">
+              <a:lnSpc>
+                <a:spcPts val="1620"/>
+              </a:lnSpc>
+              <a:spcAft>
+                <a:spcPts val="300"/>
+              </a:spcAft>
+              <a:buNone/>
+            </a:pPr>
+            <a:r>
+              <a:rPr lang="en-US" sz="1200" i="1" dirty="0">
+                <a:solidFill>
+                  <a:srgbClr val="1C2833"/>
+                </a:solidFill>
+                <a:latin typeface="Arial" pitchFamily="34" charset="0"/>
+                <a:ea typeface="Arial" pitchFamily="34" charset="-122"/>
+                <a:cs typeface="Arial" pitchFamily="34" charset="-120"/>
+              </a:rPr>
+              <a:t>kapha</a:t>
+            </a:r>
+            <a:endParaRPr lang="en-US" sz="1200" dirty="0"/>
+          </a:p>
+          <a:p>
+            <a:pPr algn="l" marL="342900" indent="-342900">
+              <a:lnSpc>
+                <a:spcPts val="1620"/>
+              </a:lnSpc>
+              <a:spcAft>
+                <a:spcPts val="300"/>
+              </a:spcAft>
+              <a:buSzPct val="100000"/>
+              <a:buChar char="•"/>
+            </a:pPr>
+            <a:r>
+              <a:rPr lang="en-US" sz="1200" i="1" dirty="0">
+                <a:solidFill>
+                  <a:srgbClr val="1C2833"/>
+                </a:solidFill>
+                <a:latin typeface="Arial" pitchFamily="34" charset="0"/>
+                <a:ea typeface="Arial" pitchFamily="34" charset="-122"/>
+                <a:cs typeface="Arial" pitchFamily="34" charset="-120"/>
               </a:rPr>
               <a:t>tikta</a:t>
             </a:r>
             <a:pPr algn="l" indent="0" marL="0">
               <a:lnSpc>
-                <a:spcPts val="1820"/>
-              </a:lnSpc>
-              <a:spcBef>
-                <a:spcPts val="300"/>
-              </a:spcBef>
-              <a:spcAft>
-                <a:spcPts val="300"/>
-              </a:spcAft>
-              <a:buNone/>
-            </a:pPr>
-            <a:r>
-              <a:rPr lang="en-US" sz="1300" dirty="0">
-                <a:solidFill>
-                  <a:srgbClr val="1C2833"/>
-                </a:solidFill>
-                <a:latin typeface="Georgia" pitchFamily="34" charset="0"/>
-                <a:ea typeface="Georgia" pitchFamily="34" charset="-122"/>
-                <a:cs typeface="Georgia" pitchFamily="34" charset="-120"/>
-              </a:rPr>
-              <a:t> (bitter) | methi, neem | pitta, kapha | vāta | | </a:t>
-            </a:r>
-            <a:pPr algn="l" indent="0" marL="0">
-              <a:lnSpc>
-                <a:spcPts val="1820"/>
-              </a:lnSpc>
-              <a:spcBef>
-                <a:spcPts val="300"/>
-              </a:spcBef>
-              <a:spcAft>
-                <a:spcPts val="300"/>
-              </a:spcAft>
-              <a:buNone/>
-            </a:pPr>
-            <a:r>
-              <a:rPr lang="en-US" sz="1300" i="1" dirty="0">
-                <a:solidFill>
-                  <a:srgbClr val="1C2833"/>
-                </a:solidFill>
-                <a:latin typeface="Georgia" pitchFamily="34" charset="0"/>
-                <a:ea typeface="Georgia" pitchFamily="34" charset="-122"/>
-                <a:cs typeface="Georgia" pitchFamily="34" charset="-120"/>
-              </a:rPr>
-              <a:t>kaṣāya</a:t>
-            </a:r>
-            <a:pPr algn="l" indent="0" marL="0">
-              <a:lnSpc>
-                <a:spcPts val="1820"/>
-              </a:lnSpc>
-              <a:spcBef>
-                <a:spcPts val="300"/>
-              </a:spcBef>
-              <a:spcAft>
-                <a:spcPts val="300"/>
-              </a:spcAft>
-              <a:buNone/>
-            </a:pPr>
-            <a:r>
-              <a:rPr lang="en-US" sz="1300" dirty="0">
-                <a:solidFill>
-                  <a:srgbClr val="1C2833"/>
-                </a:solidFill>
-                <a:latin typeface="Georgia" pitchFamily="34" charset="0"/>
-                <a:ea typeface="Georgia" pitchFamily="34" charset="-122"/>
-                <a:cs typeface="Georgia" pitchFamily="34" charset="-120"/>
-              </a:rPr>
-              <a:t> (astringent) | unripe banana, black tea | pitta, kapha | vāta |</a:t>
-            </a:r>
-            <a:endParaRPr lang="en-US" sz="1300" dirty="0"/>
-          </a:p>
-        </p:txBody>
-      </p:sp>
-      <p:sp>
-        <p:nvSpPr>
-          <p:cNvPr id="8" name="Text 6"/>
-          <p:cNvSpPr/>
-          <p:nvPr/>
-        </p:nvSpPr>
-        <p:spPr>
-          <a:xfrm>
-            <a:off x="692051" y="2305199"/>
-            <a:ext cx="7973389" cy="461963"/>
-          </a:xfrm>
-          <a:prstGeom prst="rect">
-            <a:avLst/>
-          </a:prstGeom>
-          <a:noFill/>
-          <a:ln/>
-        </p:spPr>
-        <p:txBody>
-          <a:bodyPr wrap="square" lIns="0" tIns="0" rIns="0" bIns="0" rtlCol="0" anchor="t"/>
-          <a:lstStyle/>
-          <a:p>
-            <a:pPr algn="l" indent="0" marL="0">
-              <a:lnSpc>
-                <a:spcPts val="1820"/>
-              </a:lnSpc>
-              <a:spcBef>
-                <a:spcPts val="300"/>
-              </a:spcBef>
-              <a:spcAft>
-                <a:spcPts val="300"/>
-              </a:spcAft>
-              <a:buNone/>
-            </a:pPr>
-            <a:r>
-              <a:rPr lang="en-US" sz="1300" i="1" dirty="0">
-                <a:solidFill>
-                  <a:srgbClr val="1C2833"/>
-                </a:solidFill>
-                <a:latin typeface="Georgia" pitchFamily="34" charset="0"/>
-                <a:ea typeface="Georgia" pitchFamily="34" charset="-122"/>
-                <a:cs typeface="Georgia" pitchFamily="34" charset="-120"/>
-              </a:rPr>
-              <a:t>A balanced meal touches all six. Indian thālīs often do this naturally (rice, dāl, vegetable, pickle, salad, raita, end-of-meal pān or yoghurt).</a:t>
-            </a:r>
-            <a:endParaRPr lang="en-US" sz="1300" dirty="0"/>
-          </a:p>
-        </p:txBody>
-      </p:sp>
-      <p:sp>
-        <p:nvSpPr>
-          <p:cNvPr id="9" name="Text 7"/>
+                <a:spcPts val="1620"/>
+              </a:lnSpc>
+              <a:spcAft>
+                <a:spcPts val="300"/>
+              </a:spcAft>
+              <a:buNone/>
+            </a:pPr>
+            <a:r>
+              <a:rPr lang="en-US" sz="1200" dirty="0">
+                <a:solidFill>
+                  <a:srgbClr val="1C2833"/>
+                </a:solidFill>
+                <a:latin typeface="Arial" pitchFamily="34" charset="0"/>
+                <a:ea typeface="Arial" pitchFamily="34" charset="-122"/>
+                <a:cs typeface="Arial" pitchFamily="34" charset="-120"/>
+              </a:rPr>
+              <a:t> — bitter · neem, turmeric, methi, dark chocolate · air + space · </a:t>
+            </a:r>
+            <a:pPr algn="l" indent="0" marL="0">
+              <a:lnSpc>
+                <a:spcPts val="1620"/>
+              </a:lnSpc>
+              <a:spcAft>
+                <a:spcPts val="300"/>
+              </a:spcAft>
+              <a:buNone/>
+            </a:pPr>
+            <a:r>
+              <a:rPr lang="en-US" sz="1200" i="1" dirty="0">
+                <a:solidFill>
+                  <a:srgbClr val="1C2833"/>
+                </a:solidFill>
+                <a:latin typeface="Arial" pitchFamily="34" charset="0"/>
+                <a:ea typeface="Arial" pitchFamily="34" charset="-122"/>
+                <a:cs typeface="Arial" pitchFamily="34" charset="-120"/>
+              </a:rPr>
+              <a:t>vāta</a:t>
+            </a:r>
+            <a:pPr algn="l" indent="0" marL="0">
+              <a:lnSpc>
+                <a:spcPts val="1620"/>
+              </a:lnSpc>
+              <a:spcAft>
+                <a:spcPts val="300"/>
+              </a:spcAft>
+              <a:buNone/>
+            </a:pPr>
+            <a:r>
+              <a:rPr lang="en-US" sz="1200" dirty="0">
+                <a:solidFill>
+                  <a:srgbClr val="1C2833"/>
+                </a:solidFill>
+                <a:latin typeface="Arial" pitchFamily="34" charset="0"/>
+                <a:ea typeface="Arial" pitchFamily="34" charset="-122"/>
+                <a:cs typeface="Arial" pitchFamily="34" charset="-120"/>
+              </a:rPr>
+              <a:t> · </a:t>
+            </a:r>
+            <a:pPr algn="l" indent="0" marL="0">
+              <a:lnSpc>
+                <a:spcPts val="1620"/>
+              </a:lnSpc>
+              <a:spcAft>
+                <a:spcPts val="300"/>
+              </a:spcAft>
+              <a:buNone/>
+            </a:pPr>
+            <a:r>
+              <a:rPr lang="en-US" sz="1200" i="1" dirty="0">
+                <a:solidFill>
+                  <a:srgbClr val="1C2833"/>
+                </a:solidFill>
+                <a:latin typeface="Arial" pitchFamily="34" charset="0"/>
+                <a:ea typeface="Arial" pitchFamily="34" charset="-122"/>
+                <a:cs typeface="Arial" pitchFamily="34" charset="-120"/>
+              </a:rPr>
+              <a:t>pitta, kapha</a:t>
+            </a:r>
+            <a:endParaRPr lang="en-US" sz="1200" dirty="0"/>
+          </a:p>
+        </p:txBody>
+      </p:sp>
+      <p:sp>
+        <p:nvSpPr>
+          <p:cNvPr id="5" name="Text 3"/>
           <p:cNvSpPr/>
           <p:nvPr/>
         </p:nvSpPr>
@@ -5948,7 +9154,7 @@
                 <a:ea typeface="Georgia" pitchFamily="34" charset="-122"/>
                 <a:cs typeface="Georgia" pitchFamily="34" charset="-120"/>
               </a:rPr>
-              <a:t>Homework</a:t>
+              <a:t>Core (15 min) (cont.)</a:t>
             </a:r>
             <a:endParaRPr lang="en-US" sz="1800" dirty="0"/>
           </a:p>
@@ -5962,8 +9168,8 @@
         </p:nvSpPr>
         <p:spPr>
           <a:xfrm>
-            <a:off x="406301" y="870942"/>
-            <a:ext cx="8498026" cy="426541"/>
+            <a:off x="634901" y="883593"/>
+            <a:ext cx="8102798" cy="281880"/>
           </a:xfrm>
           <a:prstGeom prst="rect">
             <a:avLst/>
@@ -5975,6 +9181,132 @@
           <a:bodyPr wrap="square" lIns="0" tIns="0" rIns="0" bIns="0" rtlCol="0" anchor="t"/>
           <a:lstStyle/>
           <a:p>
+            <a:pPr algn="l" marL="342900" indent="-342900">
+              <a:lnSpc>
+                <a:spcPts val="1620"/>
+              </a:lnSpc>
+              <a:spcAft>
+                <a:spcPts val="300"/>
+              </a:spcAft>
+              <a:buSzPct val="100000"/>
+              <a:buChar char="•"/>
+            </a:pPr>
+            <a:r>
+              <a:rPr lang="en-US" sz="1200" i="1" dirty="0">
+                <a:solidFill>
+                  <a:srgbClr val="1C2833"/>
+                </a:solidFill>
+                <a:latin typeface="Arial" pitchFamily="34" charset="0"/>
+                <a:ea typeface="Arial" pitchFamily="34" charset="-122"/>
+                <a:cs typeface="Arial" pitchFamily="34" charset="-120"/>
+              </a:rPr>
+              <a:t>kaṣāya</a:t>
+            </a:r>
+            <a:pPr algn="l" indent="0" marL="0">
+              <a:lnSpc>
+                <a:spcPts val="1620"/>
+              </a:lnSpc>
+              <a:spcAft>
+                <a:spcPts val="300"/>
+              </a:spcAft>
+              <a:buNone/>
+            </a:pPr>
+            <a:r>
+              <a:rPr lang="en-US" sz="1200" dirty="0">
+                <a:solidFill>
+                  <a:srgbClr val="1C2833"/>
+                </a:solidFill>
+                <a:latin typeface="Arial" pitchFamily="34" charset="0"/>
+                <a:ea typeface="Arial" pitchFamily="34" charset="-122"/>
+                <a:cs typeface="Arial" pitchFamily="34" charset="-120"/>
+              </a:rPr>
+              <a:t> — astringent · unripe banana, pomegranate, black tea · air + earth · </a:t>
+            </a:r>
+            <a:pPr algn="l" indent="0" marL="0">
+              <a:lnSpc>
+                <a:spcPts val="1620"/>
+              </a:lnSpc>
+              <a:spcAft>
+                <a:spcPts val="300"/>
+              </a:spcAft>
+              <a:buNone/>
+            </a:pPr>
+            <a:r>
+              <a:rPr lang="en-US" sz="1200" i="1" dirty="0">
+                <a:solidFill>
+                  <a:srgbClr val="1C2833"/>
+                </a:solidFill>
+                <a:latin typeface="Arial" pitchFamily="34" charset="0"/>
+                <a:ea typeface="Arial" pitchFamily="34" charset="-122"/>
+                <a:cs typeface="Arial" pitchFamily="34" charset="-120"/>
+              </a:rPr>
+              <a:t>vāta</a:t>
+            </a:r>
+            <a:pPr algn="l" indent="0" marL="0">
+              <a:lnSpc>
+                <a:spcPts val="1620"/>
+              </a:lnSpc>
+              <a:spcAft>
+                <a:spcPts val="300"/>
+              </a:spcAft>
+              <a:buNone/>
+            </a:pPr>
+            <a:r>
+              <a:rPr lang="en-US" sz="1200" dirty="0">
+                <a:solidFill>
+                  <a:srgbClr val="1C2833"/>
+                </a:solidFill>
+                <a:latin typeface="Arial" pitchFamily="34" charset="0"/>
+                <a:ea typeface="Arial" pitchFamily="34" charset="-122"/>
+                <a:cs typeface="Arial" pitchFamily="34" charset="-120"/>
+              </a:rPr>
+              <a:t> · </a:t>
+            </a:r>
+            <a:pPr algn="l" indent="0" marL="0">
+              <a:lnSpc>
+                <a:spcPts val="1620"/>
+              </a:lnSpc>
+              <a:spcAft>
+                <a:spcPts val="300"/>
+              </a:spcAft>
+              <a:buNone/>
+            </a:pPr>
+            <a:r>
+              <a:rPr lang="en-US" sz="1200" i="1" dirty="0">
+                <a:solidFill>
+                  <a:srgbClr val="1C2833"/>
+                </a:solidFill>
+                <a:latin typeface="Arial" pitchFamily="34" charset="0"/>
+                <a:ea typeface="Arial" pitchFamily="34" charset="-122"/>
+                <a:cs typeface="Arial" pitchFamily="34" charset="-120"/>
+              </a:rPr>
+              <a:t>pitta, kapha</a:t>
+            </a:r>
+            <a:endParaRPr lang="en-US" sz="1200" dirty="0"/>
+          </a:p>
+        </p:txBody>
+      </p:sp>
+      <p:sp>
+        <p:nvSpPr>
+          <p:cNvPr id="5" name="Text 3"/>
+          <p:cNvSpPr/>
+          <p:nvPr/>
+        </p:nvSpPr>
+        <p:spPr>
+          <a:xfrm>
+            <a:off x="406301" y="1254323"/>
+            <a:ext cx="8498026" cy="213271"/>
+          </a:xfrm>
+          <a:prstGeom prst="rect">
+            <a:avLst/>
+          </a:prstGeom>
+          <a:noFill/>
+          <a:ln/>
+        </p:spPr>
+        <p:txBody>
+          <a:bodyPr wrap="square" lIns="0" tIns="0" rIns="0" bIns="0" rtlCol="0" anchor="t"/>
+          <a:lstStyle/>
+          <a:p>
             <a:pPr algn="l" indent="0" marL="0">
               <a:lnSpc>
                 <a:spcPts val="1680"/>
@@ -5988,15 +9320,15 @@
               <a:buNone/>
             </a:pPr>
             <a:r>
-              <a:rPr lang="en-US" sz="1200" dirty="0">
-                <a:solidFill>
-                  <a:srgbClr val="1C2833"/>
-                </a:solidFill>
-                <a:latin typeface="Arial" pitchFamily="34" charset="0"/>
-                <a:ea typeface="Arial" pitchFamily="34" charset="-122"/>
-                <a:cs typeface="Arial" pitchFamily="34" charset="-120"/>
-              </a:rPr>
-              <a:t>– At dinner tonight, count how many of the six tastes are on your plate. Note which are missing. (No need to "fix" anything — just observe.)</a:t>
+              <a:rPr lang="en-US" sz="1200" i="1" dirty="0">
+                <a:solidFill>
+                  <a:srgbClr val="1C2833"/>
+                </a:solidFill>
+                <a:latin typeface="Arial" pitchFamily="34" charset="0"/>
+                <a:ea typeface="Arial" pitchFamily="34" charset="-122"/>
+                <a:cs typeface="Arial" pitchFamily="34" charset="-120"/>
+              </a:rPr>
+              <a:t>"Notice the pattern. Each taste calms exactly two doṣas and aggravates one or two."</a:t>
             </a:r>
             <a:endParaRPr lang="en-US" sz="1200" dirty="0"/>
           </a:p>
@@ -6004,7 +9336,7 @@
       </p:sp>
       <p:sp>
         <p:nvSpPr>
-          <p:cNvPr id="5" name="Text 3"/>
+          <p:cNvPr id="6" name="Text 4"/>
           <p:cNvSpPr/>
           <p:nvPr/>
         </p:nvSpPr>
